--- a/curriculum/M01/W02/L02/slides.pptx
+++ b/curriculum/M01/W02/L02/slides.pptx
@@ -39,24 +39,6 @@
     <p:sldId id="287" r:id="rId39"/>
     <p:sldId id="288" r:id="rId40"/>
     <p:sldId id="289" r:id="rId41"/>
-    <p:sldId id="290" r:id="rId42"/>
-    <p:sldId id="291" r:id="rId43"/>
-    <p:sldId id="292" r:id="rId44"/>
-    <p:sldId id="293" r:id="rId45"/>
-    <p:sldId id="294" r:id="rId46"/>
-    <p:sldId id="295" r:id="rId47"/>
-    <p:sldId id="296" r:id="rId48"/>
-    <p:sldId id="297" r:id="rId49"/>
-    <p:sldId id="298" r:id="rId50"/>
-    <p:sldId id="299" r:id="rId51"/>
-    <p:sldId id="300" r:id="rId52"/>
-    <p:sldId id="301" r:id="rId53"/>
-    <p:sldId id="302" r:id="rId54"/>
-    <p:sldId id="303" r:id="rId55"/>
-    <p:sldId id="304" r:id="rId56"/>
-    <p:sldId id="305" r:id="rId57"/>
-    <p:sldId id="306" r:id="rId58"/>
-    <p:sldId id="307" r:id="rId59"/>
   </p:sldIdLst>
   <p:sldSz cx="12191695" cy="6858000" type="screen4x3"/>
   <p:notesSz cx="6858000" cy="9144000"/>
@@ -578,566 +560,6 @@
 </p:notes>
 </file>
 
-<file path=ppt/notesSlides/notesSlide10.xml><?xml version="1.0" encoding="utf-8"?>
-<p:notes xmlns:a="http://schemas.openxmlformats.org/drawingml/2006/main" xmlns:p="http://schemas.openxmlformats.org/presentationml/2006/main" xmlns:r="http://schemas.openxmlformats.org/officeDocument/2006/relationships">
-  <p:cSld>
-    <p:spTree>
-      <p:nvGrpSpPr>
-        <p:cNvPr id="1" name=""/>
-        <p:cNvGrpSpPr/>
-        <p:nvPr/>
-      </p:nvGrpSpPr>
-      <p:grpSpPr>
-        <a:xfrm>
-          <a:off x="0" y="0"/>
-          <a:ext cx="0" cy="0"/>
-          <a:chOff x="0" y="0"/>
-          <a:chExt cx="0" cy="0"/>
-        </a:xfrm>
-      </p:grpSpPr>
-      <p:sp>
-        <p:nvSpPr>
-          <p:cNvPr id="2" name="Slide Image Placeholder 1"/>
-          <p:cNvSpPr>
-            <a:spLocks noGrp="1"/>
-          </p:cNvSpPr>
-          <p:nvPr>
-            <p:ph type="sldImg" idx="2"/>
-          </p:nvPr>
-        </p:nvSpPr>
-        <p:spPr/>
-      </p:sp>
-      <p:sp>
-        <p:nvSpPr>
-          <p:cNvPr id="3" name="Notes Placeholder 2"/>
-          <p:cNvSpPr>
-            <a:spLocks noGrp="1"/>
-          </p:cNvSpPr>
-          <p:nvPr>
-            <p:ph type="body" idx="3" sz="quarter"/>
-          </p:nvPr>
-        </p:nvSpPr>
-        <p:spPr/>
-        <p:txBody>
-          <a:bodyPr/>
-          <a:lstStyle/>
-          <a:p>
-            <a:r>
-              <a:t>표적을 결정하는 것은 호르몬이 아니라 수용체다. 호르몬은 혈액을 타고 몸 전체를 돌지만 수용체가 없는 세포는 반응하지 않는다. 결과는 두 가지다. 첫째, 하나의 호르몬이 여러 기관에 동시에 작용할 수 있다. 둘째, 같은 호르몬이 기관마다 다른 수용체를 통해 서로 다른 효과를 낼 수 있다. Angiotensin II가 혈관에서는 수축, 부신에서는 aldosterone 분비, 시상하부에서는 갈증을 일으키는 것이 그 예다.</a:t>
-            </a:r>
-          </a:p>
-        </p:txBody>
-      </p:sp>
-      <p:sp>
-        <p:nvSpPr>
-          <p:cNvPr id="4" name="Slide Number Placeholder 3"/>
-          <p:cNvSpPr>
-            <a:spLocks noGrp="1"/>
-          </p:cNvSpPr>
-          <p:nvPr>
-            <p:ph type="sldNum" idx="5" sz="quarter"/>
-          </p:nvPr>
-        </p:nvSpPr>
-        <p:spPr/>
-      </p:sp>
-    </p:spTree>
-  </p:cSld>
-  <p:clrMapOvr>
-    <a:masterClrMapping/>
-  </p:clrMapOvr>
-</p:notes>
-</file>
-
-<file path=ppt/notesSlides/notesSlide11.xml><?xml version="1.0" encoding="utf-8"?>
-<p:notes xmlns:a="http://schemas.openxmlformats.org/drawingml/2006/main" xmlns:p="http://schemas.openxmlformats.org/presentationml/2006/main" xmlns:r="http://schemas.openxmlformats.org/officeDocument/2006/relationships">
-  <p:cSld>
-    <p:spTree>
-      <p:nvGrpSpPr>
-        <p:cNvPr id="1" name=""/>
-        <p:cNvGrpSpPr/>
-        <p:nvPr/>
-      </p:nvGrpSpPr>
-      <p:grpSpPr>
-        <a:xfrm>
-          <a:off x="0" y="0"/>
-          <a:ext cx="0" cy="0"/>
-          <a:chOff x="0" y="0"/>
-          <a:chExt cx="0" cy="0"/>
-        </a:xfrm>
-      </p:grpSpPr>
-      <p:sp>
-        <p:nvSpPr>
-          <p:cNvPr id="2" name="Slide Image Placeholder 1"/>
-          <p:cNvSpPr>
-            <a:spLocks noGrp="1"/>
-          </p:cNvSpPr>
-          <p:nvPr>
-            <p:ph type="sldImg" idx="2"/>
-          </p:nvPr>
-        </p:nvSpPr>
-        <p:spPr/>
-      </p:sp>
-      <p:sp>
-        <p:nvSpPr>
-          <p:cNvPr id="3" name="Notes Placeholder 2"/>
-          <p:cNvSpPr>
-            <a:spLocks noGrp="1"/>
-          </p:cNvSpPr>
-          <p:nvPr>
-            <p:ph type="body" idx="3" sz="quarter"/>
-          </p:nvPr>
-        </p:nvSpPr>
-        <p:spPr/>
-        <p:txBody>
-          <a:bodyPr/>
-          <a:lstStyle/>
-          <a:p>
-            <a:r>
-              <a:t>Insulin은 peptide 호르몬이므로 소화관에서 단백질 분해 효소에 분해되어 경구 투여가 불가능하다. Prednisolone은 steroid이므로 지질에 녹아 소화관 상피의 세포막을 통과해 흡수되고, 분해 효소의 표적도 아니므로 경구 투여가 가능하다. 구조가 용해도를 정하고 용해도가 투여 경로를 정한다.</a:t>
-            </a:r>
-          </a:p>
-        </p:txBody>
-      </p:sp>
-      <p:sp>
-        <p:nvSpPr>
-          <p:cNvPr id="4" name="Slide Number Placeholder 3"/>
-          <p:cNvSpPr>
-            <a:spLocks noGrp="1"/>
-          </p:cNvSpPr>
-          <p:nvPr>
-            <p:ph type="sldNum" idx="5" sz="quarter"/>
-          </p:nvPr>
-        </p:nvSpPr>
-        <p:spPr/>
-      </p:sp>
-    </p:spTree>
-  </p:cSld>
-  <p:clrMapOvr>
-    <a:masterClrMapping/>
-  </p:clrMapOvr>
-</p:notes>
-</file>
-
-<file path=ppt/notesSlides/notesSlide12.xml><?xml version="1.0" encoding="utf-8"?>
-<p:notes xmlns:a="http://schemas.openxmlformats.org/drawingml/2006/main" xmlns:p="http://schemas.openxmlformats.org/presentationml/2006/main" xmlns:r="http://schemas.openxmlformats.org/officeDocument/2006/relationships">
-  <p:cSld>
-    <p:spTree>
-      <p:nvGrpSpPr>
-        <p:cNvPr id="1" name=""/>
-        <p:cNvGrpSpPr/>
-        <p:nvPr/>
-      </p:nvGrpSpPr>
-      <p:grpSpPr>
-        <a:xfrm>
-          <a:off x="0" y="0"/>
-          <a:ext cx="0" cy="0"/>
-          <a:chOff x="0" y="0"/>
-          <a:chExt cx="0" cy="0"/>
-        </a:xfrm>
-      </p:grpSpPr>
-      <p:sp>
-        <p:nvSpPr>
-          <p:cNvPr id="2" name="Slide Image Placeholder 1"/>
-          <p:cNvSpPr>
-            <a:spLocks noGrp="1"/>
-          </p:cNvSpPr>
-          <p:nvPr>
-            <p:ph type="sldImg" idx="2"/>
-          </p:nvPr>
-        </p:nvSpPr>
-        <p:spPr/>
-      </p:sp>
-      <p:sp>
-        <p:nvSpPr>
-          <p:cNvPr id="3" name="Notes Placeholder 2"/>
-          <p:cNvSpPr>
-            <a:spLocks noGrp="1"/>
-          </p:cNvSpPr>
-          <p:nvPr>
-            <p:ph type="body" idx="3" sz="quarter"/>
-          </p:nvPr>
-        </p:nvSpPr>
-        <p:spPr/>
-        <p:txBody>
-          <a:bodyPr/>
-          <a:lstStyle/>
-          <a:p>
-            <a:r>
-              <a:t>호르몬 한 분자가 수용체 하나를 활성화하면 그 수용체가 여러 개의 G 단백질을 활성화하고, 각 adenylyl cyclase가 수백 개의 cAMP를 만들고, 각 protein kinase A가 수많은 기질을 인산화한다. 단계마다 배수가 곱해지므로 10의 마이너스 10 제곱 M 수준의 매우 낮은 호르몬 농도로도 큰 세포 반응을 만들 수 있다.</a:t>
-            </a:r>
-          </a:p>
-        </p:txBody>
-      </p:sp>
-      <p:sp>
-        <p:nvSpPr>
-          <p:cNvPr id="4" name="Slide Number Placeholder 3"/>
-          <p:cNvSpPr>
-            <a:spLocks noGrp="1"/>
-          </p:cNvSpPr>
-          <p:nvPr>
-            <p:ph type="sldNum" idx="5" sz="quarter"/>
-          </p:nvPr>
-        </p:nvSpPr>
-        <p:spPr/>
-      </p:sp>
-    </p:spTree>
-  </p:cSld>
-  <p:clrMapOvr>
-    <a:masterClrMapping/>
-  </p:clrMapOvr>
-</p:notes>
-</file>
-
-<file path=ppt/notesSlides/notesSlide13.xml><?xml version="1.0" encoding="utf-8"?>
-<p:notes xmlns:a="http://schemas.openxmlformats.org/drawingml/2006/main" xmlns:p="http://schemas.openxmlformats.org/presentationml/2006/main" xmlns:r="http://schemas.openxmlformats.org/officeDocument/2006/relationships">
-  <p:cSld>
-    <p:spTree>
-      <p:nvGrpSpPr>
-        <p:cNvPr id="1" name=""/>
-        <p:cNvGrpSpPr/>
-        <p:nvPr/>
-      </p:nvGrpSpPr>
-      <p:grpSpPr>
-        <a:xfrm>
-          <a:off x="0" y="0"/>
-          <a:ext cx="0" cy="0"/>
-          <a:chOff x="0" y="0"/>
-          <a:chExt cx="0" cy="0"/>
-        </a:xfrm>
-      </p:grpSpPr>
-      <p:sp>
-        <p:nvSpPr>
-          <p:cNvPr id="2" name="Slide Image Placeholder 1"/>
-          <p:cNvSpPr>
-            <a:spLocks noGrp="1"/>
-          </p:cNvSpPr>
-          <p:nvPr>
-            <p:ph type="sldImg" idx="2"/>
-          </p:nvPr>
-        </p:nvSpPr>
-        <p:spPr/>
-      </p:sp>
-      <p:sp>
-        <p:nvSpPr>
-          <p:cNvPr id="3" name="Notes Placeholder 2"/>
-          <p:cNvSpPr>
-            <a:spLocks noGrp="1"/>
-          </p:cNvSpPr>
-          <p:nvPr>
-            <p:ph type="body" idx="3" sz="quarter"/>
-          </p:nvPr>
-        </p:nvSpPr>
-        <p:spPr/>
-        <p:txBody>
-          <a:bodyPr/>
-          <a:lstStyle/>
-          <a:p>
-            <a:r>
-              <a:t>시상하부와 뇌하수체 전엽을 잇는 hypophyseal portal system으로 직접 전달하므로, 적은 양으로도 표적인 전엽에서 충분히 높은 농도를 만들 수 있다. 또한 전신 혈액으로 희석되지 않으므로 다른 기관에 영향을 주지 않는다. 적은 양으로 국소적으로 작용하게 하는 설계다.</a:t>
-            </a:r>
-          </a:p>
-        </p:txBody>
-      </p:sp>
-      <p:sp>
-        <p:nvSpPr>
-          <p:cNvPr id="4" name="Slide Number Placeholder 3"/>
-          <p:cNvSpPr>
-            <a:spLocks noGrp="1"/>
-          </p:cNvSpPr>
-          <p:nvPr>
-            <p:ph type="sldNum" idx="5" sz="quarter"/>
-          </p:nvPr>
-        </p:nvSpPr>
-        <p:spPr/>
-      </p:sp>
-    </p:spTree>
-  </p:cSld>
-  <p:clrMapOvr>
-    <a:masterClrMapping/>
-  </p:clrMapOvr>
-</p:notes>
-</file>
-
-<file path=ppt/notesSlides/notesSlide14.xml><?xml version="1.0" encoding="utf-8"?>
-<p:notes xmlns:a="http://schemas.openxmlformats.org/drawingml/2006/main" xmlns:p="http://schemas.openxmlformats.org/presentationml/2006/main" xmlns:r="http://schemas.openxmlformats.org/officeDocument/2006/relationships">
-  <p:cSld>
-    <p:spTree>
-      <p:nvGrpSpPr>
-        <p:cNvPr id="1" name=""/>
-        <p:cNvGrpSpPr/>
-        <p:nvPr/>
-      </p:nvGrpSpPr>
-      <p:grpSpPr>
-        <a:xfrm>
-          <a:off x="0" y="0"/>
-          <a:ext cx="0" cy="0"/>
-          <a:chOff x="0" y="0"/>
-          <a:chExt cx="0" cy="0"/>
-        </a:xfrm>
-      </p:grpSpPr>
-      <p:sp>
-        <p:nvSpPr>
-          <p:cNvPr id="2" name="Slide Image Placeholder 1"/>
-          <p:cNvSpPr>
-            <a:spLocks noGrp="1"/>
-          </p:cNvSpPr>
-          <p:nvPr>
-            <p:ph type="sldImg" idx="2"/>
-          </p:nvPr>
-        </p:nvSpPr>
-        <p:spPr/>
-      </p:sp>
-      <p:sp>
-        <p:nvSpPr>
-          <p:cNvPr id="3" name="Notes Placeholder 2"/>
-          <p:cNvSpPr>
-            <a:spLocks noGrp="1"/>
-          </p:cNvSpPr>
-          <p:nvPr>
-            <p:ph type="body" idx="3" sz="quarter"/>
-          </p:nvPr>
-        </p:nvSpPr>
-        <p:spPr/>
-        <p:txBody>
-          <a:bodyPr/>
-          <a:lstStyle/>
-          <a:p>
-            <a:r>
-              <a:t>후엽은 뇌의 일부가 아래로 자라 내려와 만들어진 신경 조직이므로 분비 상피가 아니다. 시상하부의 신경 세포체에서 만들어진 호르몬이 축삭을 따라 내려와 후엽의 말단에 저장되어 있다가 방출되며, 후엽은 저장과 방출의 장소일 뿐이다. 전엽은 입천장의 상피가 올라와 만들어진 분비 조직이므로 스스로 만든다. 따라서 신경 자극에 의해 즉시 방출되는 ADH와 oxytocin이 후엽, 나머지 여섯 가지 자극 호르몬이 전엽이라는 구분이 자연스럽게 따라온다.</a:t>
-            </a:r>
-          </a:p>
-        </p:txBody>
-      </p:sp>
-      <p:sp>
-        <p:nvSpPr>
-          <p:cNvPr id="4" name="Slide Number Placeholder 3"/>
-          <p:cNvSpPr>
-            <a:spLocks noGrp="1"/>
-          </p:cNvSpPr>
-          <p:nvPr>
-            <p:ph type="sldNum" idx="5" sz="quarter"/>
-          </p:nvPr>
-        </p:nvSpPr>
-        <p:spPr/>
-      </p:sp>
-    </p:spTree>
-  </p:cSld>
-  <p:clrMapOvr>
-    <a:masterClrMapping/>
-  </p:clrMapOvr>
-</p:notes>
-</file>
-
-<file path=ppt/notesSlides/notesSlide15.xml><?xml version="1.0" encoding="utf-8"?>
-<p:notes xmlns:a="http://schemas.openxmlformats.org/drawingml/2006/main" xmlns:p="http://schemas.openxmlformats.org/presentationml/2006/main" xmlns:r="http://schemas.openxmlformats.org/officeDocument/2006/relationships">
-  <p:cSld>
-    <p:spTree>
-      <p:nvGrpSpPr>
-        <p:cNvPr id="1" name=""/>
-        <p:cNvGrpSpPr/>
-        <p:nvPr/>
-      </p:nvGrpSpPr>
-      <p:grpSpPr>
-        <a:xfrm>
-          <a:off x="0" y="0"/>
-          <a:ext cx="0" cy="0"/>
-          <a:chOff x="0" y="0"/>
-          <a:chExt cx="0" cy="0"/>
-        </a:xfrm>
-      </p:grpSpPr>
-      <p:sp>
-        <p:nvSpPr>
-          <p:cNvPr id="2" name="Slide Image Placeholder 1"/>
-          <p:cNvSpPr>
-            <a:spLocks noGrp="1"/>
-          </p:cNvSpPr>
-          <p:nvPr>
-            <p:ph type="sldImg" idx="2"/>
-          </p:nvPr>
-        </p:nvSpPr>
-        <p:spPr/>
-      </p:sp>
-      <p:sp>
-        <p:nvSpPr>
-          <p:cNvPr id="3" name="Notes Placeholder 2"/>
-          <p:cNvSpPr>
-            <a:spLocks noGrp="1"/>
-          </p:cNvSpPr>
-          <p:nvPr>
-            <p:ph type="body" idx="3" sz="quarter"/>
-          </p:nvPr>
-        </p:nvSpPr>
-        <p:spPr/>
-        <p:txBody>
-          <a:bodyPr/>
-          <a:lstStyle/>
-          <a:p>
-            <a:r>
-              <a:t>첫째, T4의 반감기가 약 7일로 길어 혈중 농도가 안정하게 유지된다. 운반 단백질에 결합한 저장 겸 전구체 형태로 순환하는 것이다. 둘째, 각 조직이 자신의 deiodinase 활성을 조절해 필요한 만큼만 T3로 바꿀 수 있으므로, 전신의 호르몬 농도와 별개로 조직 수준의 미세 조절이 가능하다.</a:t>
-            </a:r>
-          </a:p>
-        </p:txBody>
-      </p:sp>
-      <p:sp>
-        <p:nvSpPr>
-          <p:cNvPr id="4" name="Slide Number Placeholder 3"/>
-          <p:cNvSpPr>
-            <a:spLocks noGrp="1"/>
-          </p:cNvSpPr>
-          <p:nvPr>
-            <p:ph type="sldNum" idx="5" sz="quarter"/>
-          </p:nvPr>
-        </p:nvSpPr>
-        <p:spPr/>
-      </p:sp>
-    </p:spTree>
-  </p:cSld>
-  <p:clrMapOvr>
-    <a:masterClrMapping/>
-  </p:clrMapOvr>
-</p:notes>
-</file>
-
-<file path=ppt/notesSlides/notesSlide16.xml><?xml version="1.0" encoding="utf-8"?>
-<p:notes xmlns:a="http://schemas.openxmlformats.org/drawingml/2006/main" xmlns:p="http://schemas.openxmlformats.org/presentationml/2006/main" xmlns:r="http://schemas.openxmlformats.org/officeDocument/2006/relationships">
-  <p:cSld>
-    <p:spTree>
-      <p:nvGrpSpPr>
-        <p:cNvPr id="1" name=""/>
-        <p:cNvGrpSpPr/>
-        <p:nvPr/>
-      </p:nvGrpSpPr>
-      <p:grpSpPr>
-        <a:xfrm>
-          <a:off x="0" y="0"/>
-          <a:ext cx="0" cy="0"/>
-          <a:chOff x="0" y="0"/>
-          <a:chExt cx="0" cy="0"/>
-        </a:xfrm>
-      </p:grpSpPr>
-      <p:sp>
-        <p:nvSpPr>
-          <p:cNvPr id="2" name="Slide Image Placeholder 1"/>
-          <p:cNvSpPr>
-            <a:spLocks noGrp="1"/>
-          </p:cNvSpPr>
-          <p:nvPr>
-            <p:ph type="sldImg" idx="2"/>
-          </p:nvPr>
-        </p:nvSpPr>
-        <p:spPr/>
-      </p:sp>
-      <p:sp>
-        <p:nvSpPr>
-          <p:cNvPr id="3" name="Notes Placeholder 2"/>
-          <p:cNvSpPr>
-            <a:spLocks noGrp="1"/>
-          </p:cNvSpPr>
-          <p:nvPr>
-            <p:ph type="body" idx="3" sz="quarter"/>
-          </p:nvPr>
-        </p:nvSpPr>
-        <p:spPr/>
-        <p:txBody>
-          <a:bodyPr/>
-          <a:lstStyle/>
-          <a:p>
-            <a:r>
-              <a:t>외부에서 들어온 glucocorticoid가 시상하부와 뇌하수체에 음성 되먹임으로 작용해 CRH와 ACTH 분비를 억제하고, 자극을 받지 못한 부신 겉질이 위축된다. 이 상태에서 약을 갑자기 끊으면 외부 공급도 없고 내부 생산도 되지 않아 cortisol이 급격히 부족해져 저혈압과 쇼크에 이를 수 있다. 따라서 축이 회복될 시간을 주기 위해 서서히 줄여야 한다.</a:t>
-            </a:r>
-          </a:p>
-        </p:txBody>
-      </p:sp>
-      <p:sp>
-        <p:nvSpPr>
-          <p:cNvPr id="4" name="Slide Number Placeholder 3"/>
-          <p:cNvSpPr>
-            <a:spLocks noGrp="1"/>
-          </p:cNvSpPr>
-          <p:nvPr>
-            <p:ph type="sldNum" idx="5" sz="quarter"/>
-          </p:nvPr>
-        </p:nvSpPr>
-        <p:spPr/>
-      </p:sp>
-    </p:spTree>
-  </p:cSld>
-  <p:clrMapOvr>
-    <a:masterClrMapping/>
-  </p:clrMapOvr>
-</p:notes>
-</file>
-
-<file path=ppt/notesSlides/notesSlide17.xml><?xml version="1.0" encoding="utf-8"?>
-<p:notes xmlns:a="http://schemas.openxmlformats.org/drawingml/2006/main" xmlns:p="http://schemas.openxmlformats.org/presentationml/2006/main" xmlns:r="http://schemas.openxmlformats.org/officeDocument/2006/relationships">
-  <p:cSld>
-    <p:spTree>
-      <p:nvGrpSpPr>
-        <p:cNvPr id="1" name=""/>
-        <p:cNvGrpSpPr/>
-        <p:nvPr/>
-      </p:nvGrpSpPr>
-      <p:grpSpPr>
-        <a:xfrm>
-          <a:off x="0" y="0"/>
-          <a:ext cx="0" cy="0"/>
-          <a:chOff x="0" y="0"/>
-          <a:chExt cx="0" cy="0"/>
-        </a:xfrm>
-      </p:grpSpPr>
-      <p:sp>
-        <p:nvSpPr>
-          <p:cNvPr id="2" name="Slide Image Placeholder 1"/>
-          <p:cNvSpPr>
-            <a:spLocks noGrp="1"/>
-          </p:cNvSpPr>
-          <p:nvPr>
-            <p:ph type="sldImg" idx="2"/>
-          </p:nvPr>
-        </p:nvSpPr>
-        <p:spPr/>
-      </p:sp>
-      <p:sp>
-        <p:nvSpPr>
-          <p:cNvPr id="3" name="Notes Placeholder 2"/>
-          <p:cNvSpPr>
-            <a:spLocks noGrp="1"/>
-          </p:cNvSpPr>
-          <p:nvPr>
-            <p:ph type="body" idx="3" sz="quarter"/>
-          </p:nvPr>
-        </p:nvSpPr>
-        <p:spPr/>
-        <p:txBody>
-          <a:bodyPr/>
-          <a:lstStyle/>
-          <a:p>
-            <a:r>
-              <a:t>저혈당은 수 분 안에 뇌의 에너지 공급을 끊어 의식을 잃게 하고 생명을 위협하므로, glucagon·epinephrine·cortisol·growth hormone의 여러 겹 방어가 필요하다. 고혈당은 급성으로는 그만큼 위험하지 않고 장기간에 걸쳐 손상을 일으키므로, 하나의 호르몬으로 조절해도 생존에 지장이 없었다.</a:t>
-            </a:r>
-          </a:p>
-        </p:txBody>
-      </p:sp>
-      <p:sp>
-        <p:nvSpPr>
-          <p:cNvPr id="4" name="Slide Number Placeholder 3"/>
-          <p:cNvSpPr>
-            <a:spLocks noGrp="1"/>
-          </p:cNvSpPr>
-          <p:nvPr>
-            <p:ph type="sldNum" idx="5" sz="quarter"/>
-          </p:nvPr>
-        </p:nvSpPr>
-        <p:spPr/>
-      </p:sp>
-    </p:spTree>
-  </p:cSld>
-  <p:clrMapOvr>
-    <a:masterClrMapping/>
-  </p:clrMapOvr>
-</p:notes>
-</file>
-
 <file path=ppt/notesSlides/notesSlide2.xml><?xml version="1.0" encoding="utf-8"?>
 <p:notes xmlns:a="http://schemas.openxmlformats.org/drawingml/2006/main" xmlns:p="http://schemas.openxmlformats.org/presentationml/2006/main" xmlns:r="http://schemas.openxmlformats.org/officeDocument/2006/relationships">
   <p:cSld>
@@ -1534,146 +956,6 @@
           <a:p>
             <a:r>
               <a:t>부신 겉질 세 층과 속질의 구분. 각 층에서 생산되는 호르몬과 조절 자극, cholesterol에서 갈라지는 합성 경로, cortisol의 대사 작용 네 방향, 그리고 일중 변동 곡선을 함께 보인다.</a:t>
-            </a:r>
-          </a:p>
-        </p:txBody>
-      </p:sp>
-      <p:sp>
-        <p:nvSpPr>
-          <p:cNvPr id="4" name="Slide Number Placeholder 3"/>
-          <p:cNvSpPr>
-            <a:spLocks noGrp="1"/>
-          </p:cNvSpPr>
-          <p:nvPr>
-            <p:ph type="sldNum" idx="5" sz="quarter"/>
-          </p:nvPr>
-        </p:nvSpPr>
-        <p:spPr/>
-      </p:sp>
-    </p:spTree>
-  </p:cSld>
-  <p:clrMapOvr>
-    <a:masterClrMapping/>
-  </p:clrMapOvr>
-</p:notes>
-</file>
-
-<file path=ppt/notesSlides/notesSlide8.xml><?xml version="1.0" encoding="utf-8"?>
-<p:notes xmlns:a="http://schemas.openxmlformats.org/drawingml/2006/main" xmlns:p="http://schemas.openxmlformats.org/presentationml/2006/main" xmlns:r="http://schemas.openxmlformats.org/officeDocument/2006/relationships">
-  <p:cSld>
-    <p:spTree>
-      <p:nvGrpSpPr>
-        <p:cNvPr id="1" name=""/>
-        <p:cNvGrpSpPr/>
-        <p:nvPr/>
-      </p:nvGrpSpPr>
-      <p:grpSpPr>
-        <a:xfrm>
-          <a:off x="0" y="0"/>
-          <a:ext cx="0" cy="0"/>
-          <a:chOff x="0" y="0"/>
-          <a:chExt cx="0" cy="0"/>
-        </a:xfrm>
-      </p:grpSpPr>
-      <p:sp>
-        <p:nvSpPr>
-          <p:cNvPr id="2" name="Slide Image Placeholder 1"/>
-          <p:cNvSpPr>
-            <a:spLocks noGrp="1"/>
-          </p:cNvSpPr>
-          <p:nvPr>
-            <p:ph type="sldImg" idx="2"/>
-          </p:nvPr>
-        </p:nvSpPr>
-        <p:spPr/>
-      </p:sp>
-      <p:sp>
-        <p:nvSpPr>
-          <p:cNvPr id="3" name="Notes Placeholder 2"/>
-          <p:cNvSpPr>
-            <a:spLocks noGrp="1"/>
-          </p:cNvSpPr>
-          <p:nvPr>
-            <p:ph type="body" idx="3" sz="quarter"/>
-          </p:nvPr>
-        </p:nvSpPr>
-        <p:spPr/>
-        <p:txBody>
-          <a:bodyPr/>
-          <a:lstStyle/>
-          <a:p>
-            <a:r>
-              <a:t>혈당 조절에서 insulin과 glucagon의 작용. β cell의 insulin 분비 기전, GLUT4 이동을 통한 포도당 흡수, 기관별 효과의 차이, glucagon의 간 표적성, 그리고 혈당을 올리는 호르몬이 여럿인데 내리는 호르몬은 하나뿐인 비대칭을 함께 보인다.</a:t>
-            </a:r>
-          </a:p>
-        </p:txBody>
-      </p:sp>
-      <p:sp>
-        <p:nvSpPr>
-          <p:cNvPr id="4" name="Slide Number Placeholder 3"/>
-          <p:cNvSpPr>
-            <a:spLocks noGrp="1"/>
-          </p:cNvSpPr>
-          <p:nvPr>
-            <p:ph type="sldNum" idx="5" sz="quarter"/>
-          </p:nvPr>
-        </p:nvSpPr>
-        <p:spPr/>
-      </p:sp>
-    </p:spTree>
-  </p:cSld>
-  <p:clrMapOvr>
-    <a:masterClrMapping/>
-  </p:clrMapOvr>
-</p:notes>
-</file>
-
-<file path=ppt/notesSlides/notesSlide9.xml><?xml version="1.0" encoding="utf-8"?>
-<p:notes xmlns:a="http://schemas.openxmlformats.org/drawingml/2006/main" xmlns:p="http://schemas.openxmlformats.org/presentationml/2006/main" xmlns:r="http://schemas.openxmlformats.org/officeDocument/2006/relationships">
-  <p:cSld>
-    <p:spTree>
-      <p:nvGrpSpPr>
-        <p:cNvPr id="1" name=""/>
-        <p:cNvGrpSpPr/>
-        <p:nvPr/>
-      </p:nvGrpSpPr>
-      <p:grpSpPr>
-        <a:xfrm>
-          <a:off x="0" y="0"/>
-          <a:ext cx="0" cy="0"/>
-          <a:chOff x="0" y="0"/>
-          <a:chExt cx="0" cy="0"/>
-        </a:xfrm>
-      </p:grpSpPr>
-      <p:sp>
-        <p:nvSpPr>
-          <p:cNvPr id="2" name="Slide Image Placeholder 1"/>
-          <p:cNvSpPr>
-            <a:spLocks noGrp="1"/>
-          </p:cNvSpPr>
-          <p:nvPr>
-            <p:ph type="sldImg" idx="2"/>
-          </p:nvPr>
-        </p:nvSpPr>
-        <p:spPr/>
-      </p:sp>
-      <p:sp>
-        <p:nvSpPr>
-          <p:cNvPr id="3" name="Notes Placeholder 2"/>
-          <p:cNvSpPr>
-            <a:spLocks noGrp="1"/>
-          </p:cNvSpPr>
-          <p:nvPr>
-            <p:ph type="body" idx="3" sz="quarter"/>
-          </p:nvPr>
-        </p:nvSpPr>
-        <p:spPr/>
-        <p:txBody>
-          <a:bodyPr/>
-          <a:lstStyle/>
-          <a:p>
-            <a:r>
-              <a:t>호르몬 상호작용의 세 양식과 사례. 상승·허용·길항의 효과 크기 비교, 갑상샘 호르몬의 허용 작용 기전, 그리고 집합관의 11베타-HSD2가 cortisol과 aldosterone의 수용체 교차 작용을 막는 방식을 함께 보인다.</a:t>
             </a:r>
           </a:p>
         </p:txBody>
@@ -4883,7 +4165,20 @@
                 <a:ea typeface="Malgun Gothic"/>
                 <a:cs typeface="Malgun Gothic"/>
               </a:rPr>
-              <a:t>M01-W02-L02</a:t>
+              <a:t>M01-W02-L02  ·  1부</a:t>
+            </a:r>
+          </a:p>
+          <a:p>
+            <a:r>
+              <a:rPr sz="1100" b="0" i="0">
+                <a:solidFill>
+                  <a:srgbClr val="F2B705"/>
+                </a:solidFill>
+                <a:latin typeface="Malgun Gothic"/>
+                <a:ea typeface="Malgun Gothic"/>
+                <a:cs typeface="Malgun Gothic"/>
+              </a:rPr>
+              <a:t>전체 13절 가운데 7절</a:t>
             </a:r>
           </a:p>
           <a:p>
@@ -13326,7 +12621,7 @@
                 <a:ea typeface="Malgun Gothic"/>
                 <a:cs typeface="Malgun Gothic"/>
               </a:rPr>
-              <a:t>6. 갑상샘 호르몬 (1/2)</a:t>
+              <a:t>6. 갑상샘 호르몬</a:t>
             </a:r>
           </a:p>
         </p:txBody>
@@ -13930,6 +13225,126 @@
                 <a:cs typeface="Malgun Gothic"/>
               </a:rPr>
               <a:t>갑상샘 호르몬의 작용은 핵 수용체를 통한 유전자 발현 조절이며, 주된 효과는 다음과 같다.</a:t>
+            </a:r>
+          </a:p>
+          <a:p>
+            <a:pPr>
+              <a:spcAft>
+                <a:spcPts val="900"/>
+              </a:spcAft>
+            </a:pPr>
+            <a:r>
+              <a:rPr sz="1400" b="1" i="0">
+                <a:solidFill>
+                  <a:srgbClr val="F2B705"/>
+                </a:solidFill>
+                <a:latin typeface="Malgun Gothic"/>
+                <a:ea typeface="Malgun Gothic"/>
+                <a:cs typeface="Malgun Gothic"/>
+              </a:rPr>
+              <a:t>•  </a:t>
+            </a:r>
+            <a:r>
+              <a:rPr sz="1400" b="1" i="0">
+                <a:solidFill>
+                  <a:srgbClr val="11202B"/>
+                </a:solidFill>
+                <a:latin typeface="Malgun Gothic"/>
+                <a:ea typeface="Malgun Gothic"/>
+                <a:cs typeface="Malgun Gothic"/>
+              </a:rPr>
+              <a:t>기초대사율 상승</a:t>
+            </a:r>
+            <a:r>
+              <a:rPr sz="1400" b="0" i="0">
+                <a:solidFill>
+                  <a:srgbClr val="11202B"/>
+                </a:solidFill>
+                <a:latin typeface="Malgun Gothic"/>
+                <a:ea typeface="Malgun Gothic"/>
+                <a:cs typeface="Malgun Gothic"/>
+              </a:rPr>
+              <a:t>: Na⁺/K⁺-ATPase를 비롯한 여러 단백질의 발현을 늘려 산소 소비와 열 생산을 늘린다.</a:t>
+            </a:r>
+          </a:p>
+          <a:p>
+            <a:pPr>
+              <a:spcAft>
+                <a:spcPts val="900"/>
+              </a:spcAft>
+            </a:pPr>
+            <a:r>
+              <a:rPr sz="1400" b="1" i="0">
+                <a:solidFill>
+                  <a:srgbClr val="F2B705"/>
+                </a:solidFill>
+                <a:latin typeface="Malgun Gothic"/>
+                <a:ea typeface="Malgun Gothic"/>
+                <a:cs typeface="Malgun Gothic"/>
+              </a:rPr>
+              <a:t>•  </a:t>
+            </a:r>
+            <a:r>
+              <a:rPr sz="1400" b="1" i="0">
+                <a:solidFill>
+                  <a:srgbClr val="11202B"/>
+                </a:solidFill>
+                <a:latin typeface="Malgun Gothic"/>
+                <a:ea typeface="Malgun Gothic"/>
+                <a:cs typeface="Malgun Gothic"/>
+              </a:rPr>
+              <a:t>심장에 대한 작용</a:t>
+            </a:r>
+            <a:r>
+              <a:rPr sz="1400" b="0" i="0">
+                <a:solidFill>
+                  <a:srgbClr val="11202B"/>
+                </a:solidFill>
+                <a:latin typeface="Malgun Gothic"/>
+                <a:ea typeface="Malgun Gothic"/>
+                <a:cs typeface="Malgun Gothic"/>
+              </a:rPr>
+              <a:t>: β 수용체의 수를 늘려 catecholamine에 대한 민감도를 높인다. 갑상샘 기능 과다에서 심박수와 수축력이 올라가는 이유다.</a:t>
+            </a:r>
+          </a:p>
+          <a:p>
+            <a:pPr>
+              <a:spcAft>
+                <a:spcPts val="900"/>
+              </a:spcAft>
+            </a:pPr>
+            <a:r>
+              <a:rPr sz="1400" b="1" i="0">
+                <a:solidFill>
+                  <a:srgbClr val="F2B705"/>
+                </a:solidFill>
+                <a:latin typeface="Malgun Gothic"/>
+                <a:ea typeface="Malgun Gothic"/>
+                <a:cs typeface="Malgun Gothic"/>
+              </a:rPr>
+              <a:t>•  </a:t>
+            </a:r>
+            <a:r>
+              <a:rPr sz="1400" b="1" i="0">
+                <a:solidFill>
+                  <a:srgbClr val="11202B"/>
+                </a:solidFill>
+                <a:latin typeface="Malgun Gothic"/>
+                <a:ea typeface="Malgun Gothic"/>
+                <a:cs typeface="Malgun Gothic"/>
+              </a:rPr>
+              <a:t>성장과 신경 발달</a:t>
+            </a:r>
+            <a:r>
+              <a:rPr sz="1400" b="0" i="0">
+                <a:solidFill>
+                  <a:srgbClr val="11202B"/>
+                </a:solidFill>
+                <a:latin typeface="Malgun Gothic"/>
+                <a:ea typeface="Malgun Gothic"/>
+                <a:cs typeface="Malgun Gothic"/>
+              </a:rPr>
+              <a:t>: 특히 태아와 신생아 시기에 필수적이다. 결핍되면 되돌릴 수 없는 지적 장애와 성장 장애가 생긴다.</a:t>
             </a:r>
           </a:p>
         </p:txBody>
@@ -14126,7 +13541,7 @@
                 <a:ea typeface="Malgun Gothic"/>
                 <a:cs typeface="Malgun Gothic"/>
               </a:rPr>
-              <a:t>6. 갑상샘 호르몬 (2/2)</a:t>
+              <a:t>6. 갑상샘 호르몬</a:t>
             </a:r>
           </a:p>
         </p:txBody>
@@ -14180,143 +13595,77 @@
       </p:sp>
       <p:sp>
         <p:nvSpPr>
-          <p:cNvPr id="7" name="TextBox 6"/>
-          <p:cNvSpPr txBox="1"/>
+          <p:cNvPr id="7" name="Rectangle 6"/>
+          <p:cNvSpPr/>
           <p:nvPr/>
         </p:nvSpPr>
         <p:spPr>
           <a:xfrm>
-            <a:off x="640080" y="1280160"/>
-            <a:ext cx="10881360" cy="5029200"/>
-          </a:xfrm>
-          <a:prstGeom prst="rect">
-            <a:avLst/>
-          </a:prstGeom>
-          <a:noFill/>
-        </p:spPr>
-        <p:txBody>
-          <a:bodyPr wrap="square" anchor="t">
-            <a:spAutoFit/>
-          </a:bodyPr>
-          <a:lstStyle/>
-          <a:p>
-            <a:pPr>
-              <a:spcAft>
-                <a:spcPts val="900"/>
-              </a:spcAft>
-            </a:pPr>
-            <a:r>
-              <a:rPr sz="2000" b="1" i="0">
-                <a:solidFill>
-                  <a:srgbClr val="F2B705"/>
-                </a:solidFill>
-                <a:latin typeface="Malgun Gothic"/>
-                <a:ea typeface="Malgun Gothic"/>
-                <a:cs typeface="Malgun Gothic"/>
-              </a:rPr>
-              <a:t>•  </a:t>
-            </a:r>
-            <a:r>
-              <a:rPr sz="2000" b="1" i="0">
-                <a:solidFill>
-                  <a:srgbClr val="11202B"/>
-                </a:solidFill>
-                <a:latin typeface="Malgun Gothic"/>
-                <a:ea typeface="Malgun Gothic"/>
-                <a:cs typeface="Malgun Gothic"/>
-              </a:rPr>
-              <a:t>기초대사율 상승</a:t>
-            </a:r>
-            <a:r>
-              <a:rPr sz="2000" b="0" i="0">
-                <a:solidFill>
-                  <a:srgbClr val="11202B"/>
-                </a:solidFill>
-                <a:latin typeface="Malgun Gothic"/>
-                <a:ea typeface="Malgun Gothic"/>
-                <a:cs typeface="Malgun Gothic"/>
-              </a:rPr>
-              <a:t>: Na⁺/K⁺-ATPase를 비롯한 여러 단백질의 발현을 늘려 산소 소비와 열 생산을 늘린다.</a:t>
-            </a:r>
-          </a:p>
-          <a:p>
-            <a:pPr>
-              <a:spcAft>
-                <a:spcPts val="900"/>
-              </a:spcAft>
-            </a:pPr>
-            <a:r>
-              <a:rPr sz="2000" b="1" i="0">
-                <a:solidFill>
-                  <a:srgbClr val="F2B705"/>
-                </a:solidFill>
-                <a:latin typeface="Malgun Gothic"/>
-                <a:ea typeface="Malgun Gothic"/>
-                <a:cs typeface="Malgun Gothic"/>
-              </a:rPr>
-              <a:t>•  </a:t>
-            </a:r>
-            <a:r>
-              <a:rPr sz="2000" b="1" i="0">
-                <a:solidFill>
-                  <a:srgbClr val="11202B"/>
-                </a:solidFill>
-                <a:latin typeface="Malgun Gothic"/>
-                <a:ea typeface="Malgun Gothic"/>
-                <a:cs typeface="Malgun Gothic"/>
-              </a:rPr>
-              <a:t>심장에 대한 작용</a:t>
-            </a:r>
-            <a:r>
-              <a:rPr sz="2000" b="0" i="0">
-                <a:solidFill>
-                  <a:srgbClr val="11202B"/>
-                </a:solidFill>
-                <a:latin typeface="Malgun Gothic"/>
-                <a:ea typeface="Malgun Gothic"/>
-                <a:cs typeface="Malgun Gothic"/>
-              </a:rPr>
-              <a:t>: β 수용체의 수를 늘려 catecholamine에 대한 민감도를 높인다. 갑상샘 기능 과다에서 심박수와 수축력이 올라가는 이유다.</a:t>
-            </a:r>
-          </a:p>
-          <a:p>
-            <a:pPr>
-              <a:spcAft>
-                <a:spcPts val="900"/>
-              </a:spcAft>
-            </a:pPr>
-            <a:r>
-              <a:rPr sz="2000" b="1" i="0">
-                <a:solidFill>
-                  <a:srgbClr val="F2B705"/>
-                </a:solidFill>
-                <a:latin typeface="Malgun Gothic"/>
-                <a:ea typeface="Malgun Gothic"/>
-                <a:cs typeface="Malgun Gothic"/>
-              </a:rPr>
-              <a:t>•  </a:t>
-            </a:r>
-            <a:r>
-              <a:rPr sz="2000" b="1" i="0">
-                <a:solidFill>
-                  <a:srgbClr val="11202B"/>
-                </a:solidFill>
-                <a:latin typeface="Malgun Gothic"/>
-                <a:ea typeface="Malgun Gothic"/>
-                <a:cs typeface="Malgun Gothic"/>
-              </a:rPr>
-              <a:t>성장과 신경 발달</a:t>
-            </a:r>
-            <a:r>
-              <a:rPr sz="2000" b="0" i="0">
-                <a:solidFill>
-                  <a:srgbClr val="11202B"/>
-                </a:solidFill>
-                <a:latin typeface="Malgun Gothic"/>
-                <a:ea typeface="Malgun Gothic"/>
-                <a:cs typeface="Malgun Gothic"/>
-              </a:rPr>
-              <a:t>: 특히 태아와 신생아 시기에 필수적이다. 결핍되면 되돌릴 수 없는 지적 장애와 성장 장애가 생긴다.</a:t>
+            <a:off x="640080" y="1325880"/>
+            <a:ext cx="10881360" cy="1386839"/>
+          </a:xfrm>
+          <a:prstGeom prst="rect">
+            <a:avLst/>
+          </a:prstGeom>
+          <a:solidFill>
+            <a:srgbClr val="E8F1FA"/>
+          </a:solidFill>
+          <a:ln>
+            <a:noFill/>
+          </a:ln>
+          <a:effectLst/>
+        </p:spPr>
+        <p:style>
+          <a:lnRef idx="1">
+            <a:schemeClr val="accent1"/>
+          </a:lnRef>
+          <a:fillRef idx="3">
+            <a:schemeClr val="accent1"/>
+          </a:fillRef>
+          <a:effectRef idx="2">
+            <a:schemeClr val="accent1"/>
+          </a:effectRef>
+          <a:fontRef idx="minor">
+            <a:schemeClr val="lt1"/>
+          </a:fontRef>
+        </p:style>
+        <p:txBody>
+          <a:bodyPr rtlCol="0" anchor="ctr" wrap="square" lIns="228600" rIns="228600"/>
+          <a:lstStyle/>
+          <a:p>
+            <a:pPr algn="l"/>
+            <a:r>
+              <a:rPr sz="1200" b="1" i="0">
+                <a:solidFill>
+                  <a:srgbClr val="003C71"/>
+                </a:solidFill>
+                <a:latin typeface="Malgun Gothic"/>
+                <a:ea typeface="Malgun Gothic"/>
+                <a:cs typeface="Malgun Gothic"/>
+              </a:rPr>
+              <a:t>임상 연계   </a:t>
+            </a:r>
+            <a:r>
+              <a:rPr sz="1600" b="1" i="0">
+                <a:solidFill>
+                  <a:srgbClr val="11202B"/>
+                </a:solidFill>
+                <a:latin typeface="Malgun Gothic"/>
+                <a:ea typeface="Malgun Gothic"/>
+                <a:cs typeface="Malgun Gothic"/>
+              </a:rPr>
+              <a:t>임상 연계</a:t>
+            </a:r>
+            <a:r>
+              <a:rPr sz="1600" b="0" i="0">
+                <a:solidFill>
+                  <a:srgbClr val="11202B"/>
+                </a:solidFill>
+                <a:latin typeface="Malgun Gothic"/>
+                <a:ea typeface="Malgun Gothic"/>
+                <a:cs typeface="Malgun Gothic"/>
+              </a:rPr>
+              <a:t> 신생아 갑상샘 기능 저하증은 선별 검사의 대표적인 대상이다. 출생 직후에는 증상이 거의 없지만 치료하지 않으면 영구적인 신경 발달 장애가 남고, T4를 투여하면 완전히 예방할 수 있기 때문이다. 증상이 나타난 뒤에는 이미 늦으므로 모든 신생아에서 혈액을 채취해 TSH를 측정한다. 치료 효과가 확실하고 조기 발견이 결정적인 질환의 전형적인 예다.</a:t>
             </a:r>
           </a:p>
         </p:txBody>
@@ -14565,79 +13914,63 @@
           </a:p>
         </p:txBody>
       </p:sp>
-      <p:sp>
-        <p:nvSpPr>
-          <p:cNvPr id="7" name="Rectangle 6"/>
-          <p:cNvSpPr/>
+      <p:pic>
+        <p:nvPicPr>
+          <p:cNvPr id="7" name="Picture 6" descr="fig-thyroid.slide.png"/>
+          <p:cNvPicPr>
+            <a:picLocks noChangeAspect="1"/>
+          </p:cNvPicPr>
           <p:nvPr/>
-        </p:nvSpPr>
-        <p:spPr>
-          <a:xfrm>
-            <a:off x="640080" y="1325880"/>
-            <a:ext cx="10881360" cy="1386839"/>
-          </a:xfrm>
-          <a:prstGeom prst="rect">
-            <a:avLst/>
-          </a:prstGeom>
-          <a:solidFill>
-            <a:srgbClr val="E8F1FA"/>
-          </a:solidFill>
-          <a:ln>
-            <a:noFill/>
-          </a:ln>
-          <a:effectLst/>
-        </p:spPr>
-        <p:style>
-          <a:lnRef idx="1">
-            <a:schemeClr val="accent1"/>
-          </a:lnRef>
-          <a:fillRef idx="3">
-            <a:schemeClr val="accent1"/>
-          </a:fillRef>
-          <a:effectRef idx="2">
-            <a:schemeClr val="accent1"/>
-          </a:effectRef>
-          <a:fontRef idx="minor">
-            <a:schemeClr val="lt1"/>
-          </a:fontRef>
-        </p:style>
-        <p:txBody>
-          <a:bodyPr rtlCol="0" anchor="ctr" wrap="square" lIns="228600" rIns="228600"/>
-          <a:lstStyle/>
-          <a:p>
-            <a:pPr algn="l"/>
-            <a:r>
-              <a:rPr sz="1200" b="1" i="0">
-                <a:solidFill>
-                  <a:srgbClr val="003C71"/>
-                </a:solidFill>
-                <a:latin typeface="Malgun Gothic"/>
-                <a:ea typeface="Malgun Gothic"/>
-                <a:cs typeface="Malgun Gothic"/>
-              </a:rPr>
-              <a:t>임상 연계   </a:t>
-            </a:r>
-            <a:r>
-              <a:rPr sz="1600" b="1" i="0">
-                <a:solidFill>
-                  <a:srgbClr val="11202B"/>
-                </a:solidFill>
-                <a:latin typeface="Malgun Gothic"/>
-                <a:ea typeface="Malgun Gothic"/>
-                <a:cs typeface="Malgun Gothic"/>
-              </a:rPr>
-              <a:t>임상 연계</a:t>
-            </a:r>
-            <a:r>
-              <a:rPr sz="1600" b="0" i="0">
-                <a:solidFill>
-                  <a:srgbClr val="11202B"/>
-                </a:solidFill>
-                <a:latin typeface="Malgun Gothic"/>
-                <a:ea typeface="Malgun Gothic"/>
-                <a:cs typeface="Malgun Gothic"/>
-              </a:rPr>
-              <a:t> 신생아 갑상샘 기능 저하증은 선별 검사의 대표적인 대상이다. 출생 직후에는 증상이 거의 없지만 치료하지 않으면 영구적인 신경 발달 장애가 남고, T4를 투여하면 완전히 예방할 수 있기 때문이다. 증상이 나타난 뒤에는 이미 늦으므로 모든 신생아에서 혈액을 채취해 TSH를 측정한다. 치료 효과가 확실하고 조기 발견이 결정적인 질환의 전형적인 예다.</a:t>
+        </p:nvPicPr>
+        <p:blipFill>
+          <a:blip r:embed="rId2"/>
+          <a:stretch>
+            <a:fillRect/>
+          </a:stretch>
+        </p:blipFill>
+        <p:spPr>
+          <a:xfrm>
+            <a:off x="1848967" y="1325880"/>
+            <a:ext cx="8493760" cy="4343400"/>
+          </a:xfrm>
+          <a:prstGeom prst="rect">
+            <a:avLst/>
+          </a:prstGeom>
+        </p:spPr>
+      </p:pic>
+      <p:sp>
+        <p:nvSpPr>
+          <p:cNvPr id="8" name="TextBox 7"/>
+          <p:cNvSpPr txBox="1"/>
+          <p:nvPr/>
+        </p:nvSpPr>
+        <p:spPr>
+          <a:xfrm>
+            <a:off x="640080" y="5806440"/>
+            <a:ext cx="10881360" cy="548640"/>
+          </a:xfrm>
+          <a:prstGeom prst="rect">
+            <a:avLst/>
+          </a:prstGeom>
+          <a:noFill/>
+        </p:spPr>
+        <p:txBody>
+          <a:bodyPr wrap="square" anchor="t">
+            <a:spAutoFit/>
+          </a:bodyPr>
+          <a:lstStyle/>
+          <a:p>
+            <a:pPr algn="ctr"/>
+            <a:r>
+              <a:rPr sz="1200" b="0" i="0">
+                <a:solidFill>
+                  <a:srgbClr val="66788A"/>
+                </a:solidFill>
+                <a:latin typeface="Malgun Gothic"/>
+                <a:ea typeface="Malgun Gothic"/>
+                <a:cs typeface="Malgun Gothic"/>
+              </a:rPr>
+              <a:t>갑상샘 호르몬의 합성 다섯 단계. Follicle과 colloid의 구조, NIS에 의한 iodide 농축, TPO의 유기화와 결합 반응, thyroglobulin에 저장된 형태, 그리고 T4가 표적 조직에서 deiodinase에 의해 활성형 T3로 전환되는 경로를 함께 보인다.</a:t>
             </a:r>
           </a:p>
         </p:txBody>
@@ -14886,63 +14219,189 @@
           </a:p>
         </p:txBody>
       </p:sp>
-      <p:pic>
-        <p:nvPicPr>
-          <p:cNvPr id="7" name="Picture 6" descr="fig-thyroid.slide.png"/>
-          <p:cNvPicPr>
-            <a:picLocks noChangeAspect="1"/>
-          </p:cNvPicPr>
+      <p:sp>
+        <p:nvSpPr>
+          <p:cNvPr id="7" name="Rectangle 6"/>
+          <p:cNvSpPr/>
           <p:nvPr/>
-        </p:nvPicPr>
-        <p:blipFill>
-          <a:blip r:embed="rId2"/>
-          <a:stretch>
-            <a:fillRect/>
-          </a:stretch>
-        </p:blipFill>
-        <p:spPr>
-          <a:xfrm>
-            <a:off x="1848967" y="1325880"/>
-            <a:ext cx="8493760" cy="4343400"/>
-          </a:xfrm>
-          <a:prstGeom prst="rect">
-            <a:avLst/>
-          </a:prstGeom>
-        </p:spPr>
-      </p:pic>
-      <p:sp>
-        <p:nvSpPr>
-          <p:cNvPr id="8" name="TextBox 7"/>
-          <p:cNvSpPr txBox="1"/>
-          <p:nvPr/>
-        </p:nvSpPr>
-        <p:spPr>
-          <a:xfrm>
-            <a:off x="640080" y="5806440"/>
-            <a:ext cx="10881360" cy="548640"/>
-          </a:xfrm>
-          <a:prstGeom prst="rect">
-            <a:avLst/>
-          </a:prstGeom>
-          <a:noFill/>
-        </p:spPr>
-        <p:txBody>
-          <a:bodyPr wrap="square" anchor="t">
-            <a:spAutoFit/>
-          </a:bodyPr>
-          <a:lstStyle/>
-          <a:p>
-            <a:pPr algn="ctr"/>
-            <a:r>
-              <a:rPr sz="1200" b="0" i="0">
-                <a:solidFill>
-                  <a:srgbClr val="66788A"/>
-                </a:solidFill>
-                <a:latin typeface="Malgun Gothic"/>
-                <a:ea typeface="Malgun Gothic"/>
-                <a:cs typeface="Malgun Gothic"/>
-              </a:rPr>
-              <a:t>갑상샘 호르몬의 합성 다섯 단계. Follicle과 colloid의 구조, NIS에 의한 iodide 농축, TPO의 유기화와 결합 반응, thyroglobulin에 저장된 형태, 그리고 T4가 표적 조직에서 deiodinase에 의해 활성형 T3로 전환되는 경로를 함께 보인다.</a:t>
+        </p:nvSpPr>
+        <p:spPr>
+          <a:xfrm>
+            <a:off x="640080" y="1325880"/>
+            <a:ext cx="10881360" cy="2270759"/>
+          </a:xfrm>
+          <a:prstGeom prst="rect">
+            <a:avLst/>
+          </a:prstGeom>
+          <a:solidFill>
+            <a:srgbClr val="ECF6EC"/>
+          </a:solidFill>
+          <a:ln>
+            <a:noFill/>
+          </a:ln>
+          <a:effectLst/>
+        </p:spPr>
+        <p:style>
+          <a:lnRef idx="1">
+            <a:schemeClr val="accent1"/>
+          </a:lnRef>
+          <a:fillRef idx="3">
+            <a:schemeClr val="accent1"/>
+          </a:fillRef>
+          <a:effectRef idx="2">
+            <a:schemeClr val="accent1"/>
+          </a:effectRef>
+          <a:fontRef idx="minor">
+            <a:schemeClr val="lt1"/>
+          </a:fontRef>
+        </p:style>
+        <p:txBody>
+          <a:bodyPr rtlCol="0" anchor="ctr" wrap="square" lIns="228600" rIns="228600"/>
+          <a:lstStyle/>
+          <a:p>
+            <a:pPr algn="l"/>
+            <a:r>
+              <a:rPr sz="1200" b="1" i="0">
+                <a:solidFill>
+                  <a:srgbClr val="1E6B2C"/>
+                </a:solidFill>
+                <a:latin typeface="Malgun Gothic"/>
+                <a:ea typeface="Malgun Gothic"/>
+                <a:cs typeface="Malgun Gothic"/>
+              </a:rPr>
+              <a:t>시험에서 가려내는 지점   </a:t>
+            </a:r>
+            <a:r>
+              <a:rPr sz="1600" b="1" i="0">
+                <a:solidFill>
+                  <a:srgbClr val="11202B"/>
+                </a:solidFill>
+                <a:latin typeface="Malgun Gothic"/>
+                <a:ea typeface="Malgun Gothic"/>
+                <a:cs typeface="Malgun Gothic"/>
+              </a:rPr>
+              <a:t>시험에서 가려내는 지점</a:t>
+            </a:r>
+            <a:r>
+              <a:rPr sz="1600" b="0" i="0">
+                <a:solidFill>
+                  <a:srgbClr val="11202B"/>
+                </a:solidFill>
+                <a:latin typeface="Malgun Gothic"/>
+                <a:ea typeface="Malgun Gothic"/>
+                <a:cs typeface="Malgun Gothic"/>
+              </a:rPr>
+              <a:t> 갑상샘 검사에서 두 가지 함정이 반복된다. 첫째, </a:t>
+            </a:r>
+            <a:r>
+              <a:rPr sz="1600" b="1" i="0">
+                <a:solidFill>
+                  <a:srgbClr val="11202B"/>
+                </a:solidFill>
+                <a:latin typeface="Malgun Gothic"/>
+                <a:ea typeface="Malgun Gothic"/>
+                <a:cs typeface="Malgun Gothic"/>
+              </a:rPr>
+              <a:t>임신과 경구 estrogen은 TBG를 늘려 총 T4를 올리지만 free T4는 정상</a:t>
+            </a:r>
+            <a:r>
+              <a:rPr sz="1600" b="0" i="0">
+                <a:solidFill>
+                  <a:srgbClr val="11202B"/>
+                </a:solidFill>
+                <a:latin typeface="Malgun Gothic"/>
+                <a:ea typeface="Malgun Gothic"/>
+                <a:cs typeface="Malgun Gothic"/>
+              </a:rPr>
+              <a:t>이다. 기능 판단은 언제나 free T4로 한다. 둘째, </a:t>
+            </a:r>
+            <a:r>
+              <a:rPr sz="1600" b="1" i="0">
+                <a:solidFill>
+                  <a:srgbClr val="11202B"/>
+                </a:solidFill>
+                <a:latin typeface="Malgun Gothic"/>
+                <a:ea typeface="Malgun Gothic"/>
+                <a:cs typeface="Malgun Gothic"/>
+              </a:rPr>
+              <a:t>중증 질환에서 나타나는 저T3 증후군</a:t>
+            </a:r>
+            <a:r>
+              <a:rPr sz="1600" b="0" i="0">
+                <a:solidFill>
+                  <a:srgbClr val="11202B"/>
+                </a:solidFill>
+                <a:latin typeface="Malgun Gothic"/>
+                <a:ea typeface="Malgun Gothic"/>
+                <a:cs typeface="Malgun Gothic"/>
+              </a:rPr>
+              <a:t>은 갑상샘 질환이 아니다. 말초에서 T4를 T3로 바꾸는 탈요오드화 효소의 활성이 바뀌어 T3가 낮고 역T3가 높아지며 TSH는 대개 정상이다. 급성기에 갑상샘 기능검사를 하면 해석할 수 없는 값이 나오는 이유이고, 회복 뒤 다시 재는 것이 원칙이다. 셋째, 갑상샘 중독증에서 </a:t>
+            </a:r>
+            <a:r>
+              <a:rPr sz="1600" b="1" i="0">
+                <a:solidFill>
+                  <a:srgbClr val="11202B"/>
+                </a:solidFill>
+                <a:latin typeface="Malgun Gothic"/>
+                <a:ea typeface="Malgun Gothic"/>
+                <a:cs typeface="Malgun Gothic"/>
+              </a:rPr>
+              <a:t>Graves 병과 갑상샘염</a:t>
+            </a:r>
+            <a:r>
+              <a:rPr sz="1600" b="0" i="0">
+                <a:solidFill>
+                  <a:srgbClr val="11202B"/>
+                </a:solidFill>
+                <a:latin typeface="Malgun Gothic"/>
+                <a:ea typeface="Malgun Gothic"/>
+                <a:cs typeface="Malgun Gothic"/>
+              </a:rPr>
+              <a:t>을 가르는 것은 방사성 요오드 섭취율이다. Graves는 갑상샘이 스스로 만들고 있으므로 섭취율이 </a:t>
+            </a:r>
+            <a:r>
+              <a:rPr sz="1600" b="1" i="0">
+                <a:solidFill>
+                  <a:srgbClr val="11202B"/>
+                </a:solidFill>
+                <a:latin typeface="Malgun Gothic"/>
+                <a:ea typeface="Malgun Gothic"/>
+                <a:cs typeface="Malgun Gothic"/>
+              </a:rPr>
+              <a:t>올라가고</a:t>
+            </a:r>
+            <a:r>
+              <a:rPr sz="1600" b="0" i="0">
+                <a:solidFill>
+                  <a:srgbClr val="11202B"/>
+                </a:solidFill>
+                <a:latin typeface="Malgun Gothic"/>
+                <a:ea typeface="Malgun Gothic"/>
+                <a:cs typeface="Malgun Gothic"/>
+              </a:rPr>
+              <a:t>, 갑상샘염은 저장된 호르몬이 새어 나오는 것이므로 섭취율이 </a:t>
+            </a:r>
+            <a:r>
+              <a:rPr sz="1600" b="1" i="0">
+                <a:solidFill>
+                  <a:srgbClr val="11202B"/>
+                </a:solidFill>
+                <a:latin typeface="Malgun Gothic"/>
+                <a:ea typeface="Malgun Gothic"/>
+                <a:cs typeface="Malgun Gothic"/>
+              </a:rPr>
+              <a:t>떨어진다</a:t>
+            </a:r>
+            <a:r>
+              <a:rPr sz="1600" b="0" i="0">
+                <a:solidFill>
+                  <a:srgbClr val="11202B"/>
+                </a:solidFill>
+                <a:latin typeface="Malgun Gothic"/>
+                <a:ea typeface="Malgun Gothic"/>
+                <a:cs typeface="Malgun Gothic"/>
+              </a:rPr>
+              <a:t>. 치료가 정반대이므로 구분이 필수다.</a:t>
             </a:r>
           </a:p>
         </p:txBody>
@@ -17834,7 +17293,7 @@
                 <a:ea typeface="Malgun Gothic"/>
                 <a:cs typeface="Malgun Gothic"/>
               </a:rPr>
-              <a:t>08   </a:t>
+              <a:t>REFERENCES   </a:t>
             </a:r>
             <a:r>
               <a:rPr sz="2400" b="1" i="0">
@@ -17845,7 +17304,7 @@
                 <a:ea typeface="Malgun Gothic"/>
                 <a:cs typeface="Malgun Gothic"/>
               </a:rPr>
-              <a:t>8. 혈당 조절: insulin과 glucagon</a:t>
+              <a:t>참고문헌</a:t>
             </a:r>
           </a:p>
         </p:txBody>
@@ -17925,7 +17384,7 @@
               </a:spcAft>
             </a:pPr>
             <a:r>
-              <a:rPr sz="1400" b="1" i="0">
+              <a:rPr sz="1600" b="1" i="0">
                 <a:solidFill>
                   <a:srgbClr val="F2B705"/>
                 </a:solidFill>
@@ -17936,37 +17395,15 @@
               <a:t>•  </a:t>
             </a:r>
             <a:r>
-              <a:rPr sz="1400" b="0" i="0">
-                <a:solidFill>
-                  <a:srgbClr val="11202B"/>
-                </a:solidFill>
-                <a:latin typeface="Malgun Gothic"/>
-                <a:ea typeface="Malgun Gothic"/>
-                <a:cs typeface="Malgun Gothic"/>
-              </a:rPr>
-              <a:t>혈당 조절은 내분비 조절의 원리를 가장 선명하게 보여 주는 예다. 두 호르몬이 반대 방향으로 작용하며, 둘 다 췌장의 </a:t>
-            </a:r>
-            <a:r>
-              <a:rPr sz="1400" b="1" i="0">
-                <a:solidFill>
-                  <a:srgbClr val="11202B"/>
-                </a:solidFill>
-                <a:latin typeface="Malgun Gothic"/>
-                <a:ea typeface="Malgun Gothic"/>
-                <a:cs typeface="Malgun Gothic"/>
-              </a:rPr>
-              <a:t>islet of Langerhans</a:t>
-            </a:r>
-            <a:r>
-              <a:rPr sz="1400" b="0" i="0">
-                <a:solidFill>
-                  <a:srgbClr val="11202B"/>
-                </a:solidFill>
-                <a:latin typeface="Malgun Gothic"/>
-                <a:ea typeface="Malgun Gothic"/>
-                <a:cs typeface="Malgun Gothic"/>
-              </a:rPr>
-              <a:t>에서 나온다. β cell이 insulin을, α cell이 glucagon을, δ cell이 somatostatin을 분비한다.</a:t>
+              <a:rPr sz="1600" b="0" i="0">
+                <a:solidFill>
+                  <a:srgbClr val="11202B"/>
+                </a:solidFill>
+                <a:latin typeface="Malgun Gothic"/>
+                <a:ea typeface="Malgun Gothic"/>
+                <a:cs typeface="Malgun Gothic"/>
+              </a:rPr>
+              <a:t>Melmed S, Auchus RJ, Goldfine AB, et al., eds. Williams Textbook of Endocrinology. 14th ed. Elsevier; 2020.</a:t>
             </a:r>
           </a:p>
           <a:p>
@@ -17976,7 +17413,7 @@
               </a:spcAft>
             </a:pPr>
             <a:r>
-              <a:rPr sz="1400" b="1" i="0">
+              <a:rPr sz="1600" b="1" i="0">
                 <a:solidFill>
                   <a:srgbClr val="F2B705"/>
                 </a:solidFill>
@@ -17987,26 +17424,15 @@
               <a:t>•  </a:t>
             </a:r>
             <a:r>
-              <a:rPr sz="1400" b="1" i="0">
-                <a:solidFill>
-                  <a:srgbClr val="11202B"/>
-                </a:solidFill>
-                <a:latin typeface="Malgun Gothic"/>
-                <a:ea typeface="Malgun Gothic"/>
-                <a:cs typeface="Malgun Gothic"/>
-              </a:rPr>
-              <a:t>Insulin: 혈당을 내리는 유일한 호르몬.</a:t>
-            </a:r>
-            <a:r>
-              <a:rPr sz="1400" b="0" i="0">
-                <a:solidFill>
-                  <a:srgbClr val="11202B"/>
-                </a:solidFill>
-                <a:latin typeface="Malgun Gothic"/>
-                <a:ea typeface="Malgun Gothic"/>
-                <a:cs typeface="Malgun Gothic"/>
-              </a:rPr>
-              <a:t> 분비 자극은 혈당 상승이며, 앞 수업에서 본 incretin(GIP, GLP-1)이 이를 증폭한다. 분비 기전은 다음과 같다. 혈당이 올라가면 β cell이 GLUT2로 포도당을 받아들이고, 대사해 ATP를 만든다. ATP가 ATP 민감성 K⁺ 통로를 닫으면 세포가 탈분극하고, Ca²⁺ 통로가 열려 들어온 Ca²⁺이 insulin 소포의 방출을 일으킨다.</a:t>
+              <a:rPr sz="1600" b="0" i="0">
+                <a:solidFill>
+                  <a:srgbClr val="11202B"/>
+                </a:solidFill>
+                <a:latin typeface="Malgun Gothic"/>
+                <a:ea typeface="Malgun Gothic"/>
+                <a:cs typeface="Malgun Gothic"/>
+              </a:rPr>
+              <a:t>Hall JE, Hall ME. Guyton and Hall Textbook of Medical Physiology. 14th ed. Elsevier; 2021. Unit XIV, Endocrinology and Reproduction.</a:t>
             </a:r>
           </a:p>
           <a:p>
@@ -18016,7 +17442,7 @@
               </a:spcAft>
             </a:pPr>
             <a:r>
-              <a:rPr sz="1400" b="1" i="0">
+              <a:rPr sz="1600" b="1" i="0">
                 <a:solidFill>
                   <a:srgbClr val="F2B705"/>
                 </a:solidFill>
@@ -18027,15 +17453,15 @@
               <a:t>•  </a:t>
             </a:r>
             <a:r>
-              <a:rPr sz="1400" b="0" i="0">
-                <a:solidFill>
-                  <a:srgbClr val="11202B"/>
-                </a:solidFill>
-                <a:latin typeface="Malgun Gothic"/>
-                <a:ea typeface="Malgun Gothic"/>
-                <a:cs typeface="Malgun Gothic"/>
-              </a:rPr>
-              <a:t>Insulin은 수용체 tyrosine kinase를 통해 작용하며, 기관별 효과는 다음과 같다.</a:t>
+              <a:rPr sz="1600" b="0" i="0">
+                <a:solidFill>
+                  <a:srgbClr val="11202B"/>
+                </a:solidFill>
+                <a:latin typeface="Malgun Gothic"/>
+                <a:ea typeface="Malgun Gothic"/>
+                <a:cs typeface="Malgun Gothic"/>
+              </a:rPr>
+              <a:t>Boron WF, Boulpaep EL. Medical Physiology. 3rd ed. Elsevier; 2017. Section IX, The Endocrine System.</a:t>
             </a:r>
           </a:p>
           <a:p>
@@ -18045,7 +17471,7 @@
               </a:spcAft>
             </a:pPr>
             <a:r>
-              <a:rPr sz="1400" b="1" i="0">
+              <a:rPr sz="1600" b="1" i="0">
                 <a:solidFill>
                   <a:srgbClr val="F2B705"/>
                 </a:solidFill>
@@ -18056,48 +17482,15 @@
               <a:t>•  </a:t>
             </a:r>
             <a:r>
-              <a:rPr sz="1400" b="1" i="0">
-                <a:solidFill>
-                  <a:srgbClr val="11202B"/>
-                </a:solidFill>
-                <a:latin typeface="Malgun Gothic"/>
-                <a:ea typeface="Malgun Gothic"/>
-                <a:cs typeface="Malgun Gothic"/>
-              </a:rPr>
-              <a:t>근육과 지방 조직</a:t>
-            </a:r>
-            <a:r>
-              <a:rPr sz="1400" b="0" i="0">
-                <a:solidFill>
-                  <a:srgbClr val="11202B"/>
-                </a:solidFill>
-                <a:latin typeface="Malgun Gothic"/>
-                <a:ea typeface="Malgun Gothic"/>
-                <a:cs typeface="Malgun Gothic"/>
-              </a:rPr>
-              <a:t>: </a:t>
-            </a:r>
-            <a:r>
-              <a:rPr sz="1400" b="1" i="0">
-                <a:solidFill>
-                  <a:srgbClr val="11202B"/>
-                </a:solidFill>
-                <a:latin typeface="Malgun Gothic"/>
-                <a:ea typeface="Malgun Gothic"/>
-                <a:cs typeface="Malgun Gothic"/>
-              </a:rPr>
-              <a:t>GLUT4</a:t>
-            </a:r>
-            <a:r>
-              <a:rPr sz="1400" b="0" i="0">
-                <a:solidFill>
-                  <a:srgbClr val="11202B"/>
-                </a:solidFill>
-                <a:latin typeface="Malgun Gothic"/>
-                <a:ea typeface="Malgun Gothic"/>
-                <a:cs typeface="Malgun Gothic"/>
-              </a:rPr>
-              <a:t> 수송체를 세포막으로 이동시켜 포도당 흡수를 늘린다. 이것이 혈당을 내리는 주된 기전이다.</a:t>
+              <a:rPr sz="1600" b="0" i="0">
+                <a:solidFill>
+                  <a:srgbClr val="11202B"/>
+                </a:solidFill>
+                <a:latin typeface="Malgun Gothic"/>
+                <a:ea typeface="Malgun Gothic"/>
+                <a:cs typeface="Malgun Gothic"/>
+              </a:rPr>
+              <a:t>Molina PE. Endocrine Physiology. 5th ed. McGraw Hill; 2018.</a:t>
             </a:r>
           </a:p>
           <a:p>
@@ -18107,7 +17500,7 @@
               </a:spcAft>
             </a:pPr>
             <a:r>
-              <a:rPr sz="1400" b="1" i="0">
+              <a:rPr sz="1600" b="1" i="0">
                 <a:solidFill>
                   <a:srgbClr val="F2B705"/>
                 </a:solidFill>
@@ -18118,26 +17511,15 @@
               <a:t>•  </a:t>
             </a:r>
             <a:r>
-              <a:rPr sz="1400" b="1" i="0">
-                <a:solidFill>
-                  <a:srgbClr val="11202B"/>
-                </a:solidFill>
-                <a:latin typeface="Malgun Gothic"/>
-                <a:ea typeface="Malgun Gothic"/>
-                <a:cs typeface="Malgun Gothic"/>
-              </a:rPr>
-              <a:t>간</a:t>
-            </a:r>
-            <a:r>
-              <a:rPr sz="1400" b="0" i="0">
-                <a:solidFill>
-                  <a:srgbClr val="11202B"/>
-                </a:solidFill>
-                <a:latin typeface="Malgun Gothic"/>
-                <a:ea typeface="Malgun Gothic"/>
-                <a:cs typeface="Malgun Gothic"/>
-              </a:rPr>
-              <a:t>: Glycogen 합성을 촉진하고 분해를 억제한다. Glucose를 새로 만드는 과정도 억제한다.</a:t>
+              <a:rPr sz="1600" b="0" i="0">
+                <a:solidFill>
+                  <a:srgbClr val="11202B"/>
+                </a:solidFill>
+                <a:latin typeface="Malgun Gothic"/>
+                <a:ea typeface="Malgun Gothic"/>
+                <a:cs typeface="Malgun Gothic"/>
+              </a:rPr>
+              <a:t>Costanzo LS. Physiology. 7th ed. Elsevier; 2022. Chapter 9, Endocrine Physiology.</a:t>
             </a:r>
           </a:p>
           <a:p>
@@ -18147,7 +17529,7 @@
               </a:spcAft>
             </a:pPr>
             <a:r>
-              <a:rPr sz="1400" b="1" i="0">
+              <a:rPr sz="1600" b="1" i="0">
                 <a:solidFill>
                   <a:srgbClr val="F2B705"/>
                 </a:solidFill>
@@ -18158,680 +17540,6 @@
               <a:t>•  </a:t>
             </a:r>
             <a:r>
-              <a:rPr sz="1400" b="1" i="0">
-                <a:solidFill>
-                  <a:srgbClr val="11202B"/>
-                </a:solidFill>
-                <a:latin typeface="Malgun Gothic"/>
-                <a:ea typeface="Malgun Gothic"/>
-                <a:cs typeface="Malgun Gothic"/>
-              </a:rPr>
-              <a:t>지방 조직</a:t>
-            </a:r>
-            <a:r>
-              <a:rPr sz="1400" b="0" i="0">
-                <a:solidFill>
-                  <a:srgbClr val="11202B"/>
-                </a:solidFill>
-                <a:latin typeface="Malgun Gothic"/>
-                <a:ea typeface="Malgun Gothic"/>
-                <a:cs typeface="Malgun Gothic"/>
-              </a:rPr>
-              <a:t>: 지질 합성을 촉진하고 분해를 억제한다.</a:t>
-            </a:r>
-          </a:p>
-          <a:p>
-            <a:pPr>
-              <a:spcAft>
-                <a:spcPts val="900"/>
-              </a:spcAft>
-            </a:pPr>
-            <a:r>
-              <a:rPr sz="1400" b="1" i="0">
-                <a:solidFill>
-                  <a:srgbClr val="F2B705"/>
-                </a:solidFill>
-                <a:latin typeface="Malgun Gothic"/>
-                <a:ea typeface="Malgun Gothic"/>
-                <a:cs typeface="Malgun Gothic"/>
-              </a:rPr>
-              <a:t>•  </a:t>
-            </a:r>
-            <a:r>
-              <a:rPr sz="1400" b="1" i="0">
-                <a:solidFill>
-                  <a:srgbClr val="11202B"/>
-                </a:solidFill>
-                <a:latin typeface="Malgun Gothic"/>
-                <a:ea typeface="Malgun Gothic"/>
-                <a:cs typeface="Malgun Gothic"/>
-              </a:rPr>
-              <a:t>전신</a:t>
-            </a:r>
-            <a:r>
-              <a:rPr sz="1400" b="0" i="0">
-                <a:solidFill>
-                  <a:srgbClr val="11202B"/>
-                </a:solidFill>
-                <a:latin typeface="Malgun Gothic"/>
-                <a:ea typeface="Malgun Gothic"/>
-                <a:cs typeface="Malgun Gothic"/>
-              </a:rPr>
-              <a:t>: 아미노산 흡수와 단백질 합성을 촉진한다.</a:t>
-            </a:r>
-          </a:p>
-          <a:p>
-            <a:pPr>
-              <a:spcAft>
-                <a:spcPts val="900"/>
-              </a:spcAft>
-            </a:pPr>
-            <a:r>
-              <a:rPr sz="1400" b="1" i="0">
-                <a:solidFill>
-                  <a:srgbClr val="F2B705"/>
-                </a:solidFill>
-                <a:latin typeface="Malgun Gothic"/>
-                <a:ea typeface="Malgun Gothic"/>
-                <a:cs typeface="Malgun Gothic"/>
-              </a:rPr>
-              <a:t>•  </a:t>
-            </a:r>
-            <a:r>
-              <a:rPr sz="1400" b="0" i="0">
-                <a:solidFill>
-                  <a:srgbClr val="11202B"/>
-                </a:solidFill>
-                <a:latin typeface="Malgun Gothic"/>
-                <a:ea typeface="Malgun Gothic"/>
-                <a:cs typeface="Malgun Gothic"/>
-              </a:rPr>
-              <a:t>Insulin을 </a:t>
-            </a:r>
-            <a:r>
-              <a:rPr sz="1400" b="1" i="0">
-                <a:solidFill>
-                  <a:srgbClr val="11202B"/>
-                </a:solidFill>
-                <a:latin typeface="Malgun Gothic"/>
-                <a:ea typeface="Malgun Gothic"/>
-                <a:cs typeface="Malgun Gothic"/>
-              </a:rPr>
-              <a:t>저장의 호르몬</a:t>
-            </a:r>
-            <a:r>
-              <a:rPr sz="1400" b="0" i="0">
-                <a:solidFill>
-                  <a:srgbClr val="11202B"/>
-                </a:solidFill>
-                <a:latin typeface="Malgun Gothic"/>
-                <a:ea typeface="Malgun Gothic"/>
-                <a:cs typeface="Malgun Gothic"/>
-              </a:rPr>
-              <a:t>으로 이해하는 것이 좋다. 영양소가 들어온 상태에서 그것을 세포로 들여보내고 저장 형태로 바꾸는 모든 방향으로 작용한다.</a:t>
-            </a:r>
-          </a:p>
-          <a:p>
-            <a:pPr>
-              <a:spcAft>
-                <a:spcPts val="900"/>
-              </a:spcAft>
-            </a:pPr>
-            <a:r>
-              <a:rPr sz="1400" b="1" i="0">
-                <a:solidFill>
-                  <a:srgbClr val="F2B705"/>
-                </a:solidFill>
-                <a:latin typeface="Malgun Gothic"/>
-                <a:ea typeface="Malgun Gothic"/>
-                <a:cs typeface="Malgun Gothic"/>
-              </a:rPr>
-              <a:t>•  </a:t>
-            </a:r>
-            <a:r>
-              <a:rPr sz="1400" b="1" i="0">
-                <a:solidFill>
-                  <a:srgbClr val="11202B"/>
-                </a:solidFill>
-                <a:latin typeface="Malgun Gothic"/>
-                <a:ea typeface="Malgun Gothic"/>
-                <a:cs typeface="Malgun Gothic"/>
-              </a:rPr>
-              <a:t>Glucagon: 혈당을 올리는 호르몬.</a:t>
-            </a:r>
-            <a:r>
-              <a:rPr sz="1400" b="0" i="0">
-                <a:solidFill>
-                  <a:srgbClr val="11202B"/>
-                </a:solidFill>
-                <a:latin typeface="Malgun Gothic"/>
-                <a:ea typeface="Malgun Gothic"/>
-                <a:cs typeface="Malgun Gothic"/>
-              </a:rPr>
-              <a:t> 분비 자극은 혈당 저하다. 표적은 거의 전적으로 </a:t>
-            </a:r>
-            <a:r>
-              <a:rPr sz="1400" b="1" i="0">
-                <a:solidFill>
-                  <a:srgbClr val="11202B"/>
-                </a:solidFill>
-                <a:latin typeface="Malgun Gothic"/>
-                <a:ea typeface="Malgun Gothic"/>
-                <a:cs typeface="Malgun Gothic"/>
-              </a:rPr>
-              <a:t>간</a:t>
-            </a:r>
-            <a:r>
-              <a:rPr sz="1400" b="0" i="0">
-                <a:solidFill>
-                  <a:srgbClr val="11202B"/>
-                </a:solidFill>
-                <a:latin typeface="Malgun Gothic"/>
-                <a:ea typeface="Malgun Gothic"/>
-                <a:cs typeface="Malgun Gothic"/>
-              </a:rPr>
-              <a:t>이며, cAMP 경로를 통해 작용한다.</a:t>
-            </a:r>
-          </a:p>
-          <a:p>
-            <a:pPr>
-              <a:spcAft>
-                <a:spcPts val="900"/>
-              </a:spcAft>
-            </a:pPr>
-            <a:r>
-              <a:rPr sz="1400" b="1" i="0">
-                <a:solidFill>
-                  <a:srgbClr val="F2B705"/>
-                </a:solidFill>
-                <a:latin typeface="Malgun Gothic"/>
-                <a:ea typeface="Malgun Gothic"/>
-                <a:cs typeface="Malgun Gothic"/>
-              </a:rPr>
-              <a:t>•  </a:t>
-            </a:r>
-            <a:r>
-              <a:rPr sz="1400" b="0" i="0">
-                <a:solidFill>
-                  <a:srgbClr val="11202B"/>
-                </a:solidFill>
-                <a:latin typeface="Malgun Gothic"/>
-                <a:ea typeface="Malgun Gothic"/>
-                <a:cs typeface="Malgun Gothic"/>
-              </a:rPr>
-              <a:t>Glycogen을 분해해 glucose를 내보낸다(빠른 반응)</a:t>
-            </a:r>
-          </a:p>
-          <a:p>
-            <a:pPr>
-              <a:spcAft>
-                <a:spcPts val="900"/>
-              </a:spcAft>
-            </a:pPr>
-            <a:r>
-              <a:rPr sz="1400" b="1" i="0">
-                <a:solidFill>
-                  <a:srgbClr val="F2B705"/>
-                </a:solidFill>
-                <a:latin typeface="Malgun Gothic"/>
-                <a:ea typeface="Malgun Gothic"/>
-                <a:cs typeface="Malgun Gothic"/>
-              </a:rPr>
-              <a:t>•  </a:t>
-            </a:r>
-            <a:r>
-              <a:rPr sz="1400" b="0" i="0">
-                <a:solidFill>
-                  <a:srgbClr val="11202B"/>
-                </a:solidFill>
-                <a:latin typeface="Malgun Gothic"/>
-                <a:ea typeface="Malgun Gothic"/>
-                <a:cs typeface="Malgun Gothic"/>
-              </a:rPr>
-              <a:t>아미노산과 glycerol로부터 glucose를 새로 만든다(지속적 반응)</a:t>
-            </a:r>
-          </a:p>
-          <a:p>
-            <a:pPr>
-              <a:spcAft>
-                <a:spcPts val="900"/>
-              </a:spcAft>
-            </a:pPr>
-            <a:r>
-              <a:rPr sz="1400" b="1" i="0">
-                <a:solidFill>
-                  <a:srgbClr val="F2B705"/>
-                </a:solidFill>
-                <a:latin typeface="Malgun Gothic"/>
-                <a:ea typeface="Malgun Gothic"/>
-                <a:cs typeface="Malgun Gothic"/>
-              </a:rPr>
-              <a:t>•  </a:t>
-            </a:r>
-            <a:r>
-              <a:rPr sz="1400" b="0" i="0">
-                <a:solidFill>
-                  <a:srgbClr val="11202B"/>
-                </a:solidFill>
-                <a:latin typeface="Malgun Gothic"/>
-                <a:ea typeface="Malgun Gothic"/>
-                <a:cs typeface="Malgun Gothic"/>
-              </a:rPr>
-              <a:t>지방산을 산화해 ketone body를 만든다(긴 공복에서)</a:t>
-            </a:r>
-          </a:p>
-          <a:p>
-            <a:pPr>
-              <a:spcAft>
-                <a:spcPts val="900"/>
-              </a:spcAft>
-            </a:pPr>
-            <a:r>
-              <a:rPr sz="1400" b="1" i="0">
-                <a:solidFill>
-                  <a:srgbClr val="F2B705"/>
-                </a:solidFill>
-                <a:latin typeface="Malgun Gothic"/>
-                <a:ea typeface="Malgun Gothic"/>
-                <a:cs typeface="Malgun Gothic"/>
-              </a:rPr>
-              <a:t>•  </a:t>
-            </a:r>
-            <a:r>
-              <a:rPr sz="1400" b="0" i="0">
-                <a:solidFill>
-                  <a:srgbClr val="11202B"/>
-                </a:solidFill>
-                <a:latin typeface="Malgun Gothic"/>
-                <a:ea typeface="Malgun Gothic"/>
-                <a:cs typeface="Malgun Gothic"/>
-              </a:rPr>
-              <a:t>Insulin과 glucagon의 표적 차이에 주목해야 한다. </a:t>
-            </a:r>
-            <a:r>
-              <a:rPr sz="1400" b="1" i="0">
-                <a:solidFill>
-                  <a:srgbClr val="11202B"/>
-                </a:solidFill>
-                <a:latin typeface="Malgun Gothic"/>
-                <a:ea typeface="Malgun Gothic"/>
-                <a:cs typeface="Malgun Gothic"/>
-              </a:rPr>
-              <a:t>Insulin은 여러 기관에 작용하고, glucagon은 거의 간에만 작용한다.</a:t>
-            </a:r>
-            <a:r>
-              <a:rPr sz="1400" b="0" i="0">
-                <a:solidFill>
-                  <a:srgbClr val="11202B"/>
-                </a:solidFill>
-                <a:latin typeface="Malgun Gothic"/>
-                <a:ea typeface="Malgun Gothic"/>
-                <a:cs typeface="Malgun Gothic"/>
-              </a:rPr>
-              <a:t> 혈당을 내리려면 여러 곳에서 포도당을 거두어들여야 하지만, 올리려면 포도당을 내보낼 수 있는 곳이 간뿐이기 때문이다.</a:t>
-            </a:r>
-          </a:p>
-          <a:p>
-            <a:pPr>
-              <a:spcAft>
-                <a:spcPts val="900"/>
-              </a:spcAft>
-            </a:pPr>
-            <a:r>
-              <a:rPr sz="1400" b="1" i="0">
-                <a:solidFill>
-                  <a:srgbClr val="F2B705"/>
-                </a:solidFill>
-                <a:latin typeface="Malgun Gothic"/>
-                <a:ea typeface="Malgun Gothic"/>
-                <a:cs typeface="Malgun Gothic"/>
-              </a:rPr>
-              <a:t>•  </a:t>
-            </a:r>
-            <a:r>
-              <a:rPr sz="1400" b="0" i="0">
-                <a:solidFill>
-                  <a:srgbClr val="11202B"/>
-                </a:solidFill>
-                <a:latin typeface="Malgun Gothic"/>
-                <a:ea typeface="Malgun Gothic"/>
-                <a:cs typeface="Malgun Gothic"/>
-              </a:rPr>
-              <a:t>혈당을 올리는 호르몬은 glucagon 하나가 아니다. Epinephrine(빠른 반응), cortisol(지속적 반응), growth hormone이 모두 혈당을 올린다. 반면 </a:t>
-            </a:r>
-            <a:r>
-              <a:rPr sz="1400" b="1" i="0">
-                <a:solidFill>
-                  <a:srgbClr val="11202B"/>
-                </a:solidFill>
-                <a:latin typeface="Malgun Gothic"/>
-                <a:ea typeface="Malgun Gothic"/>
-                <a:cs typeface="Malgun Gothic"/>
-              </a:rPr>
-              <a:t>혈당을 내리는 호르몬은 insulin 하나뿐이다.</a:t>
-            </a:r>
-            <a:r>
-              <a:rPr sz="1400" b="0" i="0">
-                <a:solidFill>
-                  <a:srgbClr val="11202B"/>
-                </a:solidFill>
-                <a:latin typeface="Malgun Gothic"/>
-                <a:ea typeface="Malgun Gothic"/>
-                <a:cs typeface="Malgun Gothic"/>
-              </a:rPr>
-              <a:t> 이 비대칭은 생존 조건에서 나온다. 저혈당은 수 분 안에 뇌 기능을 멈추게 하므로 여러 겹의 방어가 필요하고, 고혈당은 급성으로는 덜 위험하다.</a:t>
-            </a:r>
-          </a:p>
-        </p:txBody>
-      </p:sp>
-    </p:spTree>
-  </p:cSld>
-  <p:clrMapOvr>
-    <a:masterClrMapping/>
-  </p:clrMapOvr>
-</p:sld>
-</file>
-
-<file path=ppt/slides/slide35.xml><?xml version="1.0" encoding="utf-8"?>
-<p:sld xmlns:a="http://schemas.openxmlformats.org/drawingml/2006/main" xmlns:p="http://schemas.openxmlformats.org/presentationml/2006/main" xmlns:r="http://schemas.openxmlformats.org/officeDocument/2006/relationships">
-  <p:cSld>
-    <p:spTree>
-      <p:nvGrpSpPr>
-        <p:cNvPr id="1" name=""/>
-        <p:cNvGrpSpPr/>
-        <p:nvPr/>
-      </p:nvGrpSpPr>
-      <p:grpSpPr/>
-      <p:sp>
-        <p:nvSpPr>
-          <p:cNvPr id="2" name="Rectangle 1"/>
-          <p:cNvSpPr/>
-          <p:nvPr/>
-        </p:nvSpPr>
-        <p:spPr>
-          <a:xfrm>
-            <a:off x="0" y="0"/>
-            <a:ext cx="12191695" cy="6858000"/>
-          </a:xfrm>
-          <a:prstGeom prst="rect">
-            <a:avLst/>
-          </a:prstGeom>
-          <a:solidFill>
-            <a:srgbClr val="F5F8F9"/>
-          </a:solidFill>
-          <a:ln>
-            <a:noFill/>
-          </a:ln>
-          <a:effectLst/>
-        </p:spPr>
-        <p:style>
-          <a:lnRef idx="1">
-            <a:schemeClr val="accent1"/>
-          </a:lnRef>
-          <a:fillRef idx="3">
-            <a:schemeClr val="accent1"/>
-          </a:fillRef>
-          <a:effectRef idx="2">
-            <a:schemeClr val="accent1"/>
-          </a:effectRef>
-          <a:fontRef idx="minor">
-            <a:schemeClr val="lt1"/>
-          </a:fontRef>
-        </p:style>
-        <p:txBody>
-          <a:bodyPr rtlCol="0" anchor="ctr"/>
-          <a:lstStyle/>
-          <a:p>
-            <a:pPr algn="ctr"/>
-          </a:p>
-        </p:txBody>
-      </p:sp>
-      <p:sp>
-        <p:nvSpPr>
-          <p:cNvPr id="3" name="Rectangle 2"/>
-          <p:cNvSpPr/>
-          <p:nvPr/>
-        </p:nvSpPr>
-        <p:spPr>
-          <a:xfrm>
-            <a:off x="0" y="0"/>
-            <a:ext cx="12191695" cy="960120"/>
-          </a:xfrm>
-          <a:prstGeom prst="rect">
-            <a:avLst/>
-          </a:prstGeom>
-          <a:solidFill>
-            <a:srgbClr val="003C71"/>
-          </a:solidFill>
-          <a:ln>
-            <a:noFill/>
-          </a:ln>
-          <a:effectLst/>
-        </p:spPr>
-        <p:style>
-          <a:lnRef idx="1">
-            <a:schemeClr val="accent1"/>
-          </a:lnRef>
-          <a:fillRef idx="3">
-            <a:schemeClr val="accent1"/>
-          </a:fillRef>
-          <a:effectRef idx="2">
-            <a:schemeClr val="accent1"/>
-          </a:effectRef>
-          <a:fontRef idx="minor">
-            <a:schemeClr val="lt1"/>
-          </a:fontRef>
-        </p:style>
-        <p:txBody>
-          <a:bodyPr rtlCol="0" anchor="ctr"/>
-          <a:lstStyle/>
-          <a:p>
-            <a:pPr algn="ctr"/>
-          </a:p>
-        </p:txBody>
-      </p:sp>
-      <p:sp>
-        <p:nvSpPr>
-          <p:cNvPr id="4" name="Rectangle 3"/>
-          <p:cNvSpPr/>
-          <p:nvPr/>
-        </p:nvSpPr>
-        <p:spPr>
-          <a:xfrm>
-            <a:off x="0" y="960120"/>
-            <a:ext cx="12191695" cy="54864"/>
-          </a:xfrm>
-          <a:prstGeom prst="rect">
-            <a:avLst/>
-          </a:prstGeom>
-          <a:solidFill>
-            <a:srgbClr val="F2B705"/>
-          </a:solidFill>
-          <a:ln>
-            <a:noFill/>
-          </a:ln>
-          <a:effectLst/>
-        </p:spPr>
-        <p:style>
-          <a:lnRef idx="1">
-            <a:schemeClr val="accent1"/>
-          </a:lnRef>
-          <a:fillRef idx="3">
-            <a:schemeClr val="accent1"/>
-          </a:fillRef>
-          <a:effectRef idx="2">
-            <a:schemeClr val="accent1"/>
-          </a:effectRef>
-          <a:fontRef idx="minor">
-            <a:schemeClr val="lt1"/>
-          </a:fontRef>
-        </p:style>
-        <p:txBody>
-          <a:bodyPr rtlCol="0" anchor="ctr"/>
-          <a:lstStyle/>
-          <a:p>
-            <a:pPr algn="ctr"/>
-          </a:p>
-        </p:txBody>
-      </p:sp>
-      <p:sp>
-        <p:nvSpPr>
-          <p:cNvPr id="5" name="TextBox 4"/>
-          <p:cNvSpPr txBox="1"/>
-          <p:nvPr/>
-        </p:nvSpPr>
-        <p:spPr>
-          <a:xfrm>
-            <a:off x="457200" y="109728"/>
-            <a:ext cx="11247120" cy="777240"/>
-          </a:xfrm>
-          <a:prstGeom prst="rect">
-            <a:avLst/>
-          </a:prstGeom>
-          <a:noFill/>
-        </p:spPr>
-        <p:txBody>
-          <a:bodyPr wrap="square" anchor="ctr">
-            <a:spAutoFit/>
-          </a:bodyPr>
-          <a:lstStyle/>
-          <a:p>
-            <a:r>
-              <a:rPr sz="1300" b="1" i="0">
-                <a:solidFill>
-                  <a:srgbClr val="F2B705"/>
-                </a:solidFill>
-                <a:latin typeface="Malgun Gothic"/>
-                <a:ea typeface="Malgun Gothic"/>
-                <a:cs typeface="Malgun Gothic"/>
-              </a:rPr>
-              <a:t>08   </a:t>
-            </a:r>
-            <a:r>
-              <a:rPr sz="2400" b="1" i="0">
-                <a:solidFill>
-                  <a:srgbClr val="FFFFFF"/>
-                </a:solidFill>
-                <a:latin typeface="Malgun Gothic"/>
-                <a:ea typeface="Malgun Gothic"/>
-                <a:cs typeface="Malgun Gothic"/>
-              </a:rPr>
-              <a:t>8. 혈당 조절: insulin과 glucagon</a:t>
-            </a:r>
-          </a:p>
-        </p:txBody>
-      </p:sp>
-      <p:sp>
-        <p:nvSpPr>
-          <p:cNvPr id="6" name="TextBox 5"/>
-          <p:cNvSpPr txBox="1"/>
-          <p:nvPr/>
-        </p:nvSpPr>
-        <p:spPr>
-          <a:xfrm>
-            <a:off x="457200" y="6446520"/>
-            <a:ext cx="11247120" cy="301752"/>
-          </a:xfrm>
-          <a:prstGeom prst="rect">
-            <a:avLst/>
-          </a:prstGeom>
-          <a:noFill/>
-        </p:spPr>
-        <p:txBody>
-          <a:bodyPr wrap="square" anchor="ctr">
-            <a:spAutoFit/>
-          </a:bodyPr>
-          <a:lstStyle/>
-          <a:p>
-            <a:r>
-              <a:rPr sz="900" b="0" i="0">
-                <a:solidFill>
-                  <a:srgbClr val="66788A"/>
-                </a:solidFill>
-                <a:latin typeface="Malgun Gothic"/>
-                <a:ea typeface="Malgun Gothic"/>
-                <a:cs typeface="Malgun Gothic"/>
-              </a:rPr>
-              <a:t>M01-W02-L02  ·  내분비계 요약: 호르몬과 되먹임</a:t>
-            </a:r>
-            <a:r>
-              <a:rPr sz="900" b="1" i="0">
-                <a:solidFill>
-                  <a:srgbClr val="003C71"/>
-                </a:solidFill>
-                <a:latin typeface="Malgun Gothic"/>
-                <a:ea typeface="Malgun Gothic"/>
-                <a:cs typeface="Malgun Gothic"/>
-              </a:rPr>
-              <a:t>      35</a:t>
-            </a:r>
-          </a:p>
-        </p:txBody>
-      </p:sp>
-      <p:sp>
-        <p:nvSpPr>
-          <p:cNvPr id="7" name="Rectangle 6"/>
-          <p:cNvSpPr/>
-          <p:nvPr/>
-        </p:nvSpPr>
-        <p:spPr>
-          <a:xfrm>
-            <a:off x="640080" y="1325880"/>
-            <a:ext cx="10881360" cy="1681480"/>
-          </a:xfrm>
-          <a:prstGeom prst="rect">
-            <a:avLst/>
-          </a:prstGeom>
-          <a:solidFill>
-            <a:srgbClr val="E8F1FA"/>
-          </a:solidFill>
-          <a:ln>
-            <a:noFill/>
-          </a:ln>
-          <a:effectLst/>
-        </p:spPr>
-        <p:style>
-          <a:lnRef idx="1">
-            <a:schemeClr val="accent1"/>
-          </a:lnRef>
-          <a:fillRef idx="3">
-            <a:schemeClr val="accent1"/>
-          </a:fillRef>
-          <a:effectRef idx="2">
-            <a:schemeClr val="accent1"/>
-          </a:effectRef>
-          <a:fontRef idx="minor">
-            <a:schemeClr val="lt1"/>
-          </a:fontRef>
-        </p:style>
-        <p:txBody>
-          <a:bodyPr rtlCol="0" anchor="ctr" wrap="square" lIns="228600" rIns="228600"/>
-          <a:lstStyle/>
-          <a:p>
-            <a:pPr algn="l"/>
-            <a:r>
-              <a:rPr sz="1200" b="1" i="0">
-                <a:solidFill>
-                  <a:srgbClr val="003C71"/>
-                </a:solidFill>
-                <a:latin typeface="Malgun Gothic"/>
-                <a:ea typeface="Malgun Gothic"/>
-                <a:cs typeface="Malgun Gothic"/>
-              </a:rPr>
-              <a:t>임상 연계   </a:t>
-            </a:r>
-            <a:r>
-              <a:rPr sz="1600" b="1" i="0">
-                <a:solidFill>
-                  <a:srgbClr val="11202B"/>
-                </a:solidFill>
-                <a:latin typeface="Malgun Gothic"/>
-                <a:ea typeface="Malgun Gothic"/>
-                <a:cs typeface="Malgun Gothic"/>
-              </a:rPr>
-              <a:t>임상 연계</a:t>
-            </a:r>
-            <a:r>
               <a:rPr sz="1600" b="0" i="0">
                 <a:solidFill>
                   <a:srgbClr val="11202B"/>
@@ -18840,1434 +17548,7 @@
                 <a:ea typeface="Malgun Gothic"/>
                 <a:cs typeface="Malgun Gothic"/>
               </a:rPr>
-              <a:t> 제1형 당뇨병은 β cell이 자가면역으로 파괴되어 insulin이 절대적으로 부족한 상태다. Insulin이 없으면 포도당이 세포로 들어가지 못해 혈당이 올라가는 동시에, 지질 분해가 억제되지 않아 지방산이 대량으로 간에 들어가 ketone body가 과도하게 만들어진다. 그 결과 고혈당과 산증이 함께 나타나는 당뇨병성 ketoacidosis가 된다. 제2형에서는 insulin이 남아 있어 지질 분해를 어느 정도 억제하므로 ketoacidosis가 드물다.</a:t>
-            </a:r>
-          </a:p>
-        </p:txBody>
-      </p:sp>
-    </p:spTree>
-  </p:cSld>
-  <p:clrMapOvr>
-    <a:masterClrMapping/>
-  </p:clrMapOvr>
-</p:sld>
-</file>
-
-<file path=ppt/slides/slide36.xml><?xml version="1.0" encoding="utf-8"?>
-<p:sld xmlns:a="http://schemas.openxmlformats.org/drawingml/2006/main" xmlns:p="http://schemas.openxmlformats.org/presentationml/2006/main" xmlns:r="http://schemas.openxmlformats.org/officeDocument/2006/relationships">
-  <p:cSld>
-    <p:spTree>
-      <p:nvGrpSpPr>
-        <p:cNvPr id="1" name=""/>
-        <p:cNvGrpSpPr/>
-        <p:nvPr/>
-      </p:nvGrpSpPr>
-      <p:grpSpPr/>
-      <p:sp>
-        <p:nvSpPr>
-          <p:cNvPr id="2" name="Rectangle 1"/>
-          <p:cNvSpPr/>
-          <p:nvPr/>
-        </p:nvSpPr>
-        <p:spPr>
-          <a:xfrm>
-            <a:off x="0" y="0"/>
-            <a:ext cx="12191695" cy="6858000"/>
-          </a:xfrm>
-          <a:prstGeom prst="rect">
-            <a:avLst/>
-          </a:prstGeom>
-          <a:solidFill>
-            <a:srgbClr val="F5F8F9"/>
-          </a:solidFill>
-          <a:ln>
-            <a:noFill/>
-          </a:ln>
-          <a:effectLst/>
-        </p:spPr>
-        <p:style>
-          <a:lnRef idx="1">
-            <a:schemeClr val="accent1"/>
-          </a:lnRef>
-          <a:fillRef idx="3">
-            <a:schemeClr val="accent1"/>
-          </a:fillRef>
-          <a:effectRef idx="2">
-            <a:schemeClr val="accent1"/>
-          </a:effectRef>
-          <a:fontRef idx="minor">
-            <a:schemeClr val="lt1"/>
-          </a:fontRef>
-        </p:style>
-        <p:txBody>
-          <a:bodyPr rtlCol="0" anchor="ctr"/>
-          <a:lstStyle/>
-          <a:p>
-            <a:pPr algn="ctr"/>
-          </a:p>
-        </p:txBody>
-      </p:sp>
-      <p:sp>
-        <p:nvSpPr>
-          <p:cNvPr id="3" name="Rectangle 2"/>
-          <p:cNvSpPr/>
-          <p:nvPr/>
-        </p:nvSpPr>
-        <p:spPr>
-          <a:xfrm>
-            <a:off x="0" y="0"/>
-            <a:ext cx="12191695" cy="960120"/>
-          </a:xfrm>
-          <a:prstGeom prst="rect">
-            <a:avLst/>
-          </a:prstGeom>
-          <a:solidFill>
-            <a:srgbClr val="003C71"/>
-          </a:solidFill>
-          <a:ln>
-            <a:noFill/>
-          </a:ln>
-          <a:effectLst/>
-        </p:spPr>
-        <p:style>
-          <a:lnRef idx="1">
-            <a:schemeClr val="accent1"/>
-          </a:lnRef>
-          <a:fillRef idx="3">
-            <a:schemeClr val="accent1"/>
-          </a:fillRef>
-          <a:effectRef idx="2">
-            <a:schemeClr val="accent1"/>
-          </a:effectRef>
-          <a:fontRef idx="minor">
-            <a:schemeClr val="lt1"/>
-          </a:fontRef>
-        </p:style>
-        <p:txBody>
-          <a:bodyPr rtlCol="0" anchor="ctr"/>
-          <a:lstStyle/>
-          <a:p>
-            <a:pPr algn="ctr"/>
-          </a:p>
-        </p:txBody>
-      </p:sp>
-      <p:sp>
-        <p:nvSpPr>
-          <p:cNvPr id="4" name="Rectangle 3"/>
-          <p:cNvSpPr/>
-          <p:nvPr/>
-        </p:nvSpPr>
-        <p:spPr>
-          <a:xfrm>
-            <a:off x="0" y="960120"/>
-            <a:ext cx="12191695" cy="54864"/>
-          </a:xfrm>
-          <a:prstGeom prst="rect">
-            <a:avLst/>
-          </a:prstGeom>
-          <a:solidFill>
-            <a:srgbClr val="F2B705"/>
-          </a:solidFill>
-          <a:ln>
-            <a:noFill/>
-          </a:ln>
-          <a:effectLst/>
-        </p:spPr>
-        <p:style>
-          <a:lnRef idx="1">
-            <a:schemeClr val="accent1"/>
-          </a:lnRef>
-          <a:fillRef idx="3">
-            <a:schemeClr val="accent1"/>
-          </a:fillRef>
-          <a:effectRef idx="2">
-            <a:schemeClr val="accent1"/>
-          </a:effectRef>
-          <a:fontRef idx="minor">
-            <a:schemeClr val="lt1"/>
-          </a:fontRef>
-        </p:style>
-        <p:txBody>
-          <a:bodyPr rtlCol="0" anchor="ctr"/>
-          <a:lstStyle/>
-          <a:p>
-            <a:pPr algn="ctr"/>
-          </a:p>
-        </p:txBody>
-      </p:sp>
-      <p:sp>
-        <p:nvSpPr>
-          <p:cNvPr id="5" name="TextBox 4"/>
-          <p:cNvSpPr txBox="1"/>
-          <p:nvPr/>
-        </p:nvSpPr>
-        <p:spPr>
-          <a:xfrm>
-            <a:off x="457200" y="109728"/>
-            <a:ext cx="11247120" cy="777240"/>
-          </a:xfrm>
-          <a:prstGeom prst="rect">
-            <a:avLst/>
-          </a:prstGeom>
-          <a:noFill/>
-        </p:spPr>
-        <p:txBody>
-          <a:bodyPr wrap="square" anchor="ctr">
-            <a:spAutoFit/>
-          </a:bodyPr>
-          <a:lstStyle/>
-          <a:p>
-            <a:r>
-              <a:rPr sz="1300" b="1" i="0">
-                <a:solidFill>
-                  <a:srgbClr val="F2B705"/>
-                </a:solidFill>
-                <a:latin typeface="Malgun Gothic"/>
-                <a:ea typeface="Malgun Gothic"/>
-                <a:cs typeface="Malgun Gothic"/>
-              </a:rPr>
-              <a:t>08   </a:t>
-            </a:r>
-            <a:r>
-              <a:rPr sz="2400" b="1" i="0">
-                <a:solidFill>
-                  <a:srgbClr val="FFFFFF"/>
-                </a:solidFill>
-                <a:latin typeface="Malgun Gothic"/>
-                <a:ea typeface="Malgun Gothic"/>
-                <a:cs typeface="Malgun Gothic"/>
-              </a:rPr>
-              <a:t>8. 혈당 조절: insulin과 glucagon</a:t>
-            </a:r>
-          </a:p>
-        </p:txBody>
-      </p:sp>
-      <p:sp>
-        <p:nvSpPr>
-          <p:cNvPr id="6" name="TextBox 5"/>
-          <p:cNvSpPr txBox="1"/>
-          <p:nvPr/>
-        </p:nvSpPr>
-        <p:spPr>
-          <a:xfrm>
-            <a:off x="457200" y="6446520"/>
-            <a:ext cx="11247120" cy="301752"/>
-          </a:xfrm>
-          <a:prstGeom prst="rect">
-            <a:avLst/>
-          </a:prstGeom>
-          <a:noFill/>
-        </p:spPr>
-        <p:txBody>
-          <a:bodyPr wrap="square" anchor="ctr">
-            <a:spAutoFit/>
-          </a:bodyPr>
-          <a:lstStyle/>
-          <a:p>
-            <a:r>
-              <a:rPr sz="900" b="0" i="0">
-                <a:solidFill>
-                  <a:srgbClr val="66788A"/>
-                </a:solidFill>
-                <a:latin typeface="Malgun Gothic"/>
-                <a:ea typeface="Malgun Gothic"/>
-                <a:cs typeface="Malgun Gothic"/>
-              </a:rPr>
-              <a:t>M01-W02-L02  ·  내분비계 요약: 호르몬과 되먹임</a:t>
-            </a:r>
-            <a:r>
-              <a:rPr sz="900" b="1" i="0">
-                <a:solidFill>
-                  <a:srgbClr val="003C71"/>
-                </a:solidFill>
-                <a:latin typeface="Malgun Gothic"/>
-                <a:ea typeface="Malgun Gothic"/>
-                <a:cs typeface="Malgun Gothic"/>
-              </a:rPr>
-              <a:t>      36</a:t>
-            </a:r>
-          </a:p>
-        </p:txBody>
-      </p:sp>
-      <p:pic>
-        <p:nvPicPr>
-          <p:cNvPr id="7" name="Picture 6" descr="fig-glucose-regulation.slide.png"/>
-          <p:cNvPicPr>
-            <a:picLocks noChangeAspect="1"/>
-          </p:cNvPicPr>
-          <p:nvPr/>
-        </p:nvPicPr>
-        <p:blipFill>
-          <a:blip r:embed="rId2"/>
-          <a:stretch>
-            <a:fillRect/>
-          </a:stretch>
-        </p:blipFill>
-        <p:spPr>
-          <a:xfrm>
-            <a:off x="1848967" y="1325880"/>
-            <a:ext cx="8493760" cy="4343400"/>
-          </a:xfrm>
-          <a:prstGeom prst="rect">
-            <a:avLst/>
-          </a:prstGeom>
-        </p:spPr>
-      </p:pic>
-      <p:sp>
-        <p:nvSpPr>
-          <p:cNvPr id="8" name="TextBox 7"/>
-          <p:cNvSpPr txBox="1"/>
-          <p:nvPr/>
-        </p:nvSpPr>
-        <p:spPr>
-          <a:xfrm>
-            <a:off x="640080" y="5806440"/>
-            <a:ext cx="10881360" cy="548640"/>
-          </a:xfrm>
-          <a:prstGeom prst="rect">
-            <a:avLst/>
-          </a:prstGeom>
-          <a:noFill/>
-        </p:spPr>
-        <p:txBody>
-          <a:bodyPr wrap="square" anchor="t">
-            <a:spAutoFit/>
-          </a:bodyPr>
-          <a:lstStyle/>
-          <a:p>
-            <a:pPr algn="ctr"/>
-            <a:r>
-              <a:rPr sz="1200" b="0" i="0">
-                <a:solidFill>
-                  <a:srgbClr val="66788A"/>
-                </a:solidFill>
-                <a:latin typeface="Malgun Gothic"/>
-                <a:ea typeface="Malgun Gothic"/>
-                <a:cs typeface="Malgun Gothic"/>
-              </a:rPr>
-              <a:t>혈당 조절에서 insulin과 glucagon의 작용. β cell의 insulin 분비 기전, GLUT4 이동을 통한 포도당 흡수, 기관별 효과의 차이, glucagon의 간 표적성, 그리고 혈당을 올리는 호르몬이 여럿인데 내리는 호르몬은 하나뿐인 비대칭을 함께 보인다.</a:t>
-            </a:r>
-          </a:p>
-        </p:txBody>
-      </p:sp>
-    </p:spTree>
-  </p:cSld>
-  <p:clrMapOvr>
-    <a:masterClrMapping/>
-  </p:clrMapOvr>
-</p:sld>
-</file>
-
-<file path=ppt/slides/slide37.xml><?xml version="1.0" encoding="utf-8"?>
-<p:sld xmlns:a="http://schemas.openxmlformats.org/drawingml/2006/main" xmlns:p="http://schemas.openxmlformats.org/presentationml/2006/main" xmlns:r="http://schemas.openxmlformats.org/officeDocument/2006/relationships">
-  <p:cSld>
-    <p:spTree>
-      <p:nvGrpSpPr>
-        <p:cNvPr id="1" name=""/>
-        <p:cNvGrpSpPr/>
-        <p:nvPr/>
-      </p:nvGrpSpPr>
-      <p:grpSpPr/>
-      <p:sp>
-        <p:nvSpPr>
-          <p:cNvPr id="2" name="Rectangle 1"/>
-          <p:cNvSpPr/>
-          <p:nvPr/>
-        </p:nvSpPr>
-        <p:spPr>
-          <a:xfrm>
-            <a:off x="0" y="0"/>
-            <a:ext cx="12191695" cy="6858000"/>
-          </a:xfrm>
-          <a:prstGeom prst="rect">
-            <a:avLst/>
-          </a:prstGeom>
-          <a:solidFill>
-            <a:srgbClr val="F5F8F9"/>
-          </a:solidFill>
-          <a:ln>
-            <a:noFill/>
-          </a:ln>
-          <a:effectLst/>
-        </p:spPr>
-        <p:style>
-          <a:lnRef idx="1">
-            <a:schemeClr val="accent1"/>
-          </a:lnRef>
-          <a:fillRef idx="3">
-            <a:schemeClr val="accent1"/>
-          </a:fillRef>
-          <a:effectRef idx="2">
-            <a:schemeClr val="accent1"/>
-          </a:effectRef>
-          <a:fontRef idx="minor">
-            <a:schemeClr val="lt1"/>
-          </a:fontRef>
-        </p:style>
-        <p:txBody>
-          <a:bodyPr rtlCol="0" anchor="ctr"/>
-          <a:lstStyle/>
-          <a:p>
-            <a:pPr algn="ctr"/>
-          </a:p>
-        </p:txBody>
-      </p:sp>
-      <p:sp>
-        <p:nvSpPr>
-          <p:cNvPr id="3" name="Rectangle 2"/>
-          <p:cNvSpPr/>
-          <p:nvPr/>
-        </p:nvSpPr>
-        <p:spPr>
-          <a:xfrm>
-            <a:off x="0" y="0"/>
-            <a:ext cx="12191695" cy="960120"/>
-          </a:xfrm>
-          <a:prstGeom prst="rect">
-            <a:avLst/>
-          </a:prstGeom>
-          <a:solidFill>
-            <a:srgbClr val="003C71"/>
-          </a:solidFill>
-          <a:ln>
-            <a:noFill/>
-          </a:ln>
-          <a:effectLst/>
-        </p:spPr>
-        <p:style>
-          <a:lnRef idx="1">
-            <a:schemeClr val="accent1"/>
-          </a:lnRef>
-          <a:fillRef idx="3">
-            <a:schemeClr val="accent1"/>
-          </a:fillRef>
-          <a:effectRef idx="2">
-            <a:schemeClr val="accent1"/>
-          </a:effectRef>
-          <a:fontRef idx="minor">
-            <a:schemeClr val="lt1"/>
-          </a:fontRef>
-        </p:style>
-        <p:txBody>
-          <a:bodyPr rtlCol="0" anchor="ctr"/>
-          <a:lstStyle/>
-          <a:p>
-            <a:pPr algn="ctr"/>
-          </a:p>
-        </p:txBody>
-      </p:sp>
-      <p:sp>
-        <p:nvSpPr>
-          <p:cNvPr id="4" name="Rectangle 3"/>
-          <p:cNvSpPr/>
-          <p:nvPr/>
-        </p:nvSpPr>
-        <p:spPr>
-          <a:xfrm>
-            <a:off x="0" y="960120"/>
-            <a:ext cx="12191695" cy="54864"/>
-          </a:xfrm>
-          <a:prstGeom prst="rect">
-            <a:avLst/>
-          </a:prstGeom>
-          <a:solidFill>
-            <a:srgbClr val="F2B705"/>
-          </a:solidFill>
-          <a:ln>
-            <a:noFill/>
-          </a:ln>
-          <a:effectLst/>
-        </p:spPr>
-        <p:style>
-          <a:lnRef idx="1">
-            <a:schemeClr val="accent1"/>
-          </a:lnRef>
-          <a:fillRef idx="3">
-            <a:schemeClr val="accent1"/>
-          </a:fillRef>
-          <a:effectRef idx="2">
-            <a:schemeClr val="accent1"/>
-          </a:effectRef>
-          <a:fontRef idx="minor">
-            <a:schemeClr val="lt1"/>
-          </a:fontRef>
-        </p:style>
-        <p:txBody>
-          <a:bodyPr rtlCol="0" anchor="ctr"/>
-          <a:lstStyle/>
-          <a:p>
-            <a:pPr algn="ctr"/>
-          </a:p>
-        </p:txBody>
-      </p:sp>
-      <p:sp>
-        <p:nvSpPr>
-          <p:cNvPr id="5" name="TextBox 4"/>
-          <p:cNvSpPr txBox="1"/>
-          <p:nvPr/>
-        </p:nvSpPr>
-        <p:spPr>
-          <a:xfrm>
-            <a:off x="457200" y="109728"/>
-            <a:ext cx="11247120" cy="777240"/>
-          </a:xfrm>
-          <a:prstGeom prst="rect">
-            <a:avLst/>
-          </a:prstGeom>
-          <a:noFill/>
-        </p:spPr>
-        <p:txBody>
-          <a:bodyPr wrap="square" anchor="ctr">
-            <a:spAutoFit/>
-          </a:bodyPr>
-          <a:lstStyle/>
-          <a:p>
-            <a:r>
-              <a:rPr sz="1300" b="1" i="0">
-                <a:solidFill>
-                  <a:srgbClr val="F2B705"/>
-                </a:solidFill>
-                <a:latin typeface="Malgun Gothic"/>
-                <a:ea typeface="Malgun Gothic"/>
-                <a:cs typeface="Malgun Gothic"/>
-              </a:rPr>
-              <a:t>09   </a:t>
-            </a:r>
-            <a:r>
-              <a:rPr sz="2400" b="1" i="0">
-                <a:solidFill>
-                  <a:srgbClr val="FFFFFF"/>
-                </a:solidFill>
-                <a:latin typeface="Malgun Gothic"/>
-                <a:ea typeface="Malgun Gothic"/>
-                <a:cs typeface="Malgun Gothic"/>
-              </a:rPr>
-              <a:t>9. 호르몬 작용의 상호작용 양식</a:t>
-            </a:r>
-          </a:p>
-        </p:txBody>
-      </p:sp>
-      <p:sp>
-        <p:nvSpPr>
-          <p:cNvPr id="6" name="TextBox 5"/>
-          <p:cNvSpPr txBox="1"/>
-          <p:nvPr/>
-        </p:nvSpPr>
-        <p:spPr>
-          <a:xfrm>
-            <a:off x="457200" y="6446520"/>
-            <a:ext cx="11247120" cy="301752"/>
-          </a:xfrm>
-          <a:prstGeom prst="rect">
-            <a:avLst/>
-          </a:prstGeom>
-          <a:noFill/>
-        </p:spPr>
-        <p:txBody>
-          <a:bodyPr wrap="square" anchor="ctr">
-            <a:spAutoFit/>
-          </a:bodyPr>
-          <a:lstStyle/>
-          <a:p>
-            <a:r>
-              <a:rPr sz="900" b="0" i="0">
-                <a:solidFill>
-                  <a:srgbClr val="66788A"/>
-                </a:solidFill>
-                <a:latin typeface="Malgun Gothic"/>
-                <a:ea typeface="Malgun Gothic"/>
-                <a:cs typeface="Malgun Gothic"/>
-              </a:rPr>
-              <a:t>M01-W02-L02  ·  내분비계 요약: 호르몬과 되먹임</a:t>
-            </a:r>
-            <a:r>
-              <a:rPr sz="900" b="1" i="0">
-                <a:solidFill>
-                  <a:srgbClr val="003C71"/>
-                </a:solidFill>
-                <a:latin typeface="Malgun Gothic"/>
-                <a:ea typeface="Malgun Gothic"/>
-                <a:cs typeface="Malgun Gothic"/>
-              </a:rPr>
-              <a:t>      37</a:t>
-            </a:r>
-          </a:p>
-        </p:txBody>
-      </p:sp>
-      <p:sp>
-        <p:nvSpPr>
-          <p:cNvPr id="7" name="TextBox 6"/>
-          <p:cNvSpPr txBox="1"/>
-          <p:nvPr/>
-        </p:nvSpPr>
-        <p:spPr>
-          <a:xfrm>
-            <a:off x="640080" y="1280160"/>
-            <a:ext cx="10881360" cy="5029200"/>
-          </a:xfrm>
-          <a:prstGeom prst="rect">
-            <a:avLst/>
-          </a:prstGeom>
-          <a:noFill/>
-        </p:spPr>
-        <p:txBody>
-          <a:bodyPr wrap="square" anchor="t">
-            <a:spAutoFit/>
-          </a:bodyPr>
-          <a:lstStyle/>
-          <a:p>
-            <a:pPr>
-              <a:spcAft>
-                <a:spcPts val="900"/>
-              </a:spcAft>
-            </a:pPr>
-            <a:r>
-              <a:rPr sz="1400" b="1" i="0">
-                <a:solidFill>
-                  <a:srgbClr val="F2B705"/>
-                </a:solidFill>
-                <a:latin typeface="Malgun Gothic"/>
-                <a:ea typeface="Malgun Gothic"/>
-                <a:cs typeface="Malgun Gothic"/>
-              </a:rPr>
-              <a:t>•  </a:t>
-            </a:r>
-            <a:r>
-              <a:rPr sz="1400" b="0" i="0">
-                <a:solidFill>
-                  <a:srgbClr val="11202B"/>
-                </a:solidFill>
-                <a:latin typeface="Malgun Gothic"/>
-                <a:ea typeface="Malgun Gothic"/>
-                <a:cs typeface="Malgun Gothic"/>
-              </a:rPr>
-              <a:t>호르몬은 혼자 작용하지 않는다. 여러 호르몬이 같은 표적에 함께 작용할 때 나타나는 양식을 세 가지로 구분하면 복잡한 상황을 정리할 수 있다.</a:t>
-            </a:r>
-          </a:p>
-          <a:p>
-            <a:pPr>
-              <a:spcAft>
-                <a:spcPts val="900"/>
-              </a:spcAft>
-            </a:pPr>
-            <a:r>
-              <a:rPr sz="1400" b="1" i="0">
-                <a:solidFill>
-                  <a:srgbClr val="F2B705"/>
-                </a:solidFill>
-                <a:latin typeface="Malgun Gothic"/>
-                <a:ea typeface="Malgun Gothic"/>
-                <a:cs typeface="Malgun Gothic"/>
-              </a:rPr>
-              <a:t>•  </a:t>
-            </a:r>
-            <a:r>
-              <a:rPr sz="1400" b="1" i="0">
-                <a:solidFill>
-                  <a:srgbClr val="11202B"/>
-                </a:solidFill>
-                <a:latin typeface="Malgun Gothic"/>
-                <a:ea typeface="Malgun Gothic"/>
-                <a:cs typeface="Malgun Gothic"/>
-              </a:rPr>
-              <a:t>상승(synergism)</a:t>
-            </a:r>
-            <a:r>
-              <a:rPr sz="1400" b="0" i="0">
-                <a:solidFill>
-                  <a:srgbClr val="11202B"/>
-                </a:solidFill>
-                <a:latin typeface="Malgun Gothic"/>
-                <a:ea typeface="Malgun Gothic"/>
-                <a:cs typeface="Malgun Gothic"/>
-              </a:rPr>
-              <a:t>. 두 호르몬이 함께 작용할 때의 효과가 각각의 효과를 더한 것보다 크다. 혈당을 올리는 데 epinephrine, cortisol, glucagon이 함께 작용하면 각각의 합보다 큰 상승이 나타난다. 서로 다른 경로를 통해 같은 결과를 향하기 때문이다.</a:t>
-            </a:r>
-          </a:p>
-          <a:p>
-            <a:pPr>
-              <a:spcAft>
-                <a:spcPts val="900"/>
-              </a:spcAft>
-            </a:pPr>
-            <a:r>
-              <a:rPr sz="1400" b="1" i="0">
-                <a:solidFill>
-                  <a:srgbClr val="F2B705"/>
-                </a:solidFill>
-                <a:latin typeface="Malgun Gothic"/>
-                <a:ea typeface="Malgun Gothic"/>
-                <a:cs typeface="Malgun Gothic"/>
-              </a:rPr>
-              <a:t>•  </a:t>
-            </a:r>
-            <a:r>
-              <a:rPr sz="1400" b="1" i="0">
-                <a:solidFill>
-                  <a:srgbClr val="11202B"/>
-                </a:solidFill>
-                <a:latin typeface="Malgun Gothic"/>
-                <a:ea typeface="Malgun Gothic"/>
-                <a:cs typeface="Malgun Gothic"/>
-              </a:rPr>
-              <a:t>허용(permissiveness)</a:t>
-            </a:r>
-            <a:r>
-              <a:rPr sz="1400" b="0" i="0">
-                <a:solidFill>
-                  <a:srgbClr val="11202B"/>
-                </a:solidFill>
-                <a:latin typeface="Malgun Gothic"/>
-                <a:ea typeface="Malgun Gothic"/>
-                <a:cs typeface="Malgun Gothic"/>
-              </a:rPr>
-              <a:t>. 한 호르몬이 자신은 효과를 내지 않으면서 다른 호르몬의 효과가 나타날 수 있게 한다. 갑상샘 호르몬이 β 수용체의 수를 늘려 catecholamine의 효과를 가능하게 하는 것이 대표적이다. 갑상샘 호르몬 자신은 심박수를 직접 크게 올리지 않지만, 그것이 없으면 catecholamine도 효과를 내지 못한다. Cortisol이 catecholamine의 혈관 수축 작용에 대해 가지는 허용 작용도 같은 범주이며, 부신 기능 저하 환자에서 혈압이 유지되지 않는 이유가 여기에 있다.</a:t>
-            </a:r>
-          </a:p>
-          <a:p>
-            <a:pPr>
-              <a:spcAft>
-                <a:spcPts val="900"/>
-              </a:spcAft>
-            </a:pPr>
-            <a:r>
-              <a:rPr sz="1400" b="1" i="0">
-                <a:solidFill>
-                  <a:srgbClr val="F2B705"/>
-                </a:solidFill>
-                <a:latin typeface="Malgun Gothic"/>
-                <a:ea typeface="Malgun Gothic"/>
-                <a:cs typeface="Malgun Gothic"/>
-              </a:rPr>
-              <a:t>•  </a:t>
-            </a:r>
-            <a:r>
-              <a:rPr sz="1400" b="1" i="0">
-                <a:solidFill>
-                  <a:srgbClr val="11202B"/>
-                </a:solidFill>
-                <a:latin typeface="Malgun Gothic"/>
-                <a:ea typeface="Malgun Gothic"/>
-                <a:cs typeface="Malgun Gothic"/>
-              </a:rPr>
-              <a:t>길항(antagonism)</a:t>
-            </a:r>
-            <a:r>
-              <a:rPr sz="1400" b="0" i="0">
-                <a:solidFill>
-                  <a:srgbClr val="11202B"/>
-                </a:solidFill>
-                <a:latin typeface="Malgun Gothic"/>
-                <a:ea typeface="Malgun Gothic"/>
-                <a:cs typeface="Malgun Gothic"/>
-              </a:rPr>
-              <a:t>. 두 호르몬이 반대 방향으로 작용한다. Insulin과 glucagon, PTH와 calcitonin이 예다. 길항은 다시 두 종류로 나뉜다. 같은 수용체를 두고 경쟁하는 경우(수용체 수준 길항)와, 서로 다른 수용체를 통해 반대 결과를 만드는 경우(기능적 길항)다. Insulin과 glucagon은 후자다.</a:t>
-            </a:r>
-          </a:p>
-          <a:p>
-            <a:pPr>
-              <a:spcAft>
-                <a:spcPts val="900"/>
-              </a:spcAft>
-            </a:pPr>
-            <a:r>
-              <a:rPr sz="1400" b="1" i="0">
-                <a:solidFill>
-                  <a:srgbClr val="F2B705"/>
-                </a:solidFill>
-                <a:latin typeface="Malgun Gothic"/>
-                <a:ea typeface="Malgun Gothic"/>
-                <a:cs typeface="Malgun Gothic"/>
-              </a:rPr>
-              <a:t>•  </a:t>
-            </a:r>
-            <a:r>
-              <a:rPr sz="1400" b="1" i="0">
-                <a:solidFill>
-                  <a:srgbClr val="11202B"/>
-                </a:solidFill>
-                <a:latin typeface="Malgun Gothic"/>
-                <a:ea typeface="Malgun Gothic"/>
-                <a:cs typeface="Malgun Gothic"/>
-              </a:rPr>
-              <a:t>호르몬 수용체의 교차 작용</a:t>
-            </a:r>
-            <a:r>
-              <a:rPr sz="1400" b="0" i="0">
-                <a:solidFill>
-                  <a:srgbClr val="11202B"/>
-                </a:solidFill>
-                <a:latin typeface="Malgun Gothic"/>
-                <a:ea typeface="Malgun Gothic"/>
-                <a:cs typeface="Malgun Gothic"/>
-              </a:rPr>
-              <a:t>도 알아 둘 만하다. 구조가 비슷한 호르몬은 서로의 수용체에 약하게 결합할 수 있다. Aldosterone과 cortisol이 대표적인 예다. 둘 다 steroid이고 구조가 비슷해 cortisol도 mineralocorticoid 수용체에 결합할 수 있으며, 혈중 cortisol 농도가 aldosterone보다 훨씬 높으므로 이론적으로는 cortisol이 그 수용체를 점령할 것이다.</a:t>
-            </a:r>
-          </a:p>
-          <a:p>
-            <a:pPr>
-              <a:spcAft>
-                <a:spcPts val="900"/>
-              </a:spcAft>
-            </a:pPr>
-            <a:r>
-              <a:rPr sz="1400" b="1" i="0">
-                <a:solidFill>
-                  <a:srgbClr val="F2B705"/>
-                </a:solidFill>
-                <a:latin typeface="Malgun Gothic"/>
-                <a:ea typeface="Malgun Gothic"/>
-                <a:cs typeface="Malgun Gothic"/>
-              </a:rPr>
-              <a:t>•  </a:t>
-            </a:r>
-            <a:r>
-              <a:rPr sz="1400" b="0" i="0">
-                <a:solidFill>
-                  <a:srgbClr val="11202B"/>
-                </a:solidFill>
-                <a:latin typeface="Malgun Gothic"/>
-                <a:ea typeface="Malgun Gothic"/>
-                <a:cs typeface="Malgun Gothic"/>
-              </a:rPr>
-              <a:t>이 문제를 해결하는 장치가 신장에 있다. 집합관 세포에는 </a:t>
-            </a:r>
-            <a:r>
-              <a:rPr sz="1400" b="1" i="0">
-                <a:solidFill>
-                  <a:srgbClr val="11202B"/>
-                </a:solidFill>
-                <a:latin typeface="Malgun Gothic"/>
-                <a:ea typeface="Malgun Gothic"/>
-                <a:cs typeface="Malgun Gothic"/>
-              </a:rPr>
-              <a:t>11β-hydroxysteroid dehydrogenase type 2</a:t>
-            </a:r>
-            <a:r>
-              <a:rPr sz="1400" b="0" i="0">
-                <a:solidFill>
-                  <a:srgbClr val="11202B"/>
-                </a:solidFill>
-                <a:latin typeface="Malgun Gothic"/>
-                <a:ea typeface="Malgun Gothic"/>
-                <a:cs typeface="Malgun Gothic"/>
-              </a:rPr>
-              <a:t>라는 효소가 있어 cortisol을 수용체에 결합하지 못하는 cortisone으로 바꾼다. 즉 수용체에 도달하기 전에 cortisol을 없애 aldosterone만 작용하게 한다. 이 효소를 억제하는 물질(감초의 glycyrrhizin이 대표)을 많이 섭취하면 cortisol이 mineralocorticoid 수용체를 자극해 고혈압과 저칼륨혈증이 생긴다.</a:t>
-            </a:r>
-          </a:p>
-        </p:txBody>
-      </p:sp>
-    </p:spTree>
-  </p:cSld>
-  <p:clrMapOvr>
-    <a:masterClrMapping/>
-  </p:clrMapOvr>
-</p:sld>
-</file>
-
-<file path=ppt/slides/slide38.xml><?xml version="1.0" encoding="utf-8"?>
-<p:sld xmlns:a="http://schemas.openxmlformats.org/drawingml/2006/main" xmlns:p="http://schemas.openxmlformats.org/presentationml/2006/main" xmlns:r="http://schemas.openxmlformats.org/officeDocument/2006/relationships">
-  <p:cSld>
-    <p:spTree>
-      <p:nvGrpSpPr>
-        <p:cNvPr id="1" name=""/>
-        <p:cNvGrpSpPr/>
-        <p:nvPr/>
-      </p:nvGrpSpPr>
-      <p:grpSpPr/>
-      <p:sp>
-        <p:nvSpPr>
-          <p:cNvPr id="2" name="Rectangle 1"/>
-          <p:cNvSpPr/>
-          <p:nvPr/>
-        </p:nvSpPr>
-        <p:spPr>
-          <a:xfrm>
-            <a:off x="0" y="0"/>
-            <a:ext cx="12191695" cy="6858000"/>
-          </a:xfrm>
-          <a:prstGeom prst="rect">
-            <a:avLst/>
-          </a:prstGeom>
-          <a:solidFill>
-            <a:srgbClr val="F5F8F9"/>
-          </a:solidFill>
-          <a:ln>
-            <a:noFill/>
-          </a:ln>
-          <a:effectLst/>
-        </p:spPr>
-        <p:style>
-          <a:lnRef idx="1">
-            <a:schemeClr val="accent1"/>
-          </a:lnRef>
-          <a:fillRef idx="3">
-            <a:schemeClr val="accent1"/>
-          </a:fillRef>
-          <a:effectRef idx="2">
-            <a:schemeClr val="accent1"/>
-          </a:effectRef>
-          <a:fontRef idx="minor">
-            <a:schemeClr val="lt1"/>
-          </a:fontRef>
-        </p:style>
-        <p:txBody>
-          <a:bodyPr rtlCol="0" anchor="ctr"/>
-          <a:lstStyle/>
-          <a:p>
-            <a:pPr algn="ctr"/>
-          </a:p>
-        </p:txBody>
-      </p:sp>
-      <p:sp>
-        <p:nvSpPr>
-          <p:cNvPr id="3" name="Rectangle 2"/>
-          <p:cNvSpPr/>
-          <p:nvPr/>
-        </p:nvSpPr>
-        <p:spPr>
-          <a:xfrm>
-            <a:off x="0" y="0"/>
-            <a:ext cx="12191695" cy="960120"/>
-          </a:xfrm>
-          <a:prstGeom prst="rect">
-            <a:avLst/>
-          </a:prstGeom>
-          <a:solidFill>
-            <a:srgbClr val="003C71"/>
-          </a:solidFill>
-          <a:ln>
-            <a:noFill/>
-          </a:ln>
-          <a:effectLst/>
-        </p:spPr>
-        <p:style>
-          <a:lnRef idx="1">
-            <a:schemeClr val="accent1"/>
-          </a:lnRef>
-          <a:fillRef idx="3">
-            <a:schemeClr val="accent1"/>
-          </a:fillRef>
-          <a:effectRef idx="2">
-            <a:schemeClr val="accent1"/>
-          </a:effectRef>
-          <a:fontRef idx="minor">
-            <a:schemeClr val="lt1"/>
-          </a:fontRef>
-        </p:style>
-        <p:txBody>
-          <a:bodyPr rtlCol="0" anchor="ctr"/>
-          <a:lstStyle/>
-          <a:p>
-            <a:pPr algn="ctr"/>
-          </a:p>
-        </p:txBody>
-      </p:sp>
-      <p:sp>
-        <p:nvSpPr>
-          <p:cNvPr id="4" name="Rectangle 3"/>
-          <p:cNvSpPr/>
-          <p:nvPr/>
-        </p:nvSpPr>
-        <p:spPr>
-          <a:xfrm>
-            <a:off x="0" y="960120"/>
-            <a:ext cx="12191695" cy="54864"/>
-          </a:xfrm>
-          <a:prstGeom prst="rect">
-            <a:avLst/>
-          </a:prstGeom>
-          <a:solidFill>
-            <a:srgbClr val="F2B705"/>
-          </a:solidFill>
-          <a:ln>
-            <a:noFill/>
-          </a:ln>
-          <a:effectLst/>
-        </p:spPr>
-        <p:style>
-          <a:lnRef idx="1">
-            <a:schemeClr val="accent1"/>
-          </a:lnRef>
-          <a:fillRef idx="3">
-            <a:schemeClr val="accent1"/>
-          </a:fillRef>
-          <a:effectRef idx="2">
-            <a:schemeClr val="accent1"/>
-          </a:effectRef>
-          <a:fontRef idx="minor">
-            <a:schemeClr val="lt1"/>
-          </a:fontRef>
-        </p:style>
-        <p:txBody>
-          <a:bodyPr rtlCol="0" anchor="ctr"/>
-          <a:lstStyle/>
-          <a:p>
-            <a:pPr algn="ctr"/>
-          </a:p>
-        </p:txBody>
-      </p:sp>
-      <p:sp>
-        <p:nvSpPr>
-          <p:cNvPr id="5" name="TextBox 4"/>
-          <p:cNvSpPr txBox="1"/>
-          <p:nvPr/>
-        </p:nvSpPr>
-        <p:spPr>
-          <a:xfrm>
-            <a:off x="457200" y="109728"/>
-            <a:ext cx="11247120" cy="777240"/>
-          </a:xfrm>
-          <a:prstGeom prst="rect">
-            <a:avLst/>
-          </a:prstGeom>
-          <a:noFill/>
-        </p:spPr>
-        <p:txBody>
-          <a:bodyPr wrap="square" anchor="ctr">
-            <a:spAutoFit/>
-          </a:bodyPr>
-          <a:lstStyle/>
-          <a:p>
-            <a:r>
-              <a:rPr sz="1300" b="1" i="0">
-                <a:solidFill>
-                  <a:srgbClr val="F2B705"/>
-                </a:solidFill>
-                <a:latin typeface="Malgun Gothic"/>
-                <a:ea typeface="Malgun Gothic"/>
-                <a:cs typeface="Malgun Gothic"/>
-              </a:rPr>
-              <a:t>09   </a:t>
-            </a:r>
-            <a:r>
-              <a:rPr sz="2400" b="1" i="0">
-                <a:solidFill>
-                  <a:srgbClr val="FFFFFF"/>
-                </a:solidFill>
-                <a:latin typeface="Malgun Gothic"/>
-                <a:ea typeface="Malgun Gothic"/>
-                <a:cs typeface="Malgun Gothic"/>
-              </a:rPr>
-              <a:t>9. 호르몬 작용의 상호작용 양식</a:t>
-            </a:r>
-          </a:p>
-        </p:txBody>
-      </p:sp>
-      <p:sp>
-        <p:nvSpPr>
-          <p:cNvPr id="6" name="TextBox 5"/>
-          <p:cNvSpPr txBox="1"/>
-          <p:nvPr/>
-        </p:nvSpPr>
-        <p:spPr>
-          <a:xfrm>
-            <a:off x="457200" y="6446520"/>
-            <a:ext cx="11247120" cy="301752"/>
-          </a:xfrm>
-          <a:prstGeom prst="rect">
-            <a:avLst/>
-          </a:prstGeom>
-          <a:noFill/>
-        </p:spPr>
-        <p:txBody>
-          <a:bodyPr wrap="square" anchor="ctr">
-            <a:spAutoFit/>
-          </a:bodyPr>
-          <a:lstStyle/>
-          <a:p>
-            <a:r>
-              <a:rPr sz="900" b="0" i="0">
-                <a:solidFill>
-                  <a:srgbClr val="66788A"/>
-                </a:solidFill>
-                <a:latin typeface="Malgun Gothic"/>
-                <a:ea typeface="Malgun Gothic"/>
-                <a:cs typeface="Malgun Gothic"/>
-              </a:rPr>
-              <a:t>M01-W02-L02  ·  내분비계 요약: 호르몬과 되먹임</a:t>
-            </a:r>
-            <a:r>
-              <a:rPr sz="900" b="1" i="0">
-                <a:solidFill>
-                  <a:srgbClr val="003C71"/>
-                </a:solidFill>
-                <a:latin typeface="Malgun Gothic"/>
-                <a:ea typeface="Malgun Gothic"/>
-                <a:cs typeface="Malgun Gothic"/>
-              </a:rPr>
-              <a:t>      38</a:t>
-            </a:r>
-          </a:p>
-        </p:txBody>
-      </p:sp>
-      <p:sp>
-        <p:nvSpPr>
-          <p:cNvPr id="7" name="Rectangle 6"/>
-          <p:cNvSpPr/>
-          <p:nvPr/>
-        </p:nvSpPr>
-        <p:spPr>
-          <a:xfrm>
-            <a:off x="640080" y="1325880"/>
-            <a:ext cx="10881360" cy="1092200"/>
-          </a:xfrm>
-          <a:prstGeom prst="rect">
-            <a:avLst/>
-          </a:prstGeom>
-          <a:solidFill>
-            <a:srgbClr val="FFF5D6"/>
-          </a:solidFill>
-          <a:ln>
-            <a:noFill/>
-          </a:ln>
-          <a:effectLst/>
-        </p:spPr>
-        <p:style>
-          <a:lnRef idx="1">
-            <a:schemeClr val="accent1"/>
-          </a:lnRef>
-          <a:fillRef idx="3">
-            <a:schemeClr val="accent1"/>
-          </a:fillRef>
-          <a:effectRef idx="2">
-            <a:schemeClr val="accent1"/>
-          </a:effectRef>
-          <a:fontRef idx="minor">
-            <a:schemeClr val="lt1"/>
-          </a:fontRef>
-        </p:style>
-        <p:txBody>
-          <a:bodyPr rtlCol="0" anchor="ctr" wrap="square" lIns="228600" rIns="228600"/>
-          <a:lstStyle/>
-          <a:p>
-            <a:pPr algn="l"/>
-            <a:r>
-              <a:rPr sz="1200" b="1" i="0">
-                <a:solidFill>
-                  <a:srgbClr val="8A6300"/>
-                </a:solidFill>
-                <a:latin typeface="Malgun Gothic"/>
-                <a:ea typeface="Malgun Gothic"/>
-                <a:cs typeface="Malgun Gothic"/>
-              </a:rPr>
-              <a:t>핵심 정리   </a:t>
-            </a:r>
-            <a:r>
-              <a:rPr sz="1600" b="0" i="0">
-                <a:solidFill>
-                  <a:srgbClr val="11202B"/>
-                </a:solidFill>
-                <a:latin typeface="Malgun Gothic"/>
-                <a:ea typeface="Malgun Gothic"/>
-                <a:cs typeface="Malgun Gothic"/>
-              </a:rPr>
-              <a:t>호르몬 작용을 볼 때 한 호르몬만 떼어 생각하면 안 된다. 같은 표적에 어떤 호르몬들이 함께 작용하는지, 그 관계가 상승·허용·길항 가운데 무엇인지를 묻는다. 임상에서 한 호르몬의 결핍이 예상과 다른 증상을 만드는 경우가 대개 허용 작용의 소실 때문이다.</a:t>
-            </a:r>
-          </a:p>
-        </p:txBody>
-      </p:sp>
-    </p:spTree>
-  </p:cSld>
-  <p:clrMapOvr>
-    <a:masterClrMapping/>
-  </p:clrMapOvr>
-</p:sld>
-</file>
-
-<file path=ppt/slides/slide39.xml><?xml version="1.0" encoding="utf-8"?>
-<p:sld xmlns:a="http://schemas.openxmlformats.org/drawingml/2006/main" xmlns:p="http://schemas.openxmlformats.org/presentationml/2006/main" xmlns:r="http://schemas.openxmlformats.org/officeDocument/2006/relationships">
-  <p:cSld>
-    <p:spTree>
-      <p:nvGrpSpPr>
-        <p:cNvPr id="1" name=""/>
-        <p:cNvGrpSpPr/>
-        <p:nvPr/>
-      </p:nvGrpSpPr>
-      <p:grpSpPr/>
-      <p:sp>
-        <p:nvSpPr>
-          <p:cNvPr id="2" name="Rectangle 1"/>
-          <p:cNvSpPr/>
-          <p:nvPr/>
-        </p:nvSpPr>
-        <p:spPr>
-          <a:xfrm>
-            <a:off x="0" y="0"/>
-            <a:ext cx="12191695" cy="6858000"/>
-          </a:xfrm>
-          <a:prstGeom prst="rect">
-            <a:avLst/>
-          </a:prstGeom>
-          <a:solidFill>
-            <a:srgbClr val="F5F8F9"/>
-          </a:solidFill>
-          <a:ln>
-            <a:noFill/>
-          </a:ln>
-          <a:effectLst/>
-        </p:spPr>
-        <p:style>
-          <a:lnRef idx="1">
-            <a:schemeClr val="accent1"/>
-          </a:lnRef>
-          <a:fillRef idx="3">
-            <a:schemeClr val="accent1"/>
-          </a:fillRef>
-          <a:effectRef idx="2">
-            <a:schemeClr val="accent1"/>
-          </a:effectRef>
-          <a:fontRef idx="minor">
-            <a:schemeClr val="lt1"/>
-          </a:fontRef>
-        </p:style>
-        <p:txBody>
-          <a:bodyPr rtlCol="0" anchor="ctr"/>
-          <a:lstStyle/>
-          <a:p>
-            <a:pPr algn="ctr"/>
-          </a:p>
-        </p:txBody>
-      </p:sp>
-      <p:sp>
-        <p:nvSpPr>
-          <p:cNvPr id="3" name="Rectangle 2"/>
-          <p:cNvSpPr/>
-          <p:nvPr/>
-        </p:nvSpPr>
-        <p:spPr>
-          <a:xfrm>
-            <a:off x="0" y="0"/>
-            <a:ext cx="12191695" cy="960120"/>
-          </a:xfrm>
-          <a:prstGeom prst="rect">
-            <a:avLst/>
-          </a:prstGeom>
-          <a:solidFill>
-            <a:srgbClr val="003C71"/>
-          </a:solidFill>
-          <a:ln>
-            <a:noFill/>
-          </a:ln>
-          <a:effectLst/>
-        </p:spPr>
-        <p:style>
-          <a:lnRef idx="1">
-            <a:schemeClr val="accent1"/>
-          </a:lnRef>
-          <a:fillRef idx="3">
-            <a:schemeClr val="accent1"/>
-          </a:fillRef>
-          <a:effectRef idx="2">
-            <a:schemeClr val="accent1"/>
-          </a:effectRef>
-          <a:fontRef idx="minor">
-            <a:schemeClr val="lt1"/>
-          </a:fontRef>
-        </p:style>
-        <p:txBody>
-          <a:bodyPr rtlCol="0" anchor="ctr"/>
-          <a:lstStyle/>
-          <a:p>
-            <a:pPr algn="ctr"/>
-          </a:p>
-        </p:txBody>
-      </p:sp>
-      <p:sp>
-        <p:nvSpPr>
-          <p:cNvPr id="4" name="Rectangle 3"/>
-          <p:cNvSpPr/>
-          <p:nvPr/>
-        </p:nvSpPr>
-        <p:spPr>
-          <a:xfrm>
-            <a:off x="0" y="960120"/>
-            <a:ext cx="12191695" cy="54864"/>
-          </a:xfrm>
-          <a:prstGeom prst="rect">
-            <a:avLst/>
-          </a:prstGeom>
-          <a:solidFill>
-            <a:srgbClr val="F2B705"/>
-          </a:solidFill>
-          <a:ln>
-            <a:noFill/>
-          </a:ln>
-          <a:effectLst/>
-        </p:spPr>
-        <p:style>
-          <a:lnRef idx="1">
-            <a:schemeClr val="accent1"/>
-          </a:lnRef>
-          <a:fillRef idx="3">
-            <a:schemeClr val="accent1"/>
-          </a:fillRef>
-          <a:effectRef idx="2">
-            <a:schemeClr val="accent1"/>
-          </a:effectRef>
-          <a:fontRef idx="minor">
-            <a:schemeClr val="lt1"/>
-          </a:fontRef>
-        </p:style>
-        <p:txBody>
-          <a:bodyPr rtlCol="0" anchor="ctr"/>
-          <a:lstStyle/>
-          <a:p>
-            <a:pPr algn="ctr"/>
-          </a:p>
-        </p:txBody>
-      </p:sp>
-      <p:sp>
-        <p:nvSpPr>
-          <p:cNvPr id="5" name="TextBox 4"/>
-          <p:cNvSpPr txBox="1"/>
-          <p:nvPr/>
-        </p:nvSpPr>
-        <p:spPr>
-          <a:xfrm>
-            <a:off x="457200" y="109728"/>
-            <a:ext cx="11247120" cy="777240"/>
-          </a:xfrm>
-          <a:prstGeom prst="rect">
-            <a:avLst/>
-          </a:prstGeom>
-          <a:noFill/>
-        </p:spPr>
-        <p:txBody>
-          <a:bodyPr wrap="square" anchor="ctr">
-            <a:spAutoFit/>
-          </a:bodyPr>
-          <a:lstStyle/>
-          <a:p>
-            <a:r>
-              <a:rPr sz="1300" b="1" i="0">
-                <a:solidFill>
-                  <a:srgbClr val="F2B705"/>
-                </a:solidFill>
-                <a:latin typeface="Malgun Gothic"/>
-                <a:ea typeface="Malgun Gothic"/>
-                <a:cs typeface="Malgun Gothic"/>
-              </a:rPr>
-              <a:t>09   </a:t>
-            </a:r>
-            <a:r>
-              <a:rPr sz="2400" b="1" i="0">
-                <a:solidFill>
-                  <a:srgbClr val="FFFFFF"/>
-                </a:solidFill>
-                <a:latin typeface="Malgun Gothic"/>
-                <a:ea typeface="Malgun Gothic"/>
-                <a:cs typeface="Malgun Gothic"/>
-              </a:rPr>
-              <a:t>9. 호르몬 작용의 상호작용 양식</a:t>
-            </a:r>
-          </a:p>
-        </p:txBody>
-      </p:sp>
-      <p:sp>
-        <p:nvSpPr>
-          <p:cNvPr id="6" name="TextBox 5"/>
-          <p:cNvSpPr txBox="1"/>
-          <p:nvPr/>
-        </p:nvSpPr>
-        <p:spPr>
-          <a:xfrm>
-            <a:off x="457200" y="6446520"/>
-            <a:ext cx="11247120" cy="301752"/>
-          </a:xfrm>
-          <a:prstGeom prst="rect">
-            <a:avLst/>
-          </a:prstGeom>
-          <a:noFill/>
-        </p:spPr>
-        <p:txBody>
-          <a:bodyPr wrap="square" anchor="ctr">
-            <a:spAutoFit/>
-          </a:bodyPr>
-          <a:lstStyle/>
-          <a:p>
-            <a:r>
-              <a:rPr sz="900" b="0" i="0">
-                <a:solidFill>
-                  <a:srgbClr val="66788A"/>
-                </a:solidFill>
-                <a:latin typeface="Malgun Gothic"/>
-                <a:ea typeface="Malgun Gothic"/>
-                <a:cs typeface="Malgun Gothic"/>
-              </a:rPr>
-              <a:t>M01-W02-L02  ·  내분비계 요약: 호르몬과 되먹임</a:t>
-            </a:r>
-            <a:r>
-              <a:rPr sz="900" b="1" i="0">
-                <a:solidFill>
-                  <a:srgbClr val="003C71"/>
-                </a:solidFill>
-                <a:latin typeface="Malgun Gothic"/>
-                <a:ea typeface="Malgun Gothic"/>
-                <a:cs typeface="Malgun Gothic"/>
-              </a:rPr>
-              <a:t>      39</a:t>
-            </a:r>
-          </a:p>
-        </p:txBody>
-      </p:sp>
-      <p:pic>
-        <p:nvPicPr>
-          <p:cNvPr id="7" name="Picture 6" descr="fig-hormone-interaction.slide.png"/>
-          <p:cNvPicPr>
-            <a:picLocks noChangeAspect="1"/>
-          </p:cNvPicPr>
-          <p:nvPr/>
-        </p:nvPicPr>
-        <p:blipFill>
-          <a:blip r:embed="rId2"/>
-          <a:stretch>
-            <a:fillRect/>
-          </a:stretch>
-        </p:blipFill>
-        <p:spPr>
-          <a:xfrm>
-            <a:off x="1545619" y="1325880"/>
-            <a:ext cx="9100457" cy="4343400"/>
-          </a:xfrm>
-          <a:prstGeom prst="rect">
-            <a:avLst/>
-          </a:prstGeom>
-        </p:spPr>
-      </p:pic>
-      <p:sp>
-        <p:nvSpPr>
-          <p:cNvPr id="8" name="TextBox 7"/>
-          <p:cNvSpPr txBox="1"/>
-          <p:nvPr/>
-        </p:nvSpPr>
-        <p:spPr>
-          <a:xfrm>
-            <a:off x="640080" y="5806440"/>
-            <a:ext cx="10881360" cy="548640"/>
-          </a:xfrm>
-          <a:prstGeom prst="rect">
-            <a:avLst/>
-          </a:prstGeom>
-          <a:noFill/>
-        </p:spPr>
-        <p:txBody>
-          <a:bodyPr wrap="square" anchor="t">
-            <a:spAutoFit/>
-          </a:bodyPr>
-          <a:lstStyle/>
-          <a:p>
-            <a:pPr algn="ctr"/>
-            <a:r>
-              <a:rPr sz="1200" b="0" i="0">
-                <a:solidFill>
-                  <a:srgbClr val="66788A"/>
-                </a:solidFill>
-                <a:latin typeface="Malgun Gothic"/>
-                <a:ea typeface="Malgun Gothic"/>
-                <a:cs typeface="Malgun Gothic"/>
-              </a:rPr>
-              <a:t>호르몬 상호작용의 세 양식과 사례. 상승·허용·길항의 효과 크기 비교, 갑상샘 호르몬의 허용 작용 기전, 그리고 집합관의 11베타-HSD2가 cortisol과 aldosterone의 수용체 교차 작용을 막는 방식을 함께 보인다.</a:t>
+              <a:t>Ferrier DR. Lippincott Illustrated Reviews: Biochemistry. 8th ed. Wolters Kluwer; 2023. Chapters 23 and 24.</a:t>
             </a:r>
           </a:p>
         </p:txBody>
@@ -20740,4293 +18021,6 @@
               <a:t>7. 부신: 겉질과 속질</a:t>
             </a:r>
           </a:p>
-          <a:p>
-            <a:pPr>
-              <a:spcAft>
-                <a:spcPts val="900"/>
-              </a:spcAft>
-            </a:pPr>
-            <a:r>
-              <a:rPr sz="2000" b="1" i="0">
-                <a:solidFill>
-                  <a:srgbClr val="F2B705"/>
-                </a:solidFill>
-                <a:latin typeface="Malgun Gothic"/>
-                <a:ea typeface="Malgun Gothic"/>
-                <a:cs typeface="Malgun Gothic"/>
-              </a:rPr>
-              <a:t>8.  </a:t>
-            </a:r>
-            <a:r>
-              <a:rPr sz="2000" b="0" i="0">
-                <a:solidFill>
-                  <a:srgbClr val="11202B"/>
-                </a:solidFill>
-                <a:latin typeface="Malgun Gothic"/>
-                <a:ea typeface="Malgun Gothic"/>
-                <a:cs typeface="Malgun Gothic"/>
-              </a:rPr>
-              <a:t>8. 혈당 조절: insulin과 glucagon</a:t>
-            </a:r>
-          </a:p>
-          <a:p>
-            <a:pPr>
-              <a:spcAft>
-                <a:spcPts val="900"/>
-              </a:spcAft>
-            </a:pPr>
-            <a:r>
-              <a:rPr sz="2000" b="1" i="0">
-                <a:solidFill>
-                  <a:srgbClr val="F2B705"/>
-                </a:solidFill>
-                <a:latin typeface="Malgun Gothic"/>
-                <a:ea typeface="Malgun Gothic"/>
-                <a:cs typeface="Malgun Gothic"/>
-              </a:rPr>
-              <a:t>9.  </a:t>
-            </a:r>
-            <a:r>
-              <a:rPr sz="2000" b="0" i="0">
-                <a:solidFill>
-                  <a:srgbClr val="11202B"/>
-                </a:solidFill>
-                <a:latin typeface="Malgun Gothic"/>
-                <a:ea typeface="Malgun Gothic"/>
-                <a:cs typeface="Malgun Gothic"/>
-              </a:rPr>
-              <a:t>9. 호르몬 작용의 상호작용 양식</a:t>
-            </a:r>
-          </a:p>
-          <a:p>
-            <a:pPr>
-              <a:spcAft>
-                <a:spcPts val="900"/>
-              </a:spcAft>
-            </a:pPr>
-            <a:r>
-              <a:rPr sz="2000" b="1" i="0">
-                <a:solidFill>
-                  <a:srgbClr val="F2B705"/>
-                </a:solidFill>
-                <a:latin typeface="Malgun Gothic"/>
-                <a:ea typeface="Malgun Gothic"/>
-                <a:cs typeface="Malgun Gothic"/>
-              </a:rPr>
-              <a:t>10.  </a:t>
-            </a:r>
-            <a:r>
-              <a:rPr sz="2000" b="0" i="0">
-                <a:solidFill>
-                  <a:srgbClr val="11202B"/>
-                </a:solidFill>
-                <a:latin typeface="Malgun Gothic"/>
-                <a:ea typeface="Malgun Gothic"/>
-                <a:cs typeface="Malgun Gothic"/>
-              </a:rPr>
-              <a:t>10. 내분비 질환을 읽는 기본 논리</a:t>
-            </a:r>
-          </a:p>
-        </p:txBody>
-      </p:sp>
-    </p:spTree>
-  </p:cSld>
-  <p:clrMapOvr>
-    <a:masterClrMapping/>
-  </p:clrMapOvr>
-</p:sld>
-</file>
-
-<file path=ppt/slides/slide40.xml><?xml version="1.0" encoding="utf-8"?>
-<p:sld xmlns:a="http://schemas.openxmlformats.org/drawingml/2006/main" xmlns:p="http://schemas.openxmlformats.org/presentationml/2006/main" xmlns:r="http://schemas.openxmlformats.org/officeDocument/2006/relationships">
-  <p:cSld>
-    <p:spTree>
-      <p:nvGrpSpPr>
-        <p:cNvPr id="1" name=""/>
-        <p:cNvGrpSpPr/>
-        <p:nvPr/>
-      </p:nvGrpSpPr>
-      <p:grpSpPr/>
-      <p:sp>
-        <p:nvSpPr>
-          <p:cNvPr id="2" name="Rectangle 1"/>
-          <p:cNvSpPr/>
-          <p:nvPr/>
-        </p:nvSpPr>
-        <p:spPr>
-          <a:xfrm>
-            <a:off x="0" y="0"/>
-            <a:ext cx="12191695" cy="6858000"/>
-          </a:xfrm>
-          <a:prstGeom prst="rect">
-            <a:avLst/>
-          </a:prstGeom>
-          <a:solidFill>
-            <a:srgbClr val="F5F8F9"/>
-          </a:solidFill>
-          <a:ln>
-            <a:noFill/>
-          </a:ln>
-          <a:effectLst/>
-        </p:spPr>
-        <p:style>
-          <a:lnRef idx="1">
-            <a:schemeClr val="accent1"/>
-          </a:lnRef>
-          <a:fillRef idx="3">
-            <a:schemeClr val="accent1"/>
-          </a:fillRef>
-          <a:effectRef idx="2">
-            <a:schemeClr val="accent1"/>
-          </a:effectRef>
-          <a:fontRef idx="minor">
-            <a:schemeClr val="lt1"/>
-          </a:fontRef>
-        </p:style>
-        <p:txBody>
-          <a:bodyPr rtlCol="0" anchor="ctr"/>
-          <a:lstStyle/>
-          <a:p>
-            <a:pPr algn="ctr"/>
-          </a:p>
-        </p:txBody>
-      </p:sp>
-      <p:sp>
-        <p:nvSpPr>
-          <p:cNvPr id="3" name="Rectangle 2"/>
-          <p:cNvSpPr/>
-          <p:nvPr/>
-        </p:nvSpPr>
-        <p:spPr>
-          <a:xfrm>
-            <a:off x="0" y="0"/>
-            <a:ext cx="12191695" cy="960120"/>
-          </a:xfrm>
-          <a:prstGeom prst="rect">
-            <a:avLst/>
-          </a:prstGeom>
-          <a:solidFill>
-            <a:srgbClr val="003C71"/>
-          </a:solidFill>
-          <a:ln>
-            <a:noFill/>
-          </a:ln>
-          <a:effectLst/>
-        </p:spPr>
-        <p:style>
-          <a:lnRef idx="1">
-            <a:schemeClr val="accent1"/>
-          </a:lnRef>
-          <a:fillRef idx="3">
-            <a:schemeClr val="accent1"/>
-          </a:fillRef>
-          <a:effectRef idx="2">
-            <a:schemeClr val="accent1"/>
-          </a:effectRef>
-          <a:fontRef idx="minor">
-            <a:schemeClr val="lt1"/>
-          </a:fontRef>
-        </p:style>
-        <p:txBody>
-          <a:bodyPr rtlCol="0" anchor="ctr"/>
-          <a:lstStyle/>
-          <a:p>
-            <a:pPr algn="ctr"/>
-          </a:p>
-        </p:txBody>
-      </p:sp>
-      <p:sp>
-        <p:nvSpPr>
-          <p:cNvPr id="4" name="Rectangle 3"/>
-          <p:cNvSpPr/>
-          <p:nvPr/>
-        </p:nvSpPr>
-        <p:spPr>
-          <a:xfrm>
-            <a:off x="0" y="960120"/>
-            <a:ext cx="12191695" cy="54864"/>
-          </a:xfrm>
-          <a:prstGeom prst="rect">
-            <a:avLst/>
-          </a:prstGeom>
-          <a:solidFill>
-            <a:srgbClr val="F2B705"/>
-          </a:solidFill>
-          <a:ln>
-            <a:noFill/>
-          </a:ln>
-          <a:effectLst/>
-        </p:spPr>
-        <p:style>
-          <a:lnRef idx="1">
-            <a:schemeClr val="accent1"/>
-          </a:lnRef>
-          <a:fillRef idx="3">
-            <a:schemeClr val="accent1"/>
-          </a:fillRef>
-          <a:effectRef idx="2">
-            <a:schemeClr val="accent1"/>
-          </a:effectRef>
-          <a:fontRef idx="minor">
-            <a:schemeClr val="lt1"/>
-          </a:fontRef>
-        </p:style>
-        <p:txBody>
-          <a:bodyPr rtlCol="0" anchor="ctr"/>
-          <a:lstStyle/>
-          <a:p>
-            <a:pPr algn="ctr"/>
-          </a:p>
-        </p:txBody>
-      </p:sp>
-      <p:sp>
-        <p:nvSpPr>
-          <p:cNvPr id="5" name="TextBox 4"/>
-          <p:cNvSpPr txBox="1"/>
-          <p:nvPr/>
-        </p:nvSpPr>
-        <p:spPr>
-          <a:xfrm>
-            <a:off x="457200" y="109728"/>
-            <a:ext cx="11247120" cy="777240"/>
-          </a:xfrm>
-          <a:prstGeom prst="rect">
-            <a:avLst/>
-          </a:prstGeom>
-          <a:noFill/>
-        </p:spPr>
-        <p:txBody>
-          <a:bodyPr wrap="square" anchor="ctr">
-            <a:spAutoFit/>
-          </a:bodyPr>
-          <a:lstStyle/>
-          <a:p>
-            <a:r>
-              <a:rPr sz="1300" b="1" i="0">
-                <a:solidFill>
-                  <a:srgbClr val="F2B705"/>
-                </a:solidFill>
-                <a:latin typeface="Malgun Gothic"/>
-                <a:ea typeface="Malgun Gothic"/>
-                <a:cs typeface="Malgun Gothic"/>
-              </a:rPr>
-              <a:t>10   </a:t>
-            </a:r>
-            <a:r>
-              <a:rPr sz="2400" b="1" i="0">
-                <a:solidFill>
-                  <a:srgbClr val="FFFFFF"/>
-                </a:solidFill>
-                <a:latin typeface="Malgun Gothic"/>
-                <a:ea typeface="Malgun Gothic"/>
-                <a:cs typeface="Malgun Gothic"/>
-              </a:rPr>
-              <a:t>10. 내분비 질환을 읽는 기본 논리</a:t>
-            </a:r>
-          </a:p>
-        </p:txBody>
-      </p:sp>
-      <p:sp>
-        <p:nvSpPr>
-          <p:cNvPr id="6" name="TextBox 5"/>
-          <p:cNvSpPr txBox="1"/>
-          <p:nvPr/>
-        </p:nvSpPr>
-        <p:spPr>
-          <a:xfrm>
-            <a:off x="457200" y="6446520"/>
-            <a:ext cx="11247120" cy="301752"/>
-          </a:xfrm>
-          <a:prstGeom prst="rect">
-            <a:avLst/>
-          </a:prstGeom>
-          <a:noFill/>
-        </p:spPr>
-        <p:txBody>
-          <a:bodyPr wrap="square" anchor="ctr">
-            <a:spAutoFit/>
-          </a:bodyPr>
-          <a:lstStyle/>
-          <a:p>
-            <a:r>
-              <a:rPr sz="900" b="0" i="0">
-                <a:solidFill>
-                  <a:srgbClr val="66788A"/>
-                </a:solidFill>
-                <a:latin typeface="Malgun Gothic"/>
-                <a:ea typeface="Malgun Gothic"/>
-                <a:cs typeface="Malgun Gothic"/>
-              </a:rPr>
-              <a:t>M01-W02-L02  ·  내분비계 요약: 호르몬과 되먹임</a:t>
-            </a:r>
-            <a:r>
-              <a:rPr sz="900" b="1" i="0">
-                <a:solidFill>
-                  <a:srgbClr val="003C71"/>
-                </a:solidFill>
-                <a:latin typeface="Malgun Gothic"/>
-                <a:ea typeface="Malgun Gothic"/>
-                <a:cs typeface="Malgun Gothic"/>
-              </a:rPr>
-              <a:t>      40</a:t>
-            </a:r>
-          </a:p>
-        </p:txBody>
-      </p:sp>
-      <p:sp>
-        <p:nvSpPr>
-          <p:cNvPr id="7" name="TextBox 6"/>
-          <p:cNvSpPr txBox="1"/>
-          <p:nvPr/>
-        </p:nvSpPr>
-        <p:spPr>
-          <a:xfrm>
-            <a:off x="640080" y="1280160"/>
-            <a:ext cx="10881360" cy="5029200"/>
-          </a:xfrm>
-          <a:prstGeom prst="rect">
-            <a:avLst/>
-          </a:prstGeom>
-          <a:noFill/>
-        </p:spPr>
-        <p:txBody>
-          <a:bodyPr wrap="square" anchor="t">
-            <a:spAutoFit/>
-          </a:bodyPr>
-          <a:lstStyle/>
-          <a:p>
-            <a:pPr>
-              <a:spcAft>
-                <a:spcPts val="900"/>
-              </a:spcAft>
-            </a:pPr>
-            <a:r>
-              <a:rPr sz="2000" b="1" i="0">
-                <a:solidFill>
-                  <a:srgbClr val="F2B705"/>
-                </a:solidFill>
-                <a:latin typeface="Malgun Gothic"/>
-                <a:ea typeface="Malgun Gothic"/>
-                <a:cs typeface="Malgun Gothic"/>
-              </a:rPr>
-              <a:t>•  </a:t>
-            </a:r>
-            <a:r>
-              <a:rPr sz="2000" b="0" i="0">
-                <a:solidFill>
-                  <a:srgbClr val="11202B"/>
-                </a:solidFill>
-                <a:latin typeface="Malgun Gothic"/>
-                <a:ea typeface="Malgun Gothic"/>
-                <a:cs typeface="Malgun Gothic"/>
-              </a:rPr>
-              <a:t>내분비 질환은 두 축으로 분류하면 체계가 잡힌다. </a:t>
-            </a:r>
-            <a:r>
-              <a:rPr sz="2000" b="1" i="0">
-                <a:solidFill>
-                  <a:srgbClr val="11202B"/>
-                </a:solidFill>
-                <a:latin typeface="Malgun Gothic"/>
-                <a:ea typeface="Malgun Gothic"/>
-                <a:cs typeface="Malgun Gothic"/>
-              </a:rPr>
-              <a:t>과다인가 부족인가</a:t>
-            </a:r>
-            <a:r>
-              <a:rPr sz="2000" b="0" i="0">
-                <a:solidFill>
-                  <a:srgbClr val="11202B"/>
-                </a:solidFill>
-                <a:latin typeface="Malgun Gothic"/>
-                <a:ea typeface="Malgun Gothic"/>
-                <a:cs typeface="Malgun Gothic"/>
-              </a:rPr>
-              <a:t>, 그리고 </a:t>
-            </a:r>
-            <a:r>
-              <a:rPr sz="2000" b="1" i="0">
-                <a:solidFill>
-                  <a:srgbClr val="11202B"/>
-                </a:solidFill>
-                <a:latin typeface="Malgun Gothic"/>
-                <a:ea typeface="Malgun Gothic"/>
-                <a:cs typeface="Malgun Gothic"/>
-              </a:rPr>
-              <a:t>축의 어느 단계에 문제가 있는가</a:t>
-            </a:r>
-            <a:r>
-              <a:rPr sz="2000" b="0" i="0">
-                <a:solidFill>
-                  <a:srgbClr val="11202B"/>
-                </a:solidFill>
-                <a:latin typeface="Malgun Gothic"/>
-                <a:ea typeface="Malgun Gothic"/>
-                <a:cs typeface="Malgun Gothic"/>
-              </a:rPr>
-              <a:t>다.</a:t>
-            </a:r>
-          </a:p>
-          <a:p>
-            <a:pPr>
-              <a:spcAft>
-                <a:spcPts val="900"/>
-              </a:spcAft>
-            </a:pPr>
-            <a:r>
-              <a:rPr sz="2000" b="1" i="0">
-                <a:solidFill>
-                  <a:srgbClr val="F2B705"/>
-                </a:solidFill>
-                <a:latin typeface="Malgun Gothic"/>
-                <a:ea typeface="Malgun Gothic"/>
-                <a:cs typeface="Malgun Gothic"/>
-              </a:rPr>
-              <a:t>•  </a:t>
-            </a:r>
-            <a:r>
-              <a:rPr sz="2000" b="1" i="0">
-                <a:solidFill>
-                  <a:srgbClr val="11202B"/>
-                </a:solidFill>
-                <a:latin typeface="Malgun Gothic"/>
-                <a:ea typeface="Malgun Gothic"/>
-                <a:cs typeface="Malgun Gothic"/>
-              </a:rPr>
-              <a:t>원발성(primary)과 이차성(secondary)의 구분</a:t>
-            </a:r>
-            <a:r>
-              <a:rPr sz="2000" b="0" i="0">
-                <a:solidFill>
-                  <a:srgbClr val="11202B"/>
-                </a:solidFill>
-                <a:latin typeface="Malgun Gothic"/>
-                <a:ea typeface="Malgun Gothic"/>
-                <a:cs typeface="Malgun Gothic"/>
-              </a:rPr>
-              <a:t>이 핵심이다. 원발성은 최종 호르몬을 만드는 표적 기관 자체의 문제이고, 이차성은 뇌하수체(또는 시상하부)의 문제다. 두 호르몬을 함께 측정하면 구별된다.</a:t>
-            </a:r>
-          </a:p>
-        </p:txBody>
-      </p:sp>
-    </p:spTree>
-  </p:cSld>
-  <p:clrMapOvr>
-    <a:masterClrMapping/>
-  </p:clrMapOvr>
-</p:sld>
-</file>
-
-<file path=ppt/slides/slide41.xml><?xml version="1.0" encoding="utf-8"?>
-<p:sld xmlns:a="http://schemas.openxmlformats.org/drawingml/2006/main" xmlns:p="http://schemas.openxmlformats.org/presentationml/2006/main" xmlns:r="http://schemas.openxmlformats.org/officeDocument/2006/relationships">
-  <p:cSld>
-    <p:spTree>
-      <p:nvGrpSpPr>
-        <p:cNvPr id="1" name=""/>
-        <p:cNvGrpSpPr/>
-        <p:nvPr/>
-      </p:nvGrpSpPr>
-      <p:grpSpPr/>
-      <p:sp>
-        <p:nvSpPr>
-          <p:cNvPr id="2" name="Rectangle 1"/>
-          <p:cNvSpPr/>
-          <p:nvPr/>
-        </p:nvSpPr>
-        <p:spPr>
-          <a:xfrm>
-            <a:off x="0" y="0"/>
-            <a:ext cx="12191695" cy="6858000"/>
-          </a:xfrm>
-          <a:prstGeom prst="rect">
-            <a:avLst/>
-          </a:prstGeom>
-          <a:solidFill>
-            <a:srgbClr val="F5F8F9"/>
-          </a:solidFill>
-          <a:ln>
-            <a:noFill/>
-          </a:ln>
-          <a:effectLst/>
-        </p:spPr>
-        <p:style>
-          <a:lnRef idx="1">
-            <a:schemeClr val="accent1"/>
-          </a:lnRef>
-          <a:fillRef idx="3">
-            <a:schemeClr val="accent1"/>
-          </a:fillRef>
-          <a:effectRef idx="2">
-            <a:schemeClr val="accent1"/>
-          </a:effectRef>
-          <a:fontRef idx="minor">
-            <a:schemeClr val="lt1"/>
-          </a:fontRef>
-        </p:style>
-        <p:txBody>
-          <a:bodyPr rtlCol="0" anchor="ctr"/>
-          <a:lstStyle/>
-          <a:p>
-            <a:pPr algn="ctr"/>
-          </a:p>
-        </p:txBody>
-      </p:sp>
-      <p:sp>
-        <p:nvSpPr>
-          <p:cNvPr id="3" name="Rectangle 2"/>
-          <p:cNvSpPr/>
-          <p:nvPr/>
-        </p:nvSpPr>
-        <p:spPr>
-          <a:xfrm>
-            <a:off x="0" y="0"/>
-            <a:ext cx="12191695" cy="960120"/>
-          </a:xfrm>
-          <a:prstGeom prst="rect">
-            <a:avLst/>
-          </a:prstGeom>
-          <a:solidFill>
-            <a:srgbClr val="003C71"/>
-          </a:solidFill>
-          <a:ln>
-            <a:noFill/>
-          </a:ln>
-          <a:effectLst/>
-        </p:spPr>
-        <p:style>
-          <a:lnRef idx="1">
-            <a:schemeClr val="accent1"/>
-          </a:lnRef>
-          <a:fillRef idx="3">
-            <a:schemeClr val="accent1"/>
-          </a:fillRef>
-          <a:effectRef idx="2">
-            <a:schemeClr val="accent1"/>
-          </a:effectRef>
-          <a:fontRef idx="minor">
-            <a:schemeClr val="lt1"/>
-          </a:fontRef>
-        </p:style>
-        <p:txBody>
-          <a:bodyPr rtlCol="0" anchor="ctr"/>
-          <a:lstStyle/>
-          <a:p>
-            <a:pPr algn="ctr"/>
-          </a:p>
-        </p:txBody>
-      </p:sp>
-      <p:sp>
-        <p:nvSpPr>
-          <p:cNvPr id="4" name="Rectangle 3"/>
-          <p:cNvSpPr/>
-          <p:nvPr/>
-        </p:nvSpPr>
-        <p:spPr>
-          <a:xfrm>
-            <a:off x="0" y="960120"/>
-            <a:ext cx="12191695" cy="54864"/>
-          </a:xfrm>
-          <a:prstGeom prst="rect">
-            <a:avLst/>
-          </a:prstGeom>
-          <a:solidFill>
-            <a:srgbClr val="F2B705"/>
-          </a:solidFill>
-          <a:ln>
-            <a:noFill/>
-          </a:ln>
-          <a:effectLst/>
-        </p:spPr>
-        <p:style>
-          <a:lnRef idx="1">
-            <a:schemeClr val="accent1"/>
-          </a:lnRef>
-          <a:fillRef idx="3">
-            <a:schemeClr val="accent1"/>
-          </a:fillRef>
-          <a:effectRef idx="2">
-            <a:schemeClr val="accent1"/>
-          </a:effectRef>
-          <a:fontRef idx="minor">
-            <a:schemeClr val="lt1"/>
-          </a:fontRef>
-        </p:style>
-        <p:txBody>
-          <a:bodyPr rtlCol="0" anchor="ctr"/>
-          <a:lstStyle/>
-          <a:p>
-            <a:pPr algn="ctr"/>
-          </a:p>
-        </p:txBody>
-      </p:sp>
-      <p:sp>
-        <p:nvSpPr>
-          <p:cNvPr id="5" name="TextBox 4"/>
-          <p:cNvSpPr txBox="1"/>
-          <p:nvPr/>
-        </p:nvSpPr>
-        <p:spPr>
-          <a:xfrm>
-            <a:off x="457200" y="109728"/>
-            <a:ext cx="11247120" cy="777240"/>
-          </a:xfrm>
-          <a:prstGeom prst="rect">
-            <a:avLst/>
-          </a:prstGeom>
-          <a:noFill/>
-        </p:spPr>
-        <p:txBody>
-          <a:bodyPr wrap="square" anchor="ctr">
-            <a:spAutoFit/>
-          </a:bodyPr>
-          <a:lstStyle/>
-          <a:p>
-            <a:r>
-              <a:rPr sz="1300" b="1" i="0">
-                <a:solidFill>
-                  <a:srgbClr val="F2B705"/>
-                </a:solidFill>
-                <a:latin typeface="Malgun Gothic"/>
-                <a:ea typeface="Malgun Gothic"/>
-                <a:cs typeface="Malgun Gothic"/>
-              </a:rPr>
-              <a:t>10   </a:t>
-            </a:r>
-            <a:r>
-              <a:rPr sz="2400" b="1" i="0">
-                <a:solidFill>
-                  <a:srgbClr val="FFFFFF"/>
-                </a:solidFill>
-                <a:latin typeface="Malgun Gothic"/>
-                <a:ea typeface="Malgun Gothic"/>
-                <a:cs typeface="Malgun Gothic"/>
-              </a:rPr>
-              <a:t>10. 내분비 질환을 읽는 기본 논리</a:t>
-            </a:r>
-          </a:p>
-        </p:txBody>
-      </p:sp>
-      <p:sp>
-        <p:nvSpPr>
-          <p:cNvPr id="6" name="TextBox 5"/>
-          <p:cNvSpPr txBox="1"/>
-          <p:nvPr/>
-        </p:nvSpPr>
-        <p:spPr>
-          <a:xfrm>
-            <a:off x="457200" y="6446520"/>
-            <a:ext cx="11247120" cy="301752"/>
-          </a:xfrm>
-          <a:prstGeom prst="rect">
-            <a:avLst/>
-          </a:prstGeom>
-          <a:noFill/>
-        </p:spPr>
-        <p:txBody>
-          <a:bodyPr wrap="square" anchor="ctr">
-            <a:spAutoFit/>
-          </a:bodyPr>
-          <a:lstStyle/>
-          <a:p>
-            <a:r>
-              <a:rPr sz="900" b="0" i="0">
-                <a:solidFill>
-                  <a:srgbClr val="66788A"/>
-                </a:solidFill>
-                <a:latin typeface="Malgun Gothic"/>
-                <a:ea typeface="Malgun Gothic"/>
-                <a:cs typeface="Malgun Gothic"/>
-              </a:rPr>
-              <a:t>M01-W02-L02  ·  내분비계 요약: 호르몬과 되먹임</a:t>
-            </a:r>
-            <a:r>
-              <a:rPr sz="900" b="1" i="0">
-                <a:solidFill>
-                  <a:srgbClr val="003C71"/>
-                </a:solidFill>
-                <a:latin typeface="Malgun Gothic"/>
-                <a:ea typeface="Malgun Gothic"/>
-                <a:cs typeface="Malgun Gothic"/>
-              </a:rPr>
-              <a:t>      41</a:t>
-            </a:r>
-          </a:p>
-        </p:txBody>
-      </p:sp>
-      <p:graphicFrame>
-        <p:nvGraphicFramePr>
-          <p:cNvPr id="7" name="Table 6"/>
-          <p:cNvGraphicFramePr>
-            <a:graphicFrameLocks noGrp="1"/>
-          </p:cNvGraphicFramePr>
-          <p:nvPr/>
-        </p:nvGraphicFramePr>
-        <p:xfrm>
-          <a:off x="548640" y="1280160"/>
-          <a:ext cx="11064240" cy="1828800"/>
-        </p:xfrm>
-        <a:graphic>
-          <a:graphicData uri="http://schemas.openxmlformats.org/drawingml/2006/table">
-            <a:tbl>
-              <a:tblPr firstRow="1" bandRow="1">
-                <a:tableStyleId>{5C22544A-7EE6-4342-B048-85BDC9FD1C3A}</a:tableStyleId>
-              </a:tblPr>
-              <a:tblGrid>
-                <a:gridCol w="2766060"/>
-                <a:gridCol w="2766060"/>
-                <a:gridCol w="2766060"/>
-                <a:gridCol w="2766060"/>
-              </a:tblGrid>
-              <a:tr h="365760">
-                <a:tc>
-                  <a:txBody>
-                    <a:bodyPr/>
-                    <a:lstStyle/>
-                    <a:p>
-                      <a:r>
-                        <a:rPr sz="1200" b="1" i="0">
-                          <a:solidFill>
-                            <a:srgbClr val="FFFFFF"/>
-                          </a:solidFill>
-                          <a:latin typeface="Malgun Gothic"/>
-                          <a:ea typeface="Malgun Gothic"/>
-                          <a:cs typeface="Malgun Gothic"/>
-                        </a:rPr>
-                        <a:t>상태</a:t>
-                      </a:r>
-                    </a:p>
-                  </a:txBody>
-                  <a:tcPr marL="73152" marR="73152" marT="27432" marB="27432">
-                    <a:solidFill>
-                      <a:srgbClr val="003C71"/>
-                    </a:solidFill>
-                  </a:tcPr>
-                </a:tc>
-                <a:tc>
-                  <a:txBody>
-                    <a:bodyPr/>
-                    <a:lstStyle/>
-                    <a:p>
-                      <a:r>
-                        <a:rPr sz="1200" b="1" i="0">
-                          <a:solidFill>
-                            <a:srgbClr val="FFFFFF"/>
-                          </a:solidFill>
-                          <a:latin typeface="Malgun Gothic"/>
-                          <a:ea typeface="Malgun Gothic"/>
-                          <a:cs typeface="Malgun Gothic"/>
-                        </a:rPr>
-                        <a:t>최종 호르몬</a:t>
-                      </a:r>
-                    </a:p>
-                  </a:txBody>
-                  <a:tcPr marL="73152" marR="73152" marT="27432" marB="27432">
-                    <a:solidFill>
-                      <a:srgbClr val="003C71"/>
-                    </a:solidFill>
-                  </a:tcPr>
-                </a:tc>
-                <a:tc>
-                  <a:txBody>
-                    <a:bodyPr/>
-                    <a:lstStyle/>
-                    <a:p>
-                      <a:r>
-                        <a:rPr sz="1200" b="1" i="0">
-                          <a:solidFill>
-                            <a:srgbClr val="FFFFFF"/>
-                          </a:solidFill>
-                          <a:latin typeface="Malgun Gothic"/>
-                          <a:ea typeface="Malgun Gothic"/>
-                          <a:cs typeface="Malgun Gothic"/>
-                        </a:rPr>
-                        <a:t>자극 호르몬</a:t>
-                      </a:r>
-                    </a:p>
-                  </a:txBody>
-                  <a:tcPr marL="73152" marR="73152" marT="27432" marB="27432">
-                    <a:solidFill>
-                      <a:srgbClr val="003C71"/>
-                    </a:solidFill>
-                  </a:tcPr>
-                </a:tc>
-                <a:tc>
-                  <a:txBody>
-                    <a:bodyPr/>
-                    <a:lstStyle/>
-                    <a:p>
-                      <a:r>
-                        <a:rPr sz="1200" b="1" i="0">
-                          <a:solidFill>
-                            <a:srgbClr val="FFFFFF"/>
-                          </a:solidFill>
-                          <a:latin typeface="Malgun Gothic"/>
-                          <a:ea typeface="Malgun Gothic"/>
-                          <a:cs typeface="Malgun Gothic"/>
-                        </a:rPr>
-                        <a:t>해석</a:t>
-                      </a:r>
-                    </a:p>
-                  </a:txBody>
-                  <a:tcPr marL="73152" marR="73152" marT="27432" marB="27432">
-                    <a:solidFill>
-                      <a:srgbClr val="003C71"/>
-                    </a:solidFill>
-                  </a:tcPr>
-                </a:tc>
-              </a:tr>
-              <a:tr h="365760">
-                <a:tc>
-                  <a:txBody>
-                    <a:bodyPr/>
-                    <a:lstStyle/>
-                    <a:p>
-                      <a:r>
-                        <a:rPr sz="1200" b="0" i="0">
-                          <a:solidFill>
-                            <a:srgbClr val="11202B"/>
-                          </a:solidFill>
-                          <a:latin typeface="Malgun Gothic"/>
-                          <a:ea typeface="Malgun Gothic"/>
-                          <a:cs typeface="Malgun Gothic"/>
-                        </a:rPr>
-                        <a:t>원발성 기능 저하</a:t>
-                      </a:r>
-                    </a:p>
-                  </a:txBody>
-                  <a:tcPr marL="73152" marR="73152" marT="27432" marB="27432">
-                    <a:solidFill>
-                      <a:srgbClr val="FFFFFF"/>
-                    </a:solidFill>
-                  </a:tcPr>
-                </a:tc>
-                <a:tc>
-                  <a:txBody>
-                    <a:bodyPr/>
-                    <a:lstStyle/>
-                    <a:p>
-                      <a:r>
-                        <a:rPr sz="1200" b="0" i="0">
-                          <a:solidFill>
-                            <a:srgbClr val="11202B"/>
-                          </a:solidFill>
-                          <a:latin typeface="Malgun Gothic"/>
-                          <a:ea typeface="Malgun Gothic"/>
-                          <a:cs typeface="Malgun Gothic"/>
-                        </a:rPr>
-                        <a:t>낮음</a:t>
-                      </a:r>
-                    </a:p>
-                  </a:txBody>
-                  <a:tcPr marL="73152" marR="73152" marT="27432" marB="27432">
-                    <a:solidFill>
-                      <a:srgbClr val="FFFFFF"/>
-                    </a:solidFill>
-                  </a:tcPr>
-                </a:tc>
-                <a:tc>
-                  <a:txBody>
-                    <a:bodyPr/>
-                    <a:lstStyle/>
-                    <a:p>
-                      <a:r>
-                        <a:rPr sz="1200" b="1" i="0">
-                          <a:solidFill>
-                            <a:srgbClr val="11202B"/>
-                          </a:solidFill>
-                          <a:latin typeface="Malgun Gothic"/>
-                          <a:ea typeface="Malgun Gothic"/>
-                          <a:cs typeface="Malgun Gothic"/>
-                        </a:rPr>
-                        <a:t>높음</a:t>
-                      </a:r>
-                    </a:p>
-                  </a:txBody>
-                  <a:tcPr marL="73152" marR="73152" marT="27432" marB="27432">
-                    <a:solidFill>
-                      <a:srgbClr val="FFFFFF"/>
-                    </a:solidFill>
-                  </a:tcPr>
-                </a:tc>
-                <a:tc>
-                  <a:txBody>
-                    <a:bodyPr/>
-                    <a:lstStyle/>
-                    <a:p>
-                      <a:r>
-                        <a:rPr sz="1200" b="0" i="0">
-                          <a:solidFill>
-                            <a:srgbClr val="11202B"/>
-                          </a:solidFill>
-                          <a:latin typeface="Malgun Gothic"/>
-                          <a:ea typeface="Malgun Gothic"/>
-                          <a:cs typeface="Malgun Gothic"/>
-                        </a:rPr>
-                        <a:t>표적 기관이 반응하지 못해 되먹임 제동이 풀림</a:t>
-                      </a:r>
-                    </a:p>
-                  </a:txBody>
-                  <a:tcPr marL="73152" marR="73152" marT="27432" marB="27432">
-                    <a:solidFill>
-                      <a:srgbClr val="FFFFFF"/>
-                    </a:solidFill>
-                  </a:tcPr>
-                </a:tc>
-              </a:tr>
-              <a:tr h="365760">
-                <a:tc>
-                  <a:txBody>
-                    <a:bodyPr/>
-                    <a:lstStyle/>
-                    <a:p>
-                      <a:r>
-                        <a:rPr sz="1200" b="0" i="0">
-                          <a:solidFill>
-                            <a:srgbClr val="11202B"/>
-                          </a:solidFill>
-                          <a:latin typeface="Malgun Gothic"/>
-                          <a:ea typeface="Malgun Gothic"/>
-                          <a:cs typeface="Malgun Gothic"/>
-                        </a:rPr>
-                        <a:t>이차성 기능 저하</a:t>
-                      </a:r>
-                    </a:p>
-                  </a:txBody>
-                  <a:tcPr marL="73152" marR="73152" marT="27432" marB="27432">
-                    <a:solidFill>
-                      <a:srgbClr val="EFF4F8"/>
-                    </a:solidFill>
-                  </a:tcPr>
-                </a:tc>
-                <a:tc>
-                  <a:txBody>
-                    <a:bodyPr/>
-                    <a:lstStyle/>
-                    <a:p>
-                      <a:r>
-                        <a:rPr sz="1200" b="0" i="0">
-                          <a:solidFill>
-                            <a:srgbClr val="11202B"/>
-                          </a:solidFill>
-                          <a:latin typeface="Malgun Gothic"/>
-                          <a:ea typeface="Malgun Gothic"/>
-                          <a:cs typeface="Malgun Gothic"/>
-                        </a:rPr>
-                        <a:t>낮음</a:t>
-                      </a:r>
-                    </a:p>
-                  </a:txBody>
-                  <a:tcPr marL="73152" marR="73152" marT="27432" marB="27432">
-                    <a:solidFill>
-                      <a:srgbClr val="EFF4F8"/>
-                    </a:solidFill>
-                  </a:tcPr>
-                </a:tc>
-                <a:tc>
-                  <a:txBody>
-                    <a:bodyPr/>
-                    <a:lstStyle/>
-                    <a:p>
-                      <a:r>
-                        <a:rPr sz="1200" b="1" i="0">
-                          <a:solidFill>
-                            <a:srgbClr val="11202B"/>
-                          </a:solidFill>
-                          <a:latin typeface="Malgun Gothic"/>
-                          <a:ea typeface="Malgun Gothic"/>
-                          <a:cs typeface="Malgun Gothic"/>
-                        </a:rPr>
-                        <a:t>낮음</a:t>
-                      </a:r>
-                    </a:p>
-                  </a:txBody>
-                  <a:tcPr marL="73152" marR="73152" marT="27432" marB="27432">
-                    <a:solidFill>
-                      <a:srgbClr val="EFF4F8"/>
-                    </a:solidFill>
-                  </a:tcPr>
-                </a:tc>
-                <a:tc>
-                  <a:txBody>
-                    <a:bodyPr/>
-                    <a:lstStyle/>
-                    <a:p>
-                      <a:r>
-                        <a:rPr sz="1200" b="0" i="0">
-                          <a:solidFill>
-                            <a:srgbClr val="11202B"/>
-                          </a:solidFill>
-                          <a:latin typeface="Malgun Gothic"/>
-                          <a:ea typeface="Malgun Gothic"/>
-                          <a:cs typeface="Malgun Gothic"/>
-                        </a:rPr>
-                        <a:t>자극이 없어 표적 기관이 일하지 않음</a:t>
-                      </a:r>
-                    </a:p>
-                  </a:txBody>
-                  <a:tcPr marL="73152" marR="73152" marT="27432" marB="27432">
-                    <a:solidFill>
-                      <a:srgbClr val="EFF4F8"/>
-                    </a:solidFill>
-                  </a:tcPr>
-                </a:tc>
-              </a:tr>
-              <a:tr h="365760">
-                <a:tc>
-                  <a:txBody>
-                    <a:bodyPr/>
-                    <a:lstStyle/>
-                    <a:p>
-                      <a:r>
-                        <a:rPr sz="1200" b="0" i="0">
-                          <a:solidFill>
-                            <a:srgbClr val="11202B"/>
-                          </a:solidFill>
-                          <a:latin typeface="Malgun Gothic"/>
-                          <a:ea typeface="Malgun Gothic"/>
-                          <a:cs typeface="Malgun Gothic"/>
-                        </a:rPr>
-                        <a:t>원발성 기능 과다</a:t>
-                      </a:r>
-                    </a:p>
-                  </a:txBody>
-                  <a:tcPr marL="73152" marR="73152" marT="27432" marB="27432">
-                    <a:solidFill>
-                      <a:srgbClr val="FFFFFF"/>
-                    </a:solidFill>
-                  </a:tcPr>
-                </a:tc>
-                <a:tc>
-                  <a:txBody>
-                    <a:bodyPr/>
-                    <a:lstStyle/>
-                    <a:p>
-                      <a:r>
-                        <a:rPr sz="1200" b="0" i="0">
-                          <a:solidFill>
-                            <a:srgbClr val="11202B"/>
-                          </a:solidFill>
-                          <a:latin typeface="Malgun Gothic"/>
-                          <a:ea typeface="Malgun Gothic"/>
-                          <a:cs typeface="Malgun Gothic"/>
-                        </a:rPr>
-                        <a:t>높음</a:t>
-                      </a:r>
-                    </a:p>
-                  </a:txBody>
-                  <a:tcPr marL="73152" marR="73152" marT="27432" marB="27432">
-                    <a:solidFill>
-                      <a:srgbClr val="FFFFFF"/>
-                    </a:solidFill>
-                  </a:tcPr>
-                </a:tc>
-                <a:tc>
-                  <a:txBody>
-                    <a:bodyPr/>
-                    <a:lstStyle/>
-                    <a:p>
-                      <a:r>
-                        <a:rPr sz="1200" b="1" i="0">
-                          <a:solidFill>
-                            <a:srgbClr val="11202B"/>
-                          </a:solidFill>
-                          <a:latin typeface="Malgun Gothic"/>
-                          <a:ea typeface="Malgun Gothic"/>
-                          <a:cs typeface="Malgun Gothic"/>
-                        </a:rPr>
-                        <a:t>낮음</a:t>
-                      </a:r>
-                    </a:p>
-                  </a:txBody>
-                  <a:tcPr marL="73152" marR="73152" marT="27432" marB="27432">
-                    <a:solidFill>
-                      <a:srgbClr val="FFFFFF"/>
-                    </a:solidFill>
-                  </a:tcPr>
-                </a:tc>
-                <a:tc>
-                  <a:txBody>
-                    <a:bodyPr/>
-                    <a:lstStyle/>
-                    <a:p>
-                      <a:r>
-                        <a:rPr sz="1200" b="0" i="0">
-                          <a:solidFill>
-                            <a:srgbClr val="11202B"/>
-                          </a:solidFill>
-                          <a:latin typeface="Malgun Gothic"/>
-                          <a:ea typeface="Malgun Gothic"/>
-                          <a:cs typeface="Malgun Gothic"/>
-                        </a:rPr>
-                        <a:t>표적 기관이 과도하게 만들어 되먹임으로 자극이 억제됨</a:t>
-                      </a:r>
-                    </a:p>
-                  </a:txBody>
-                  <a:tcPr marL="73152" marR="73152" marT="27432" marB="27432">
-                    <a:solidFill>
-                      <a:srgbClr val="FFFFFF"/>
-                    </a:solidFill>
-                  </a:tcPr>
-                </a:tc>
-              </a:tr>
-              <a:tr h="365760">
-                <a:tc>
-                  <a:txBody>
-                    <a:bodyPr/>
-                    <a:lstStyle/>
-                    <a:p>
-                      <a:r>
-                        <a:rPr sz="1200" b="0" i="0">
-                          <a:solidFill>
-                            <a:srgbClr val="11202B"/>
-                          </a:solidFill>
-                          <a:latin typeface="Malgun Gothic"/>
-                          <a:ea typeface="Malgun Gothic"/>
-                          <a:cs typeface="Malgun Gothic"/>
-                        </a:rPr>
-                        <a:t>이차성 기능 과다</a:t>
-                      </a:r>
-                    </a:p>
-                  </a:txBody>
-                  <a:tcPr marL="73152" marR="73152" marT="27432" marB="27432">
-                    <a:solidFill>
-                      <a:srgbClr val="EFF4F8"/>
-                    </a:solidFill>
-                  </a:tcPr>
-                </a:tc>
-                <a:tc>
-                  <a:txBody>
-                    <a:bodyPr/>
-                    <a:lstStyle/>
-                    <a:p>
-                      <a:r>
-                        <a:rPr sz="1200" b="0" i="0">
-                          <a:solidFill>
-                            <a:srgbClr val="11202B"/>
-                          </a:solidFill>
-                          <a:latin typeface="Malgun Gothic"/>
-                          <a:ea typeface="Malgun Gothic"/>
-                          <a:cs typeface="Malgun Gothic"/>
-                        </a:rPr>
-                        <a:t>높음</a:t>
-                      </a:r>
-                    </a:p>
-                  </a:txBody>
-                  <a:tcPr marL="73152" marR="73152" marT="27432" marB="27432">
-                    <a:solidFill>
-                      <a:srgbClr val="EFF4F8"/>
-                    </a:solidFill>
-                  </a:tcPr>
-                </a:tc>
-                <a:tc>
-                  <a:txBody>
-                    <a:bodyPr/>
-                    <a:lstStyle/>
-                    <a:p>
-                      <a:r>
-                        <a:rPr sz="1200" b="1" i="0">
-                          <a:solidFill>
-                            <a:srgbClr val="11202B"/>
-                          </a:solidFill>
-                          <a:latin typeface="Malgun Gothic"/>
-                          <a:ea typeface="Malgun Gothic"/>
-                          <a:cs typeface="Malgun Gothic"/>
-                        </a:rPr>
-                        <a:t>높음</a:t>
-                      </a:r>
-                    </a:p>
-                  </a:txBody>
-                  <a:tcPr marL="73152" marR="73152" marT="27432" marB="27432">
-                    <a:solidFill>
-                      <a:srgbClr val="EFF4F8"/>
-                    </a:solidFill>
-                  </a:tcPr>
-                </a:tc>
-                <a:tc>
-                  <a:txBody>
-                    <a:bodyPr/>
-                    <a:lstStyle/>
-                    <a:p>
-                      <a:r>
-                        <a:rPr sz="1200" b="0" i="0">
-                          <a:solidFill>
-                            <a:srgbClr val="11202B"/>
-                          </a:solidFill>
-                          <a:latin typeface="Malgun Gothic"/>
-                          <a:ea typeface="Malgun Gothic"/>
-                          <a:cs typeface="Malgun Gothic"/>
-                        </a:rPr>
-                        <a:t>자극이 과도해 표적 기관이 과도하게 일함</a:t>
-                      </a:r>
-                    </a:p>
-                  </a:txBody>
-                  <a:tcPr marL="73152" marR="73152" marT="27432" marB="27432">
-                    <a:solidFill>
-                      <a:srgbClr val="EFF4F8"/>
-                    </a:solidFill>
-                  </a:tcPr>
-                </a:tc>
-              </a:tr>
-            </a:tbl>
-          </a:graphicData>
-        </a:graphic>
-      </p:graphicFrame>
-    </p:spTree>
-  </p:cSld>
-  <p:clrMapOvr>
-    <a:masterClrMapping/>
-  </p:clrMapOvr>
-</p:sld>
-</file>
-
-<file path=ppt/slides/slide42.xml><?xml version="1.0" encoding="utf-8"?>
-<p:sld xmlns:a="http://schemas.openxmlformats.org/drawingml/2006/main" xmlns:p="http://schemas.openxmlformats.org/presentationml/2006/main" xmlns:r="http://schemas.openxmlformats.org/officeDocument/2006/relationships">
-  <p:cSld>
-    <p:spTree>
-      <p:nvGrpSpPr>
-        <p:cNvPr id="1" name=""/>
-        <p:cNvGrpSpPr/>
-        <p:nvPr/>
-      </p:nvGrpSpPr>
-      <p:grpSpPr/>
-      <p:sp>
-        <p:nvSpPr>
-          <p:cNvPr id="2" name="Rectangle 1"/>
-          <p:cNvSpPr/>
-          <p:nvPr/>
-        </p:nvSpPr>
-        <p:spPr>
-          <a:xfrm>
-            <a:off x="0" y="0"/>
-            <a:ext cx="12191695" cy="6858000"/>
-          </a:xfrm>
-          <a:prstGeom prst="rect">
-            <a:avLst/>
-          </a:prstGeom>
-          <a:solidFill>
-            <a:srgbClr val="F5F8F9"/>
-          </a:solidFill>
-          <a:ln>
-            <a:noFill/>
-          </a:ln>
-          <a:effectLst/>
-        </p:spPr>
-        <p:style>
-          <a:lnRef idx="1">
-            <a:schemeClr val="accent1"/>
-          </a:lnRef>
-          <a:fillRef idx="3">
-            <a:schemeClr val="accent1"/>
-          </a:fillRef>
-          <a:effectRef idx="2">
-            <a:schemeClr val="accent1"/>
-          </a:effectRef>
-          <a:fontRef idx="minor">
-            <a:schemeClr val="lt1"/>
-          </a:fontRef>
-        </p:style>
-        <p:txBody>
-          <a:bodyPr rtlCol="0" anchor="ctr"/>
-          <a:lstStyle/>
-          <a:p>
-            <a:pPr algn="ctr"/>
-          </a:p>
-        </p:txBody>
-      </p:sp>
-      <p:sp>
-        <p:nvSpPr>
-          <p:cNvPr id="3" name="Rectangle 2"/>
-          <p:cNvSpPr/>
-          <p:nvPr/>
-        </p:nvSpPr>
-        <p:spPr>
-          <a:xfrm>
-            <a:off x="0" y="0"/>
-            <a:ext cx="12191695" cy="960120"/>
-          </a:xfrm>
-          <a:prstGeom prst="rect">
-            <a:avLst/>
-          </a:prstGeom>
-          <a:solidFill>
-            <a:srgbClr val="003C71"/>
-          </a:solidFill>
-          <a:ln>
-            <a:noFill/>
-          </a:ln>
-          <a:effectLst/>
-        </p:spPr>
-        <p:style>
-          <a:lnRef idx="1">
-            <a:schemeClr val="accent1"/>
-          </a:lnRef>
-          <a:fillRef idx="3">
-            <a:schemeClr val="accent1"/>
-          </a:fillRef>
-          <a:effectRef idx="2">
-            <a:schemeClr val="accent1"/>
-          </a:effectRef>
-          <a:fontRef idx="minor">
-            <a:schemeClr val="lt1"/>
-          </a:fontRef>
-        </p:style>
-        <p:txBody>
-          <a:bodyPr rtlCol="0" anchor="ctr"/>
-          <a:lstStyle/>
-          <a:p>
-            <a:pPr algn="ctr"/>
-          </a:p>
-        </p:txBody>
-      </p:sp>
-      <p:sp>
-        <p:nvSpPr>
-          <p:cNvPr id="4" name="Rectangle 3"/>
-          <p:cNvSpPr/>
-          <p:nvPr/>
-        </p:nvSpPr>
-        <p:spPr>
-          <a:xfrm>
-            <a:off x="0" y="960120"/>
-            <a:ext cx="12191695" cy="54864"/>
-          </a:xfrm>
-          <a:prstGeom prst="rect">
-            <a:avLst/>
-          </a:prstGeom>
-          <a:solidFill>
-            <a:srgbClr val="F2B705"/>
-          </a:solidFill>
-          <a:ln>
-            <a:noFill/>
-          </a:ln>
-          <a:effectLst/>
-        </p:spPr>
-        <p:style>
-          <a:lnRef idx="1">
-            <a:schemeClr val="accent1"/>
-          </a:lnRef>
-          <a:fillRef idx="3">
-            <a:schemeClr val="accent1"/>
-          </a:fillRef>
-          <a:effectRef idx="2">
-            <a:schemeClr val="accent1"/>
-          </a:effectRef>
-          <a:fontRef idx="minor">
-            <a:schemeClr val="lt1"/>
-          </a:fontRef>
-        </p:style>
-        <p:txBody>
-          <a:bodyPr rtlCol="0" anchor="ctr"/>
-          <a:lstStyle/>
-          <a:p>
-            <a:pPr algn="ctr"/>
-          </a:p>
-        </p:txBody>
-      </p:sp>
-      <p:sp>
-        <p:nvSpPr>
-          <p:cNvPr id="5" name="TextBox 4"/>
-          <p:cNvSpPr txBox="1"/>
-          <p:nvPr/>
-        </p:nvSpPr>
-        <p:spPr>
-          <a:xfrm>
-            <a:off x="457200" y="109728"/>
-            <a:ext cx="11247120" cy="777240"/>
-          </a:xfrm>
-          <a:prstGeom prst="rect">
-            <a:avLst/>
-          </a:prstGeom>
-          <a:noFill/>
-        </p:spPr>
-        <p:txBody>
-          <a:bodyPr wrap="square" anchor="ctr">
-            <a:spAutoFit/>
-          </a:bodyPr>
-          <a:lstStyle/>
-          <a:p>
-            <a:r>
-              <a:rPr sz="1300" b="1" i="0">
-                <a:solidFill>
-                  <a:srgbClr val="F2B705"/>
-                </a:solidFill>
-                <a:latin typeface="Malgun Gothic"/>
-                <a:ea typeface="Malgun Gothic"/>
-                <a:cs typeface="Malgun Gothic"/>
-              </a:rPr>
-              <a:t>10   </a:t>
-            </a:r>
-            <a:r>
-              <a:rPr sz="2400" b="1" i="0">
-                <a:solidFill>
-                  <a:srgbClr val="FFFFFF"/>
-                </a:solidFill>
-                <a:latin typeface="Malgun Gothic"/>
-                <a:ea typeface="Malgun Gothic"/>
-                <a:cs typeface="Malgun Gothic"/>
-              </a:rPr>
-              <a:t>10. 내분비 질환을 읽는 기본 논리</a:t>
-            </a:r>
-          </a:p>
-        </p:txBody>
-      </p:sp>
-      <p:sp>
-        <p:nvSpPr>
-          <p:cNvPr id="6" name="TextBox 5"/>
-          <p:cNvSpPr txBox="1"/>
-          <p:nvPr/>
-        </p:nvSpPr>
-        <p:spPr>
-          <a:xfrm>
-            <a:off x="457200" y="6446520"/>
-            <a:ext cx="11247120" cy="301752"/>
-          </a:xfrm>
-          <a:prstGeom prst="rect">
-            <a:avLst/>
-          </a:prstGeom>
-          <a:noFill/>
-        </p:spPr>
-        <p:txBody>
-          <a:bodyPr wrap="square" anchor="ctr">
-            <a:spAutoFit/>
-          </a:bodyPr>
-          <a:lstStyle/>
-          <a:p>
-            <a:r>
-              <a:rPr sz="900" b="0" i="0">
-                <a:solidFill>
-                  <a:srgbClr val="66788A"/>
-                </a:solidFill>
-                <a:latin typeface="Malgun Gothic"/>
-                <a:ea typeface="Malgun Gothic"/>
-                <a:cs typeface="Malgun Gothic"/>
-              </a:rPr>
-              <a:t>M01-W02-L02  ·  내분비계 요약: 호르몬과 되먹임</a:t>
-            </a:r>
-            <a:r>
-              <a:rPr sz="900" b="1" i="0">
-                <a:solidFill>
-                  <a:srgbClr val="003C71"/>
-                </a:solidFill>
-                <a:latin typeface="Malgun Gothic"/>
-                <a:ea typeface="Malgun Gothic"/>
-                <a:cs typeface="Malgun Gothic"/>
-              </a:rPr>
-              <a:t>      42</a:t>
-            </a:r>
-          </a:p>
-        </p:txBody>
-      </p:sp>
-      <p:sp>
-        <p:nvSpPr>
-          <p:cNvPr id="7" name="TextBox 6"/>
-          <p:cNvSpPr txBox="1"/>
-          <p:nvPr/>
-        </p:nvSpPr>
-        <p:spPr>
-          <a:xfrm>
-            <a:off x="640080" y="1280160"/>
-            <a:ext cx="10881360" cy="5029200"/>
-          </a:xfrm>
-          <a:prstGeom prst="rect">
-            <a:avLst/>
-          </a:prstGeom>
-          <a:noFill/>
-        </p:spPr>
-        <p:txBody>
-          <a:bodyPr wrap="square" anchor="t">
-            <a:spAutoFit/>
-          </a:bodyPr>
-          <a:lstStyle/>
-          <a:p>
-            <a:pPr>
-              <a:spcAft>
-                <a:spcPts val="900"/>
-              </a:spcAft>
-            </a:pPr>
-            <a:r>
-              <a:rPr sz="1400" b="1" i="0">
-                <a:solidFill>
-                  <a:srgbClr val="F2B705"/>
-                </a:solidFill>
-                <a:latin typeface="Malgun Gothic"/>
-                <a:ea typeface="Malgun Gothic"/>
-                <a:cs typeface="Malgun Gothic"/>
-              </a:rPr>
-              <a:t>•  </a:t>
-            </a:r>
-            <a:r>
-              <a:rPr sz="1400" b="0" i="0">
-                <a:solidFill>
-                  <a:srgbClr val="11202B"/>
-                </a:solidFill>
-                <a:latin typeface="Malgun Gothic"/>
-                <a:ea typeface="Malgun Gothic"/>
-                <a:cs typeface="Malgun Gothic"/>
-              </a:rPr>
-              <a:t>이 표가 내분비 진단의 출발점이다. 예를 들어 갑상샘 기능 저하에서 TSH가 높으면 갑상샘 자체의 문제(Hashimoto 갑상샘염이 가장 흔하다)이고, TSH가 낮으면 뇌하수체의 문제다.</a:t>
-            </a:r>
-          </a:p>
-          <a:p>
-            <a:pPr>
-              <a:spcAft>
-                <a:spcPts val="900"/>
-              </a:spcAft>
-            </a:pPr>
-            <a:r>
-              <a:rPr sz="1400" b="1" i="0">
-                <a:solidFill>
-                  <a:srgbClr val="F2B705"/>
-                </a:solidFill>
-                <a:latin typeface="Malgun Gothic"/>
-                <a:ea typeface="Malgun Gothic"/>
-                <a:cs typeface="Malgun Gothic"/>
-              </a:rPr>
-              <a:t>•  </a:t>
-            </a:r>
-            <a:r>
-              <a:rPr sz="1400" b="1" i="0">
-                <a:solidFill>
-                  <a:srgbClr val="11202B"/>
-                </a:solidFill>
-                <a:latin typeface="Malgun Gothic"/>
-                <a:ea typeface="Malgun Gothic"/>
-                <a:cs typeface="Malgun Gothic"/>
-              </a:rPr>
-              <a:t>자극 검사와 억제 검사</a:t>
-            </a:r>
-            <a:r>
-              <a:rPr sz="1400" b="0" i="0">
-                <a:solidFill>
-                  <a:srgbClr val="11202B"/>
-                </a:solidFill>
-                <a:latin typeface="Malgun Gothic"/>
-                <a:ea typeface="Malgun Gothic"/>
-                <a:cs typeface="Malgun Gothic"/>
-              </a:rPr>
-              <a:t>의 논리도 되먹임에서 나온다. 기능 저하가 의심되면 </a:t>
-            </a:r>
-            <a:r>
-              <a:rPr sz="1400" b="1" i="0">
-                <a:solidFill>
-                  <a:srgbClr val="11202B"/>
-                </a:solidFill>
-                <a:latin typeface="Malgun Gothic"/>
-                <a:ea typeface="Malgun Gothic"/>
-                <a:cs typeface="Malgun Gothic"/>
-              </a:rPr>
-              <a:t>자극</a:t>
-            </a:r>
-            <a:r>
-              <a:rPr sz="1400" b="0" i="0">
-                <a:solidFill>
-                  <a:srgbClr val="11202B"/>
-                </a:solidFill>
-                <a:latin typeface="Malgun Gothic"/>
-                <a:ea typeface="Malgun Gothic"/>
-                <a:cs typeface="Malgun Gothic"/>
-              </a:rPr>
-              <a:t>을 주어 반응하는지를 본다. 기능 과다가 의심되면 </a:t>
-            </a:r>
-            <a:r>
-              <a:rPr sz="1400" b="1" i="0">
-                <a:solidFill>
-                  <a:srgbClr val="11202B"/>
-                </a:solidFill>
-                <a:latin typeface="Malgun Gothic"/>
-                <a:ea typeface="Malgun Gothic"/>
-                <a:cs typeface="Malgun Gothic"/>
-              </a:rPr>
-              <a:t>억제</a:t>
-            </a:r>
-            <a:r>
-              <a:rPr sz="1400" b="0" i="0">
-                <a:solidFill>
-                  <a:srgbClr val="11202B"/>
-                </a:solidFill>
-                <a:latin typeface="Malgun Gothic"/>
-                <a:ea typeface="Malgun Gothic"/>
-                <a:cs typeface="Malgun Gothic"/>
-              </a:rPr>
-              <a:t>를 주어 억제되는지를 본다. 정상 조직은 되먹임에 반응하지만 종양은 반응하지 않는다는 원리를 이용한다. Cushing 증후군에서 dexamethasone 억제 검사를 하는 것이 그 예다.</a:t>
-            </a:r>
-          </a:p>
-          <a:p>
-            <a:pPr>
-              <a:spcAft>
-                <a:spcPts val="900"/>
-              </a:spcAft>
-            </a:pPr>
-            <a:r>
-              <a:rPr sz="1400" b="1" i="0">
-                <a:solidFill>
-                  <a:srgbClr val="F2B705"/>
-                </a:solidFill>
-                <a:latin typeface="Malgun Gothic"/>
-                <a:ea typeface="Malgun Gothic"/>
-                <a:cs typeface="Malgun Gothic"/>
-              </a:rPr>
-              <a:t>•  </a:t>
-            </a:r>
-            <a:r>
-              <a:rPr sz="1400" b="1" i="0">
-                <a:solidFill>
-                  <a:srgbClr val="11202B"/>
-                </a:solidFill>
-                <a:latin typeface="Malgun Gothic"/>
-                <a:ea typeface="Malgun Gothic"/>
-                <a:cs typeface="Malgun Gothic"/>
-              </a:rPr>
-              <a:t>주요 질환을 축별로 정리하면</a:t>
-            </a:r>
-            <a:r>
-              <a:rPr sz="1400" b="0" i="0">
-                <a:solidFill>
-                  <a:srgbClr val="11202B"/>
-                </a:solidFill>
-                <a:latin typeface="Malgun Gothic"/>
-                <a:ea typeface="Malgun Gothic"/>
-                <a:cs typeface="Malgun Gothic"/>
-              </a:rPr>
-              <a:t> 다음과 같다.</a:t>
-            </a:r>
-          </a:p>
-          <a:p>
-            <a:pPr>
-              <a:spcAft>
-                <a:spcPts val="900"/>
-              </a:spcAft>
-            </a:pPr>
-            <a:r>
-              <a:rPr sz="1400" b="1" i="0">
-                <a:solidFill>
-                  <a:srgbClr val="F2B705"/>
-                </a:solidFill>
-                <a:latin typeface="Malgun Gothic"/>
-                <a:ea typeface="Malgun Gothic"/>
-                <a:cs typeface="Malgun Gothic"/>
-              </a:rPr>
-              <a:t>•  </a:t>
-            </a:r>
-            <a:r>
-              <a:rPr sz="1400" b="1" i="0">
-                <a:solidFill>
-                  <a:srgbClr val="11202B"/>
-                </a:solidFill>
-                <a:latin typeface="Malgun Gothic"/>
-                <a:ea typeface="Malgun Gothic"/>
-                <a:cs typeface="Malgun Gothic"/>
-              </a:rPr>
-              <a:t>갑상샘</a:t>
-            </a:r>
-            <a:r>
-              <a:rPr sz="1400" b="0" i="0">
-                <a:solidFill>
-                  <a:srgbClr val="11202B"/>
-                </a:solidFill>
-                <a:latin typeface="Malgun Gothic"/>
-                <a:ea typeface="Malgun Gothic"/>
-                <a:cs typeface="Malgun Gothic"/>
-              </a:rPr>
-              <a:t>: 기능 과다의 대표가 Graves 병이며, TSH 수용체를 자극하는 자가항체가 원인이다. 자가항체가 되먹임과 무관하게 수용체를 계속 자극하므로 T3·T4가 높고 TSH는 억제된다. 기능 저하의 대표가 Hashimoto 갑상샘염으로 자가면역에 의한 갑상샘 파괴다.</a:t>
-            </a:r>
-          </a:p>
-          <a:p>
-            <a:pPr>
-              <a:spcAft>
-                <a:spcPts val="900"/>
-              </a:spcAft>
-            </a:pPr>
-            <a:r>
-              <a:rPr sz="1400" b="1" i="0">
-                <a:solidFill>
-                  <a:srgbClr val="F2B705"/>
-                </a:solidFill>
-                <a:latin typeface="Malgun Gothic"/>
-                <a:ea typeface="Malgun Gothic"/>
-                <a:cs typeface="Malgun Gothic"/>
-              </a:rPr>
-              <a:t>•  </a:t>
-            </a:r>
-            <a:r>
-              <a:rPr sz="1400" b="1" i="0">
-                <a:solidFill>
-                  <a:srgbClr val="11202B"/>
-                </a:solidFill>
-                <a:latin typeface="Malgun Gothic"/>
-                <a:ea typeface="Malgun Gothic"/>
-                <a:cs typeface="Malgun Gothic"/>
-              </a:rPr>
-              <a:t>부신</a:t>
-            </a:r>
-            <a:r>
-              <a:rPr sz="1400" b="0" i="0">
-                <a:solidFill>
-                  <a:srgbClr val="11202B"/>
-                </a:solidFill>
-                <a:latin typeface="Malgun Gothic"/>
-                <a:ea typeface="Malgun Gothic"/>
-                <a:cs typeface="Malgun Gothic"/>
-              </a:rPr>
-              <a:t>: 기능 과다가 Cushing 증후군이며, 외부 투여가 가장 흔한 원인이고 그 외에 뇌하수체 종양(Cushing 병)과 부신 종양이 있다. 기능 저하가 Addison 병이며, 원발성인 경우 cortisol과 aldosterone이 함께 부족해 저혈압, 저나트륨혈증, 고칼륨혈증, 색소 침착(ACTH 증가에 따른)이 나타난다.</a:t>
-            </a:r>
-          </a:p>
-          <a:p>
-            <a:pPr>
-              <a:spcAft>
-                <a:spcPts val="900"/>
-              </a:spcAft>
-            </a:pPr>
-            <a:r>
-              <a:rPr sz="1400" b="1" i="0">
-                <a:solidFill>
-                  <a:srgbClr val="F2B705"/>
-                </a:solidFill>
-                <a:latin typeface="Malgun Gothic"/>
-                <a:ea typeface="Malgun Gothic"/>
-                <a:cs typeface="Malgun Gothic"/>
-              </a:rPr>
-              <a:t>•  </a:t>
-            </a:r>
-            <a:r>
-              <a:rPr sz="1400" b="1" i="0">
-                <a:solidFill>
-                  <a:srgbClr val="11202B"/>
-                </a:solidFill>
-                <a:latin typeface="Malgun Gothic"/>
-                <a:ea typeface="Malgun Gothic"/>
-                <a:cs typeface="Malgun Gothic"/>
-              </a:rPr>
-              <a:t>뇌하수체</a:t>
-            </a:r>
-            <a:r>
-              <a:rPr sz="1400" b="0" i="0">
-                <a:solidFill>
-                  <a:srgbClr val="11202B"/>
-                </a:solidFill>
-                <a:latin typeface="Malgun Gothic"/>
-                <a:ea typeface="Malgun Gothic"/>
-                <a:cs typeface="Malgun Gothic"/>
-              </a:rPr>
-              <a:t>: 과다는 종양에 의한 것으로 prolactin, GH, ACTH 순으로 흔하다. 부족은 종양·수술·출혈에 의한 것으로, 여러 축이 함께 영향을 받는다.</a:t>
-            </a:r>
-          </a:p>
-          <a:p>
-            <a:pPr>
-              <a:spcAft>
-                <a:spcPts val="900"/>
-              </a:spcAft>
-            </a:pPr>
-            <a:r>
-              <a:rPr sz="1400" b="1" i="0">
-                <a:solidFill>
-                  <a:srgbClr val="F2B705"/>
-                </a:solidFill>
-                <a:latin typeface="Malgun Gothic"/>
-                <a:ea typeface="Malgun Gothic"/>
-                <a:cs typeface="Malgun Gothic"/>
-              </a:rPr>
-              <a:t>•  </a:t>
-            </a:r>
-            <a:r>
-              <a:rPr sz="1400" b="1" i="0">
-                <a:solidFill>
-                  <a:srgbClr val="11202B"/>
-                </a:solidFill>
-                <a:latin typeface="Malgun Gothic"/>
-                <a:ea typeface="Malgun Gothic"/>
-                <a:cs typeface="Malgun Gothic"/>
-              </a:rPr>
-              <a:t>부갑상샘</a:t>
-            </a:r>
-            <a:r>
-              <a:rPr sz="1400" b="0" i="0">
-                <a:solidFill>
-                  <a:srgbClr val="11202B"/>
-                </a:solidFill>
-                <a:latin typeface="Malgun Gothic"/>
-                <a:ea typeface="Malgun Gothic"/>
-                <a:cs typeface="Malgun Gothic"/>
-              </a:rPr>
-              <a:t>: 과다에서 혈중 Ca²⁺이 올라가 결석, 뼈 통증, 변비, 의식 변화가 나타난다. 부족에서 Ca²⁺이 떨어져 근육 경련과 감각 이상이 나타난다.</a:t>
-            </a:r>
-          </a:p>
-          <a:p>
-            <a:pPr>
-              <a:spcAft>
-                <a:spcPts val="900"/>
-              </a:spcAft>
-            </a:pPr>
-            <a:r>
-              <a:rPr sz="1400" b="1" i="0">
-                <a:solidFill>
-                  <a:srgbClr val="F2B705"/>
-                </a:solidFill>
-                <a:latin typeface="Malgun Gothic"/>
-                <a:ea typeface="Malgun Gothic"/>
-                <a:cs typeface="Malgun Gothic"/>
-              </a:rPr>
-              <a:t>•  </a:t>
-            </a:r>
-            <a:r>
-              <a:rPr sz="1400" b="1" i="0">
-                <a:solidFill>
-                  <a:srgbClr val="11202B"/>
-                </a:solidFill>
-                <a:latin typeface="Malgun Gothic"/>
-                <a:ea typeface="Malgun Gothic"/>
-                <a:cs typeface="Malgun Gothic"/>
-              </a:rPr>
-              <a:t>췌장</a:t>
-            </a:r>
-            <a:r>
-              <a:rPr sz="1400" b="0" i="0">
-                <a:solidFill>
-                  <a:srgbClr val="11202B"/>
-                </a:solidFill>
-                <a:latin typeface="Malgun Gothic"/>
-                <a:ea typeface="Malgun Gothic"/>
-                <a:cs typeface="Malgun Gothic"/>
-              </a:rPr>
-              <a:t>: 제1형과 제2형 당뇨병이 대표이며, 앞 절에서 다루었다.</a:t>
-            </a:r>
-          </a:p>
-          <a:p>
-            <a:pPr>
-              <a:spcAft>
-                <a:spcPts val="900"/>
-              </a:spcAft>
-            </a:pPr>
-            <a:r>
-              <a:rPr sz="1400" b="1" i="0">
-                <a:solidFill>
-                  <a:srgbClr val="F2B705"/>
-                </a:solidFill>
-                <a:latin typeface="Malgun Gothic"/>
-                <a:ea typeface="Malgun Gothic"/>
-                <a:cs typeface="Malgun Gothic"/>
-              </a:rPr>
-              <a:t>•  </a:t>
-            </a:r>
-            <a:r>
-              <a:rPr sz="1400" b="1" i="0">
-                <a:solidFill>
-                  <a:srgbClr val="11202B"/>
-                </a:solidFill>
-                <a:latin typeface="Malgun Gothic"/>
-                <a:ea typeface="Malgun Gothic"/>
-                <a:cs typeface="Malgun Gothic"/>
-              </a:rPr>
-              <a:t>수용체 수준의 문제</a:t>
-            </a:r>
-            <a:r>
-              <a:rPr sz="1400" b="0" i="0">
-                <a:solidFill>
-                  <a:srgbClr val="11202B"/>
-                </a:solidFill>
-                <a:latin typeface="Malgun Gothic"/>
-                <a:ea typeface="Malgun Gothic"/>
-                <a:cs typeface="Malgun Gothic"/>
-              </a:rPr>
-              <a:t>도 범주 하나를 이룬다. 호르몬 농도는 충분하거나 오히려 높은데 효과가 나타나지 않는 상태다. 제2형 당뇨병의 insulin 저항성, androgen 수용체 결함에 의한 androgen 불감 증후군, PTH 수용체 이후 신호의 결함에 의한 가성 부갑상샘 기능 저하증이 예다. 이런 경우 호르몬을 더 투여해도 효과가 없다는 점이 치료의 제약이 된다.</a:t>
-            </a:r>
-          </a:p>
-        </p:txBody>
-      </p:sp>
-    </p:spTree>
-  </p:cSld>
-  <p:clrMapOvr>
-    <a:masterClrMapping/>
-  </p:clrMapOvr>
-</p:sld>
-</file>
-
-<file path=ppt/slides/slide43.xml><?xml version="1.0" encoding="utf-8"?>
-<p:sld xmlns:a="http://schemas.openxmlformats.org/drawingml/2006/main" xmlns:p="http://schemas.openxmlformats.org/presentationml/2006/main" xmlns:r="http://schemas.openxmlformats.org/officeDocument/2006/relationships">
-  <p:cSld>
-    <p:spTree>
-      <p:nvGrpSpPr>
-        <p:cNvPr id="1" name=""/>
-        <p:cNvGrpSpPr/>
-        <p:nvPr/>
-      </p:nvGrpSpPr>
-      <p:grpSpPr/>
-      <p:sp>
-        <p:nvSpPr>
-          <p:cNvPr id="2" name="Rectangle 1"/>
-          <p:cNvSpPr/>
-          <p:nvPr/>
-        </p:nvSpPr>
-        <p:spPr>
-          <a:xfrm>
-            <a:off x="0" y="0"/>
-            <a:ext cx="12191695" cy="6858000"/>
-          </a:xfrm>
-          <a:prstGeom prst="rect">
-            <a:avLst/>
-          </a:prstGeom>
-          <a:solidFill>
-            <a:srgbClr val="F5F8F9"/>
-          </a:solidFill>
-          <a:ln>
-            <a:noFill/>
-          </a:ln>
-          <a:effectLst/>
-        </p:spPr>
-        <p:style>
-          <a:lnRef idx="1">
-            <a:schemeClr val="accent1"/>
-          </a:lnRef>
-          <a:fillRef idx="3">
-            <a:schemeClr val="accent1"/>
-          </a:fillRef>
-          <a:effectRef idx="2">
-            <a:schemeClr val="accent1"/>
-          </a:effectRef>
-          <a:fontRef idx="minor">
-            <a:schemeClr val="lt1"/>
-          </a:fontRef>
-        </p:style>
-        <p:txBody>
-          <a:bodyPr rtlCol="0" anchor="ctr"/>
-          <a:lstStyle/>
-          <a:p>
-            <a:pPr algn="ctr"/>
-          </a:p>
-        </p:txBody>
-      </p:sp>
-      <p:sp>
-        <p:nvSpPr>
-          <p:cNvPr id="3" name="Rectangle 2"/>
-          <p:cNvSpPr/>
-          <p:nvPr/>
-        </p:nvSpPr>
-        <p:spPr>
-          <a:xfrm>
-            <a:off x="0" y="0"/>
-            <a:ext cx="12191695" cy="960120"/>
-          </a:xfrm>
-          <a:prstGeom prst="rect">
-            <a:avLst/>
-          </a:prstGeom>
-          <a:solidFill>
-            <a:srgbClr val="003C71"/>
-          </a:solidFill>
-          <a:ln>
-            <a:noFill/>
-          </a:ln>
-          <a:effectLst/>
-        </p:spPr>
-        <p:style>
-          <a:lnRef idx="1">
-            <a:schemeClr val="accent1"/>
-          </a:lnRef>
-          <a:fillRef idx="3">
-            <a:schemeClr val="accent1"/>
-          </a:fillRef>
-          <a:effectRef idx="2">
-            <a:schemeClr val="accent1"/>
-          </a:effectRef>
-          <a:fontRef idx="minor">
-            <a:schemeClr val="lt1"/>
-          </a:fontRef>
-        </p:style>
-        <p:txBody>
-          <a:bodyPr rtlCol="0" anchor="ctr"/>
-          <a:lstStyle/>
-          <a:p>
-            <a:pPr algn="ctr"/>
-          </a:p>
-        </p:txBody>
-      </p:sp>
-      <p:sp>
-        <p:nvSpPr>
-          <p:cNvPr id="4" name="Rectangle 3"/>
-          <p:cNvSpPr/>
-          <p:nvPr/>
-        </p:nvSpPr>
-        <p:spPr>
-          <a:xfrm>
-            <a:off x="0" y="960120"/>
-            <a:ext cx="12191695" cy="54864"/>
-          </a:xfrm>
-          <a:prstGeom prst="rect">
-            <a:avLst/>
-          </a:prstGeom>
-          <a:solidFill>
-            <a:srgbClr val="F2B705"/>
-          </a:solidFill>
-          <a:ln>
-            <a:noFill/>
-          </a:ln>
-          <a:effectLst/>
-        </p:spPr>
-        <p:style>
-          <a:lnRef idx="1">
-            <a:schemeClr val="accent1"/>
-          </a:lnRef>
-          <a:fillRef idx="3">
-            <a:schemeClr val="accent1"/>
-          </a:fillRef>
-          <a:effectRef idx="2">
-            <a:schemeClr val="accent1"/>
-          </a:effectRef>
-          <a:fontRef idx="minor">
-            <a:schemeClr val="lt1"/>
-          </a:fontRef>
-        </p:style>
-        <p:txBody>
-          <a:bodyPr rtlCol="0" anchor="ctr"/>
-          <a:lstStyle/>
-          <a:p>
-            <a:pPr algn="ctr"/>
-          </a:p>
-        </p:txBody>
-      </p:sp>
-      <p:sp>
-        <p:nvSpPr>
-          <p:cNvPr id="5" name="TextBox 4"/>
-          <p:cNvSpPr txBox="1"/>
-          <p:nvPr/>
-        </p:nvSpPr>
-        <p:spPr>
-          <a:xfrm>
-            <a:off x="457200" y="109728"/>
-            <a:ext cx="11247120" cy="777240"/>
-          </a:xfrm>
-          <a:prstGeom prst="rect">
-            <a:avLst/>
-          </a:prstGeom>
-          <a:noFill/>
-        </p:spPr>
-        <p:txBody>
-          <a:bodyPr wrap="square" anchor="ctr">
-            <a:spAutoFit/>
-          </a:bodyPr>
-          <a:lstStyle/>
-          <a:p>
-            <a:r>
-              <a:rPr sz="1300" b="1" i="0">
-                <a:solidFill>
-                  <a:srgbClr val="F2B705"/>
-                </a:solidFill>
-                <a:latin typeface="Malgun Gothic"/>
-                <a:ea typeface="Malgun Gothic"/>
-                <a:cs typeface="Malgun Gothic"/>
-              </a:rPr>
-              <a:t>10   </a:t>
-            </a:r>
-            <a:r>
-              <a:rPr sz="2400" b="1" i="0">
-                <a:solidFill>
-                  <a:srgbClr val="FFFFFF"/>
-                </a:solidFill>
-                <a:latin typeface="Malgun Gothic"/>
-                <a:ea typeface="Malgun Gothic"/>
-                <a:cs typeface="Malgun Gothic"/>
-              </a:rPr>
-              <a:t>10. 내분비 질환을 읽는 기본 논리</a:t>
-            </a:r>
-          </a:p>
-        </p:txBody>
-      </p:sp>
-      <p:sp>
-        <p:nvSpPr>
-          <p:cNvPr id="6" name="TextBox 5"/>
-          <p:cNvSpPr txBox="1"/>
-          <p:nvPr/>
-        </p:nvSpPr>
-        <p:spPr>
-          <a:xfrm>
-            <a:off x="457200" y="6446520"/>
-            <a:ext cx="11247120" cy="301752"/>
-          </a:xfrm>
-          <a:prstGeom prst="rect">
-            <a:avLst/>
-          </a:prstGeom>
-          <a:noFill/>
-        </p:spPr>
-        <p:txBody>
-          <a:bodyPr wrap="square" anchor="ctr">
-            <a:spAutoFit/>
-          </a:bodyPr>
-          <a:lstStyle/>
-          <a:p>
-            <a:r>
-              <a:rPr sz="900" b="0" i="0">
-                <a:solidFill>
-                  <a:srgbClr val="66788A"/>
-                </a:solidFill>
-                <a:latin typeface="Malgun Gothic"/>
-                <a:ea typeface="Malgun Gothic"/>
-                <a:cs typeface="Malgun Gothic"/>
-              </a:rPr>
-              <a:t>M01-W02-L02  ·  내분비계 요약: 호르몬과 되먹임</a:t>
-            </a:r>
-            <a:r>
-              <a:rPr sz="900" b="1" i="0">
-                <a:solidFill>
-                  <a:srgbClr val="003C71"/>
-                </a:solidFill>
-                <a:latin typeface="Malgun Gothic"/>
-                <a:ea typeface="Malgun Gothic"/>
-                <a:cs typeface="Malgun Gothic"/>
-              </a:rPr>
-              <a:t>      43</a:t>
-            </a:r>
-          </a:p>
-        </p:txBody>
-      </p:sp>
-      <p:sp>
-        <p:nvSpPr>
-          <p:cNvPr id="7" name="Rectangle 6"/>
-          <p:cNvSpPr/>
-          <p:nvPr/>
-        </p:nvSpPr>
-        <p:spPr>
-          <a:xfrm>
-            <a:off x="640080" y="1325880"/>
-            <a:ext cx="10881360" cy="1386839"/>
-          </a:xfrm>
-          <a:prstGeom prst="rect">
-            <a:avLst/>
-          </a:prstGeom>
-          <a:solidFill>
-            <a:srgbClr val="FFF5D6"/>
-          </a:solidFill>
-          <a:ln>
-            <a:noFill/>
-          </a:ln>
-          <a:effectLst/>
-        </p:spPr>
-        <p:style>
-          <a:lnRef idx="1">
-            <a:schemeClr val="accent1"/>
-          </a:lnRef>
-          <a:fillRef idx="3">
-            <a:schemeClr val="accent1"/>
-          </a:fillRef>
-          <a:effectRef idx="2">
-            <a:schemeClr val="accent1"/>
-          </a:effectRef>
-          <a:fontRef idx="minor">
-            <a:schemeClr val="lt1"/>
-          </a:fontRef>
-        </p:style>
-        <p:txBody>
-          <a:bodyPr rtlCol="0" anchor="ctr" wrap="square" lIns="228600" rIns="228600"/>
-          <a:lstStyle/>
-          <a:p>
-            <a:pPr algn="l"/>
-            <a:r>
-              <a:rPr sz="1200" b="1" i="0">
-                <a:solidFill>
-                  <a:srgbClr val="8A6300"/>
-                </a:solidFill>
-                <a:latin typeface="Malgun Gothic"/>
-                <a:ea typeface="Malgun Gothic"/>
-                <a:cs typeface="Malgun Gothic"/>
-              </a:rPr>
-              <a:t>핵심 정리   </a:t>
-            </a:r>
-            <a:r>
-              <a:rPr sz="1600" b="0" i="0">
-                <a:solidFill>
-                  <a:srgbClr val="11202B"/>
-                </a:solidFill>
-                <a:latin typeface="Malgun Gothic"/>
-                <a:ea typeface="Malgun Gothic"/>
-                <a:cs typeface="Malgun Gothic"/>
-              </a:rPr>
-              <a:t>내분비를 공부하는 순서는 질환에서 시작하지 않는다. 신호 전달 방식의 비교 → 호르몬 세 부류와 그 성질의 연쇄 → 수용체와 신호 경로 → 음성 되먹임과 축의 구조 → 각 기관의 호르몬과 작용 → 상호작용 양식을 세우면, 질환은 어느 호르몬이 많거나 적고 그 문제가 축의 어느 단계에 있는지로 정리된다.</a:t>
-            </a:r>
-          </a:p>
-        </p:txBody>
-      </p:sp>
-    </p:spTree>
-  </p:cSld>
-  <p:clrMapOvr>
-    <a:masterClrMapping/>
-  </p:clrMapOvr>
-</p:sld>
-</file>
-
-<file path=ppt/slides/slide44.xml><?xml version="1.0" encoding="utf-8"?>
-<p:sld xmlns:a="http://schemas.openxmlformats.org/drawingml/2006/main" xmlns:p="http://schemas.openxmlformats.org/presentationml/2006/main" xmlns:r="http://schemas.openxmlformats.org/officeDocument/2006/relationships">
-  <p:cSld>
-    <p:spTree>
-      <p:nvGrpSpPr>
-        <p:cNvPr id="1" name=""/>
-        <p:cNvGrpSpPr/>
-        <p:nvPr/>
-      </p:nvGrpSpPr>
-      <p:grpSpPr/>
-      <p:sp>
-        <p:nvSpPr>
-          <p:cNvPr id="2" name="Rectangle 1"/>
-          <p:cNvSpPr/>
-          <p:nvPr/>
-        </p:nvSpPr>
-        <p:spPr>
-          <a:xfrm>
-            <a:off x="0" y="0"/>
-            <a:ext cx="12191695" cy="6858000"/>
-          </a:xfrm>
-          <a:prstGeom prst="rect">
-            <a:avLst/>
-          </a:prstGeom>
-          <a:solidFill>
-            <a:srgbClr val="F5F8F9"/>
-          </a:solidFill>
-          <a:ln>
-            <a:noFill/>
-          </a:ln>
-          <a:effectLst/>
-        </p:spPr>
-        <p:style>
-          <a:lnRef idx="1">
-            <a:schemeClr val="accent1"/>
-          </a:lnRef>
-          <a:fillRef idx="3">
-            <a:schemeClr val="accent1"/>
-          </a:fillRef>
-          <a:effectRef idx="2">
-            <a:schemeClr val="accent1"/>
-          </a:effectRef>
-          <a:fontRef idx="minor">
-            <a:schemeClr val="lt1"/>
-          </a:fontRef>
-        </p:style>
-        <p:txBody>
-          <a:bodyPr rtlCol="0" anchor="ctr"/>
-          <a:lstStyle/>
-          <a:p>
-            <a:pPr algn="ctr"/>
-          </a:p>
-        </p:txBody>
-      </p:sp>
-      <p:sp>
-        <p:nvSpPr>
-          <p:cNvPr id="3" name="Rectangle 2"/>
-          <p:cNvSpPr/>
-          <p:nvPr/>
-        </p:nvSpPr>
-        <p:spPr>
-          <a:xfrm>
-            <a:off x="0" y="0"/>
-            <a:ext cx="12191695" cy="960120"/>
-          </a:xfrm>
-          <a:prstGeom prst="rect">
-            <a:avLst/>
-          </a:prstGeom>
-          <a:solidFill>
-            <a:srgbClr val="003C71"/>
-          </a:solidFill>
-          <a:ln>
-            <a:noFill/>
-          </a:ln>
-          <a:effectLst/>
-        </p:spPr>
-        <p:style>
-          <a:lnRef idx="1">
-            <a:schemeClr val="accent1"/>
-          </a:lnRef>
-          <a:fillRef idx="3">
-            <a:schemeClr val="accent1"/>
-          </a:fillRef>
-          <a:effectRef idx="2">
-            <a:schemeClr val="accent1"/>
-          </a:effectRef>
-          <a:fontRef idx="minor">
-            <a:schemeClr val="lt1"/>
-          </a:fontRef>
-        </p:style>
-        <p:txBody>
-          <a:bodyPr rtlCol="0" anchor="ctr"/>
-          <a:lstStyle/>
-          <a:p>
-            <a:pPr algn="ctr"/>
-          </a:p>
-        </p:txBody>
-      </p:sp>
-      <p:sp>
-        <p:nvSpPr>
-          <p:cNvPr id="4" name="Rectangle 3"/>
-          <p:cNvSpPr/>
-          <p:nvPr/>
-        </p:nvSpPr>
-        <p:spPr>
-          <a:xfrm>
-            <a:off x="0" y="960120"/>
-            <a:ext cx="12191695" cy="54864"/>
-          </a:xfrm>
-          <a:prstGeom prst="rect">
-            <a:avLst/>
-          </a:prstGeom>
-          <a:solidFill>
-            <a:srgbClr val="F2B705"/>
-          </a:solidFill>
-          <a:ln>
-            <a:noFill/>
-          </a:ln>
-          <a:effectLst/>
-        </p:spPr>
-        <p:style>
-          <a:lnRef idx="1">
-            <a:schemeClr val="accent1"/>
-          </a:lnRef>
-          <a:fillRef idx="3">
-            <a:schemeClr val="accent1"/>
-          </a:fillRef>
-          <a:effectRef idx="2">
-            <a:schemeClr val="accent1"/>
-          </a:effectRef>
-          <a:fontRef idx="minor">
-            <a:schemeClr val="lt1"/>
-          </a:fontRef>
-        </p:style>
-        <p:txBody>
-          <a:bodyPr rtlCol="0" anchor="ctr"/>
-          <a:lstStyle/>
-          <a:p>
-            <a:pPr algn="ctr"/>
-          </a:p>
-        </p:txBody>
-      </p:sp>
-      <p:sp>
-        <p:nvSpPr>
-          <p:cNvPr id="5" name="TextBox 4"/>
-          <p:cNvSpPr txBox="1"/>
-          <p:nvPr/>
-        </p:nvSpPr>
-        <p:spPr>
-          <a:xfrm>
-            <a:off x="457200" y="109728"/>
-            <a:ext cx="11247120" cy="777240"/>
-          </a:xfrm>
-          <a:prstGeom prst="rect">
-            <a:avLst/>
-          </a:prstGeom>
-          <a:noFill/>
-        </p:spPr>
-        <p:txBody>
-          <a:bodyPr wrap="square" anchor="ctr">
-            <a:spAutoFit/>
-          </a:bodyPr>
-          <a:lstStyle/>
-          <a:p>
-            <a:r>
-              <a:rPr sz="1300" b="1" i="0">
-                <a:solidFill>
-                  <a:srgbClr val="F2B705"/>
-                </a:solidFill>
-                <a:latin typeface="Malgun Gothic"/>
-                <a:ea typeface="Malgun Gothic"/>
-                <a:cs typeface="Malgun Gothic"/>
-              </a:rPr>
-              <a:t>Q1   </a:t>
-            </a:r>
-            <a:r>
-              <a:rPr sz="2400" b="1" i="0">
-                <a:solidFill>
-                  <a:srgbClr val="FFFFFF"/>
-                </a:solidFill>
-                <a:latin typeface="Malgun Gothic"/>
-                <a:ea typeface="Malgun Gothic"/>
-                <a:cs typeface="Malgun Gothic"/>
-              </a:rPr>
-              <a:t>확인 문항</a:t>
-            </a:r>
-          </a:p>
-        </p:txBody>
-      </p:sp>
-      <p:sp>
-        <p:nvSpPr>
-          <p:cNvPr id="6" name="TextBox 5"/>
-          <p:cNvSpPr txBox="1"/>
-          <p:nvPr/>
-        </p:nvSpPr>
-        <p:spPr>
-          <a:xfrm>
-            <a:off x="457200" y="6446520"/>
-            <a:ext cx="11247120" cy="301752"/>
-          </a:xfrm>
-          <a:prstGeom prst="rect">
-            <a:avLst/>
-          </a:prstGeom>
-          <a:noFill/>
-        </p:spPr>
-        <p:txBody>
-          <a:bodyPr wrap="square" anchor="ctr">
-            <a:spAutoFit/>
-          </a:bodyPr>
-          <a:lstStyle/>
-          <a:p>
-            <a:r>
-              <a:rPr sz="900" b="0" i="0">
-                <a:solidFill>
-                  <a:srgbClr val="66788A"/>
-                </a:solidFill>
-                <a:latin typeface="Malgun Gothic"/>
-                <a:ea typeface="Malgun Gothic"/>
-                <a:cs typeface="Malgun Gothic"/>
-              </a:rPr>
-              <a:t>M01-W02-L02  ·  내분비계 요약: 호르몬과 되먹임</a:t>
-            </a:r>
-            <a:r>
-              <a:rPr sz="900" b="1" i="0">
-                <a:solidFill>
-                  <a:srgbClr val="003C71"/>
-                </a:solidFill>
-                <a:latin typeface="Malgun Gothic"/>
-                <a:ea typeface="Malgun Gothic"/>
-                <a:cs typeface="Malgun Gothic"/>
-              </a:rPr>
-              <a:t>      44</a:t>
-            </a:r>
-          </a:p>
-        </p:txBody>
-      </p:sp>
-      <p:sp>
-        <p:nvSpPr>
-          <p:cNvPr id="7" name="TextBox 6"/>
-          <p:cNvSpPr txBox="1"/>
-          <p:nvPr/>
-        </p:nvSpPr>
-        <p:spPr>
-          <a:xfrm>
-            <a:off x="640080" y="1371600"/>
-            <a:ext cx="10881360" cy="2103120"/>
-          </a:xfrm>
-          <a:prstGeom prst="rect">
-            <a:avLst/>
-          </a:prstGeom>
-          <a:noFill/>
-        </p:spPr>
-        <p:txBody>
-          <a:bodyPr wrap="square" anchor="t">
-            <a:spAutoFit/>
-          </a:bodyPr>
-          <a:lstStyle/>
-          <a:p>
-            <a:r>
-              <a:rPr sz="1900" b="1" i="0">
-                <a:solidFill>
-                  <a:srgbClr val="11202B"/>
-                </a:solidFill>
-                <a:latin typeface="Malgun Gothic"/>
-                <a:ea typeface="Malgun Gothic"/>
-                <a:cs typeface="Malgun Gothic"/>
-              </a:rPr>
-              <a:t>내분비 신호 전달에서 표적을 결정하는 것이 무엇인지 쓰고, 그 원리에서 나오는 결과 두 가지를 설명하시오.</a:t>
-            </a:r>
-          </a:p>
-        </p:txBody>
-      </p:sp>
-      <p:sp>
-        <p:nvSpPr>
-          <p:cNvPr id="8" name="Rectangle 7"/>
-          <p:cNvSpPr/>
-          <p:nvPr/>
-        </p:nvSpPr>
-        <p:spPr>
-          <a:xfrm>
-            <a:off x="640080" y="3657600"/>
-            <a:ext cx="10881360" cy="2606040"/>
-          </a:xfrm>
-          <a:prstGeom prst="rect">
-            <a:avLst/>
-          </a:prstGeom>
-          <a:solidFill>
-            <a:srgbClr val="FFFFFF"/>
-          </a:solidFill>
-          <a:ln>
-            <a:solidFill>
-              <a:srgbClr val="C2CDD6"/>
-            </a:solidFill>
-          </a:ln>
-          <a:effectLst/>
-        </p:spPr>
-        <p:style>
-          <a:lnRef idx="1">
-            <a:schemeClr val="accent1"/>
-          </a:lnRef>
-          <a:fillRef idx="3">
-            <a:schemeClr val="accent1"/>
-          </a:fillRef>
-          <a:effectRef idx="2">
-            <a:schemeClr val="accent1"/>
-          </a:effectRef>
-          <a:fontRef idx="minor">
-            <a:schemeClr val="lt1"/>
-          </a:fontRef>
-        </p:style>
-        <p:txBody>
-          <a:bodyPr rtlCol="0" anchor="ctr" wrap="square" lIns="228600" rIns="228600" tIns="164592"/>
-          <a:lstStyle/>
-          <a:p>
-            <a:pPr algn="l"/>
-            <a:r>
-              <a:rPr sz="1200" b="1" i="0">
-                <a:solidFill>
-                  <a:srgbClr val="003C71"/>
-                </a:solidFill>
-                <a:latin typeface="Malgun Gothic"/>
-                <a:ea typeface="Malgun Gothic"/>
-                <a:cs typeface="Malgun Gothic"/>
-              </a:rPr>
-              <a:t>해설   </a:t>
-            </a:r>
-            <a:r>
-              <a:rPr sz="1500" b="0" i="0">
-                <a:solidFill>
-                  <a:srgbClr val="11202B"/>
-                </a:solidFill>
-                <a:latin typeface="Malgun Gothic"/>
-                <a:ea typeface="Malgun Gothic"/>
-                <a:cs typeface="Malgun Gothic"/>
-              </a:rPr>
-              <a:t>표적을 결정하는 것은 호르몬이 아니라 수용체다. 호르몬은 혈액을 타고 몸 전체를 돌지만 수용체가 없는 세포는 반응하지 않는다. 결과는 두 가지다. 첫째, 하나의 호르몬이 여러 기관에 동시에 작용할 수 있다. 둘째, 같은 호르몬이 기관마다 다른 수용체를 통해 서로 다른 효과를 낼 수 있다. Angiotensin II가 혈관에서는 수축, 부신에서는 aldosterone 분비, 시상하부에서는 갈증을 일으키는 것이 그 예다.</a:t>
-            </a:r>
-          </a:p>
-        </p:txBody>
-      </p:sp>
-    </p:spTree>
-  </p:cSld>
-  <p:clrMapOvr>
-    <a:masterClrMapping/>
-  </p:clrMapOvr>
-</p:sld>
-</file>
-
-<file path=ppt/slides/slide45.xml><?xml version="1.0" encoding="utf-8"?>
-<p:sld xmlns:a="http://schemas.openxmlformats.org/drawingml/2006/main" xmlns:p="http://schemas.openxmlformats.org/presentationml/2006/main" xmlns:r="http://schemas.openxmlformats.org/officeDocument/2006/relationships">
-  <p:cSld>
-    <p:spTree>
-      <p:nvGrpSpPr>
-        <p:cNvPr id="1" name=""/>
-        <p:cNvGrpSpPr/>
-        <p:nvPr/>
-      </p:nvGrpSpPr>
-      <p:grpSpPr/>
-      <p:sp>
-        <p:nvSpPr>
-          <p:cNvPr id="2" name="Rectangle 1"/>
-          <p:cNvSpPr/>
-          <p:nvPr/>
-        </p:nvSpPr>
-        <p:spPr>
-          <a:xfrm>
-            <a:off x="0" y="0"/>
-            <a:ext cx="12191695" cy="6858000"/>
-          </a:xfrm>
-          <a:prstGeom prst="rect">
-            <a:avLst/>
-          </a:prstGeom>
-          <a:solidFill>
-            <a:srgbClr val="F5F8F9"/>
-          </a:solidFill>
-          <a:ln>
-            <a:noFill/>
-          </a:ln>
-          <a:effectLst/>
-        </p:spPr>
-        <p:style>
-          <a:lnRef idx="1">
-            <a:schemeClr val="accent1"/>
-          </a:lnRef>
-          <a:fillRef idx="3">
-            <a:schemeClr val="accent1"/>
-          </a:fillRef>
-          <a:effectRef idx="2">
-            <a:schemeClr val="accent1"/>
-          </a:effectRef>
-          <a:fontRef idx="minor">
-            <a:schemeClr val="lt1"/>
-          </a:fontRef>
-        </p:style>
-        <p:txBody>
-          <a:bodyPr rtlCol="0" anchor="ctr"/>
-          <a:lstStyle/>
-          <a:p>
-            <a:pPr algn="ctr"/>
-          </a:p>
-        </p:txBody>
-      </p:sp>
-      <p:sp>
-        <p:nvSpPr>
-          <p:cNvPr id="3" name="Rectangle 2"/>
-          <p:cNvSpPr/>
-          <p:nvPr/>
-        </p:nvSpPr>
-        <p:spPr>
-          <a:xfrm>
-            <a:off x="0" y="0"/>
-            <a:ext cx="12191695" cy="960120"/>
-          </a:xfrm>
-          <a:prstGeom prst="rect">
-            <a:avLst/>
-          </a:prstGeom>
-          <a:solidFill>
-            <a:srgbClr val="003C71"/>
-          </a:solidFill>
-          <a:ln>
-            <a:noFill/>
-          </a:ln>
-          <a:effectLst/>
-        </p:spPr>
-        <p:style>
-          <a:lnRef idx="1">
-            <a:schemeClr val="accent1"/>
-          </a:lnRef>
-          <a:fillRef idx="3">
-            <a:schemeClr val="accent1"/>
-          </a:fillRef>
-          <a:effectRef idx="2">
-            <a:schemeClr val="accent1"/>
-          </a:effectRef>
-          <a:fontRef idx="minor">
-            <a:schemeClr val="lt1"/>
-          </a:fontRef>
-        </p:style>
-        <p:txBody>
-          <a:bodyPr rtlCol="0" anchor="ctr"/>
-          <a:lstStyle/>
-          <a:p>
-            <a:pPr algn="ctr"/>
-          </a:p>
-        </p:txBody>
-      </p:sp>
-      <p:sp>
-        <p:nvSpPr>
-          <p:cNvPr id="4" name="Rectangle 3"/>
-          <p:cNvSpPr/>
-          <p:nvPr/>
-        </p:nvSpPr>
-        <p:spPr>
-          <a:xfrm>
-            <a:off x="0" y="960120"/>
-            <a:ext cx="12191695" cy="54864"/>
-          </a:xfrm>
-          <a:prstGeom prst="rect">
-            <a:avLst/>
-          </a:prstGeom>
-          <a:solidFill>
-            <a:srgbClr val="F2B705"/>
-          </a:solidFill>
-          <a:ln>
-            <a:noFill/>
-          </a:ln>
-          <a:effectLst/>
-        </p:spPr>
-        <p:style>
-          <a:lnRef idx="1">
-            <a:schemeClr val="accent1"/>
-          </a:lnRef>
-          <a:fillRef idx="3">
-            <a:schemeClr val="accent1"/>
-          </a:fillRef>
-          <a:effectRef idx="2">
-            <a:schemeClr val="accent1"/>
-          </a:effectRef>
-          <a:fontRef idx="minor">
-            <a:schemeClr val="lt1"/>
-          </a:fontRef>
-        </p:style>
-        <p:txBody>
-          <a:bodyPr rtlCol="0" anchor="ctr"/>
-          <a:lstStyle/>
-          <a:p>
-            <a:pPr algn="ctr"/>
-          </a:p>
-        </p:txBody>
-      </p:sp>
-      <p:sp>
-        <p:nvSpPr>
-          <p:cNvPr id="5" name="TextBox 4"/>
-          <p:cNvSpPr txBox="1"/>
-          <p:nvPr/>
-        </p:nvSpPr>
-        <p:spPr>
-          <a:xfrm>
-            <a:off x="457200" y="109728"/>
-            <a:ext cx="11247120" cy="777240"/>
-          </a:xfrm>
-          <a:prstGeom prst="rect">
-            <a:avLst/>
-          </a:prstGeom>
-          <a:noFill/>
-        </p:spPr>
-        <p:txBody>
-          <a:bodyPr wrap="square" anchor="ctr">
-            <a:spAutoFit/>
-          </a:bodyPr>
-          <a:lstStyle/>
-          <a:p>
-            <a:r>
-              <a:rPr sz="1300" b="1" i="0">
-                <a:solidFill>
-                  <a:srgbClr val="F2B705"/>
-                </a:solidFill>
-                <a:latin typeface="Malgun Gothic"/>
-                <a:ea typeface="Malgun Gothic"/>
-                <a:cs typeface="Malgun Gothic"/>
-              </a:rPr>
-              <a:t>Q2   </a:t>
-            </a:r>
-            <a:r>
-              <a:rPr sz="2400" b="1" i="0">
-                <a:solidFill>
-                  <a:srgbClr val="FFFFFF"/>
-                </a:solidFill>
-                <a:latin typeface="Malgun Gothic"/>
-                <a:ea typeface="Malgun Gothic"/>
-                <a:cs typeface="Malgun Gothic"/>
-              </a:rPr>
-              <a:t>확인 문항</a:t>
-            </a:r>
-          </a:p>
-        </p:txBody>
-      </p:sp>
-      <p:sp>
-        <p:nvSpPr>
-          <p:cNvPr id="6" name="TextBox 5"/>
-          <p:cNvSpPr txBox="1"/>
-          <p:nvPr/>
-        </p:nvSpPr>
-        <p:spPr>
-          <a:xfrm>
-            <a:off x="457200" y="6446520"/>
-            <a:ext cx="11247120" cy="301752"/>
-          </a:xfrm>
-          <a:prstGeom prst="rect">
-            <a:avLst/>
-          </a:prstGeom>
-          <a:noFill/>
-        </p:spPr>
-        <p:txBody>
-          <a:bodyPr wrap="square" anchor="ctr">
-            <a:spAutoFit/>
-          </a:bodyPr>
-          <a:lstStyle/>
-          <a:p>
-            <a:r>
-              <a:rPr sz="900" b="0" i="0">
-                <a:solidFill>
-                  <a:srgbClr val="66788A"/>
-                </a:solidFill>
-                <a:latin typeface="Malgun Gothic"/>
-                <a:ea typeface="Malgun Gothic"/>
-                <a:cs typeface="Malgun Gothic"/>
-              </a:rPr>
-              <a:t>M01-W02-L02  ·  내분비계 요약: 호르몬과 되먹임</a:t>
-            </a:r>
-            <a:r>
-              <a:rPr sz="900" b="1" i="0">
-                <a:solidFill>
-                  <a:srgbClr val="003C71"/>
-                </a:solidFill>
-                <a:latin typeface="Malgun Gothic"/>
-                <a:ea typeface="Malgun Gothic"/>
-                <a:cs typeface="Malgun Gothic"/>
-              </a:rPr>
-              <a:t>      45</a:t>
-            </a:r>
-          </a:p>
-        </p:txBody>
-      </p:sp>
-      <p:sp>
-        <p:nvSpPr>
-          <p:cNvPr id="7" name="TextBox 6"/>
-          <p:cNvSpPr txBox="1"/>
-          <p:nvPr/>
-        </p:nvSpPr>
-        <p:spPr>
-          <a:xfrm>
-            <a:off x="640080" y="1371600"/>
-            <a:ext cx="10881360" cy="2103120"/>
-          </a:xfrm>
-          <a:prstGeom prst="rect">
-            <a:avLst/>
-          </a:prstGeom>
-          <a:noFill/>
-        </p:spPr>
-        <p:txBody>
-          <a:bodyPr wrap="square" anchor="t">
-            <a:spAutoFit/>
-          </a:bodyPr>
-          <a:lstStyle/>
-          <a:p>
-            <a:r>
-              <a:rPr sz="1900" b="1" i="0">
-                <a:solidFill>
-                  <a:srgbClr val="11202B"/>
-                </a:solidFill>
-                <a:latin typeface="Malgun Gothic"/>
-                <a:ea typeface="Malgun Gothic"/>
-                <a:cs typeface="Malgun Gothic"/>
-              </a:rPr>
-              <a:t>Insulin이 주사제이고 prednisolone이 알약인 이유를 호르몬의 화학 구조와 연결해 설명하시오.</a:t>
-            </a:r>
-          </a:p>
-        </p:txBody>
-      </p:sp>
-      <p:sp>
-        <p:nvSpPr>
-          <p:cNvPr id="8" name="Rectangle 7"/>
-          <p:cNvSpPr/>
-          <p:nvPr/>
-        </p:nvSpPr>
-        <p:spPr>
-          <a:xfrm>
-            <a:off x="640080" y="3657600"/>
-            <a:ext cx="10881360" cy="2606040"/>
-          </a:xfrm>
-          <a:prstGeom prst="rect">
-            <a:avLst/>
-          </a:prstGeom>
-          <a:solidFill>
-            <a:srgbClr val="FFFFFF"/>
-          </a:solidFill>
-          <a:ln>
-            <a:solidFill>
-              <a:srgbClr val="C2CDD6"/>
-            </a:solidFill>
-          </a:ln>
-          <a:effectLst/>
-        </p:spPr>
-        <p:style>
-          <a:lnRef idx="1">
-            <a:schemeClr val="accent1"/>
-          </a:lnRef>
-          <a:fillRef idx="3">
-            <a:schemeClr val="accent1"/>
-          </a:fillRef>
-          <a:effectRef idx="2">
-            <a:schemeClr val="accent1"/>
-          </a:effectRef>
-          <a:fontRef idx="minor">
-            <a:schemeClr val="lt1"/>
-          </a:fontRef>
-        </p:style>
-        <p:txBody>
-          <a:bodyPr rtlCol="0" anchor="ctr" wrap="square" lIns="228600" rIns="228600" tIns="164592"/>
-          <a:lstStyle/>
-          <a:p>
-            <a:pPr algn="l"/>
-            <a:r>
-              <a:rPr sz="1200" b="1" i="0">
-                <a:solidFill>
-                  <a:srgbClr val="003C71"/>
-                </a:solidFill>
-                <a:latin typeface="Malgun Gothic"/>
-                <a:ea typeface="Malgun Gothic"/>
-                <a:cs typeface="Malgun Gothic"/>
-              </a:rPr>
-              <a:t>해설   </a:t>
-            </a:r>
-            <a:r>
-              <a:rPr sz="1500" b="0" i="0">
-                <a:solidFill>
-                  <a:srgbClr val="11202B"/>
-                </a:solidFill>
-                <a:latin typeface="Malgun Gothic"/>
-                <a:ea typeface="Malgun Gothic"/>
-                <a:cs typeface="Malgun Gothic"/>
-              </a:rPr>
-              <a:t>Insulin은 peptide 호르몬이므로 소화관에서 단백질 분해 효소에 분해되어 경구 투여가 불가능하다. Prednisolone은 steroid이므로 지질에 녹아 소화관 상피의 세포막을 통과해 흡수되고, 분해 효소의 표적도 아니므로 경구 투여가 가능하다. 구조가 용해도를 정하고 용해도가 투여 경로를 정한다.</a:t>
-            </a:r>
-          </a:p>
-        </p:txBody>
-      </p:sp>
-    </p:spTree>
-  </p:cSld>
-  <p:clrMapOvr>
-    <a:masterClrMapping/>
-  </p:clrMapOvr>
-</p:sld>
-</file>
-
-<file path=ppt/slides/slide46.xml><?xml version="1.0" encoding="utf-8"?>
-<p:sld xmlns:a="http://schemas.openxmlformats.org/drawingml/2006/main" xmlns:p="http://schemas.openxmlformats.org/presentationml/2006/main" xmlns:r="http://schemas.openxmlformats.org/officeDocument/2006/relationships">
-  <p:cSld>
-    <p:spTree>
-      <p:nvGrpSpPr>
-        <p:cNvPr id="1" name=""/>
-        <p:cNvGrpSpPr/>
-        <p:nvPr/>
-      </p:nvGrpSpPr>
-      <p:grpSpPr/>
-      <p:sp>
-        <p:nvSpPr>
-          <p:cNvPr id="2" name="Rectangle 1"/>
-          <p:cNvSpPr/>
-          <p:nvPr/>
-        </p:nvSpPr>
-        <p:spPr>
-          <a:xfrm>
-            <a:off x="0" y="0"/>
-            <a:ext cx="12191695" cy="6858000"/>
-          </a:xfrm>
-          <a:prstGeom prst="rect">
-            <a:avLst/>
-          </a:prstGeom>
-          <a:solidFill>
-            <a:srgbClr val="F5F8F9"/>
-          </a:solidFill>
-          <a:ln>
-            <a:noFill/>
-          </a:ln>
-          <a:effectLst/>
-        </p:spPr>
-        <p:style>
-          <a:lnRef idx="1">
-            <a:schemeClr val="accent1"/>
-          </a:lnRef>
-          <a:fillRef idx="3">
-            <a:schemeClr val="accent1"/>
-          </a:fillRef>
-          <a:effectRef idx="2">
-            <a:schemeClr val="accent1"/>
-          </a:effectRef>
-          <a:fontRef idx="minor">
-            <a:schemeClr val="lt1"/>
-          </a:fontRef>
-        </p:style>
-        <p:txBody>
-          <a:bodyPr rtlCol="0" anchor="ctr"/>
-          <a:lstStyle/>
-          <a:p>
-            <a:pPr algn="ctr"/>
-          </a:p>
-        </p:txBody>
-      </p:sp>
-      <p:sp>
-        <p:nvSpPr>
-          <p:cNvPr id="3" name="Rectangle 2"/>
-          <p:cNvSpPr/>
-          <p:nvPr/>
-        </p:nvSpPr>
-        <p:spPr>
-          <a:xfrm>
-            <a:off x="0" y="0"/>
-            <a:ext cx="12191695" cy="960120"/>
-          </a:xfrm>
-          <a:prstGeom prst="rect">
-            <a:avLst/>
-          </a:prstGeom>
-          <a:solidFill>
-            <a:srgbClr val="003C71"/>
-          </a:solidFill>
-          <a:ln>
-            <a:noFill/>
-          </a:ln>
-          <a:effectLst/>
-        </p:spPr>
-        <p:style>
-          <a:lnRef idx="1">
-            <a:schemeClr val="accent1"/>
-          </a:lnRef>
-          <a:fillRef idx="3">
-            <a:schemeClr val="accent1"/>
-          </a:fillRef>
-          <a:effectRef idx="2">
-            <a:schemeClr val="accent1"/>
-          </a:effectRef>
-          <a:fontRef idx="minor">
-            <a:schemeClr val="lt1"/>
-          </a:fontRef>
-        </p:style>
-        <p:txBody>
-          <a:bodyPr rtlCol="0" anchor="ctr"/>
-          <a:lstStyle/>
-          <a:p>
-            <a:pPr algn="ctr"/>
-          </a:p>
-        </p:txBody>
-      </p:sp>
-      <p:sp>
-        <p:nvSpPr>
-          <p:cNvPr id="4" name="Rectangle 3"/>
-          <p:cNvSpPr/>
-          <p:nvPr/>
-        </p:nvSpPr>
-        <p:spPr>
-          <a:xfrm>
-            <a:off x="0" y="960120"/>
-            <a:ext cx="12191695" cy="54864"/>
-          </a:xfrm>
-          <a:prstGeom prst="rect">
-            <a:avLst/>
-          </a:prstGeom>
-          <a:solidFill>
-            <a:srgbClr val="F2B705"/>
-          </a:solidFill>
-          <a:ln>
-            <a:noFill/>
-          </a:ln>
-          <a:effectLst/>
-        </p:spPr>
-        <p:style>
-          <a:lnRef idx="1">
-            <a:schemeClr val="accent1"/>
-          </a:lnRef>
-          <a:fillRef idx="3">
-            <a:schemeClr val="accent1"/>
-          </a:fillRef>
-          <a:effectRef idx="2">
-            <a:schemeClr val="accent1"/>
-          </a:effectRef>
-          <a:fontRef idx="minor">
-            <a:schemeClr val="lt1"/>
-          </a:fontRef>
-        </p:style>
-        <p:txBody>
-          <a:bodyPr rtlCol="0" anchor="ctr"/>
-          <a:lstStyle/>
-          <a:p>
-            <a:pPr algn="ctr"/>
-          </a:p>
-        </p:txBody>
-      </p:sp>
-      <p:sp>
-        <p:nvSpPr>
-          <p:cNvPr id="5" name="TextBox 4"/>
-          <p:cNvSpPr txBox="1"/>
-          <p:nvPr/>
-        </p:nvSpPr>
-        <p:spPr>
-          <a:xfrm>
-            <a:off x="457200" y="109728"/>
-            <a:ext cx="11247120" cy="777240"/>
-          </a:xfrm>
-          <a:prstGeom prst="rect">
-            <a:avLst/>
-          </a:prstGeom>
-          <a:noFill/>
-        </p:spPr>
-        <p:txBody>
-          <a:bodyPr wrap="square" anchor="ctr">
-            <a:spAutoFit/>
-          </a:bodyPr>
-          <a:lstStyle/>
-          <a:p>
-            <a:r>
-              <a:rPr sz="1300" b="1" i="0">
-                <a:solidFill>
-                  <a:srgbClr val="F2B705"/>
-                </a:solidFill>
-                <a:latin typeface="Malgun Gothic"/>
-                <a:ea typeface="Malgun Gothic"/>
-                <a:cs typeface="Malgun Gothic"/>
-              </a:rPr>
-              <a:t>Q3   </a:t>
-            </a:r>
-            <a:r>
-              <a:rPr sz="2400" b="1" i="0">
-                <a:solidFill>
-                  <a:srgbClr val="FFFFFF"/>
-                </a:solidFill>
-                <a:latin typeface="Malgun Gothic"/>
-                <a:ea typeface="Malgun Gothic"/>
-                <a:cs typeface="Malgun Gothic"/>
-              </a:rPr>
-              <a:t>확인 문항</a:t>
-            </a:r>
-          </a:p>
-        </p:txBody>
-      </p:sp>
-      <p:sp>
-        <p:nvSpPr>
-          <p:cNvPr id="6" name="TextBox 5"/>
-          <p:cNvSpPr txBox="1"/>
-          <p:nvPr/>
-        </p:nvSpPr>
-        <p:spPr>
-          <a:xfrm>
-            <a:off x="457200" y="6446520"/>
-            <a:ext cx="11247120" cy="301752"/>
-          </a:xfrm>
-          <a:prstGeom prst="rect">
-            <a:avLst/>
-          </a:prstGeom>
-          <a:noFill/>
-        </p:spPr>
-        <p:txBody>
-          <a:bodyPr wrap="square" anchor="ctr">
-            <a:spAutoFit/>
-          </a:bodyPr>
-          <a:lstStyle/>
-          <a:p>
-            <a:r>
-              <a:rPr sz="900" b="0" i="0">
-                <a:solidFill>
-                  <a:srgbClr val="66788A"/>
-                </a:solidFill>
-                <a:latin typeface="Malgun Gothic"/>
-                <a:ea typeface="Malgun Gothic"/>
-                <a:cs typeface="Malgun Gothic"/>
-              </a:rPr>
-              <a:t>M01-W02-L02  ·  내분비계 요약: 호르몬과 되먹임</a:t>
-            </a:r>
-            <a:r>
-              <a:rPr sz="900" b="1" i="0">
-                <a:solidFill>
-                  <a:srgbClr val="003C71"/>
-                </a:solidFill>
-                <a:latin typeface="Malgun Gothic"/>
-                <a:ea typeface="Malgun Gothic"/>
-                <a:cs typeface="Malgun Gothic"/>
-              </a:rPr>
-              <a:t>      46</a:t>
-            </a:r>
-          </a:p>
-        </p:txBody>
-      </p:sp>
-      <p:sp>
-        <p:nvSpPr>
-          <p:cNvPr id="7" name="TextBox 6"/>
-          <p:cNvSpPr txBox="1"/>
-          <p:nvPr/>
-        </p:nvSpPr>
-        <p:spPr>
-          <a:xfrm>
-            <a:off x="640080" y="1371600"/>
-            <a:ext cx="10881360" cy="2103120"/>
-          </a:xfrm>
-          <a:prstGeom prst="rect">
-            <a:avLst/>
-          </a:prstGeom>
-          <a:noFill/>
-        </p:spPr>
-        <p:txBody>
-          <a:bodyPr wrap="square" anchor="t">
-            <a:spAutoFit/>
-          </a:bodyPr>
-          <a:lstStyle/>
-          <a:p>
-            <a:r>
-              <a:rPr sz="1900" b="1" i="0">
-                <a:solidFill>
-                  <a:srgbClr val="11202B"/>
-                </a:solidFill>
-                <a:latin typeface="Malgun Gothic"/>
-                <a:ea typeface="Malgun Gothic"/>
-                <a:cs typeface="Malgun Gothic"/>
-              </a:rPr>
-              <a:t>세포막 수용체 경로에서 일어나는 증폭을 단계별로 설명하고, 그 결과가 무엇을 가능하게 하는지 쓰시오.</a:t>
-            </a:r>
-          </a:p>
-        </p:txBody>
-      </p:sp>
-      <p:sp>
-        <p:nvSpPr>
-          <p:cNvPr id="8" name="Rectangle 7"/>
-          <p:cNvSpPr/>
-          <p:nvPr/>
-        </p:nvSpPr>
-        <p:spPr>
-          <a:xfrm>
-            <a:off x="640080" y="3657600"/>
-            <a:ext cx="10881360" cy="2606040"/>
-          </a:xfrm>
-          <a:prstGeom prst="rect">
-            <a:avLst/>
-          </a:prstGeom>
-          <a:solidFill>
-            <a:srgbClr val="FFFFFF"/>
-          </a:solidFill>
-          <a:ln>
-            <a:solidFill>
-              <a:srgbClr val="C2CDD6"/>
-            </a:solidFill>
-          </a:ln>
-          <a:effectLst/>
-        </p:spPr>
-        <p:style>
-          <a:lnRef idx="1">
-            <a:schemeClr val="accent1"/>
-          </a:lnRef>
-          <a:fillRef idx="3">
-            <a:schemeClr val="accent1"/>
-          </a:fillRef>
-          <a:effectRef idx="2">
-            <a:schemeClr val="accent1"/>
-          </a:effectRef>
-          <a:fontRef idx="minor">
-            <a:schemeClr val="lt1"/>
-          </a:fontRef>
-        </p:style>
-        <p:txBody>
-          <a:bodyPr rtlCol="0" anchor="ctr" wrap="square" lIns="228600" rIns="228600" tIns="164592"/>
-          <a:lstStyle/>
-          <a:p>
-            <a:pPr algn="l"/>
-            <a:r>
-              <a:rPr sz="1200" b="1" i="0">
-                <a:solidFill>
-                  <a:srgbClr val="003C71"/>
-                </a:solidFill>
-                <a:latin typeface="Malgun Gothic"/>
-                <a:ea typeface="Malgun Gothic"/>
-                <a:cs typeface="Malgun Gothic"/>
-              </a:rPr>
-              <a:t>해설   </a:t>
-            </a:r>
-            <a:r>
-              <a:rPr sz="1500" b="0" i="0">
-                <a:solidFill>
-                  <a:srgbClr val="11202B"/>
-                </a:solidFill>
-                <a:latin typeface="Malgun Gothic"/>
-                <a:ea typeface="Malgun Gothic"/>
-                <a:cs typeface="Malgun Gothic"/>
-              </a:rPr>
-              <a:t>호르몬 한 분자가 수용체 하나를 활성화하면 그 수용체가 여러 개의 G 단백질을 활성화하고, 각 adenylyl cyclase가 수백 개의 cAMP를 만들고, 각 protein kinase A가 수많은 기질을 인산화한다. 단계마다 배수가 곱해지므로 10의 마이너스 10 제곱 M 수준의 매우 낮은 호르몬 농도로도 큰 세포 반응을 만들 수 있다.</a:t>
-            </a:r>
-          </a:p>
-        </p:txBody>
-      </p:sp>
-    </p:spTree>
-  </p:cSld>
-  <p:clrMapOvr>
-    <a:masterClrMapping/>
-  </p:clrMapOvr>
-</p:sld>
-</file>
-
-<file path=ppt/slides/slide47.xml><?xml version="1.0" encoding="utf-8"?>
-<p:sld xmlns:a="http://schemas.openxmlformats.org/drawingml/2006/main" xmlns:p="http://schemas.openxmlformats.org/presentationml/2006/main" xmlns:r="http://schemas.openxmlformats.org/officeDocument/2006/relationships">
-  <p:cSld>
-    <p:spTree>
-      <p:nvGrpSpPr>
-        <p:cNvPr id="1" name=""/>
-        <p:cNvGrpSpPr/>
-        <p:nvPr/>
-      </p:nvGrpSpPr>
-      <p:grpSpPr/>
-      <p:sp>
-        <p:nvSpPr>
-          <p:cNvPr id="2" name="Rectangle 1"/>
-          <p:cNvSpPr/>
-          <p:nvPr/>
-        </p:nvSpPr>
-        <p:spPr>
-          <a:xfrm>
-            <a:off x="0" y="0"/>
-            <a:ext cx="12191695" cy="6858000"/>
-          </a:xfrm>
-          <a:prstGeom prst="rect">
-            <a:avLst/>
-          </a:prstGeom>
-          <a:solidFill>
-            <a:srgbClr val="F5F8F9"/>
-          </a:solidFill>
-          <a:ln>
-            <a:noFill/>
-          </a:ln>
-          <a:effectLst/>
-        </p:spPr>
-        <p:style>
-          <a:lnRef idx="1">
-            <a:schemeClr val="accent1"/>
-          </a:lnRef>
-          <a:fillRef idx="3">
-            <a:schemeClr val="accent1"/>
-          </a:fillRef>
-          <a:effectRef idx="2">
-            <a:schemeClr val="accent1"/>
-          </a:effectRef>
-          <a:fontRef idx="minor">
-            <a:schemeClr val="lt1"/>
-          </a:fontRef>
-        </p:style>
-        <p:txBody>
-          <a:bodyPr rtlCol="0" anchor="ctr"/>
-          <a:lstStyle/>
-          <a:p>
-            <a:pPr algn="ctr"/>
-          </a:p>
-        </p:txBody>
-      </p:sp>
-      <p:sp>
-        <p:nvSpPr>
-          <p:cNvPr id="3" name="Rectangle 2"/>
-          <p:cNvSpPr/>
-          <p:nvPr/>
-        </p:nvSpPr>
-        <p:spPr>
-          <a:xfrm>
-            <a:off x="0" y="0"/>
-            <a:ext cx="12191695" cy="960120"/>
-          </a:xfrm>
-          <a:prstGeom prst="rect">
-            <a:avLst/>
-          </a:prstGeom>
-          <a:solidFill>
-            <a:srgbClr val="003C71"/>
-          </a:solidFill>
-          <a:ln>
-            <a:noFill/>
-          </a:ln>
-          <a:effectLst/>
-        </p:spPr>
-        <p:style>
-          <a:lnRef idx="1">
-            <a:schemeClr val="accent1"/>
-          </a:lnRef>
-          <a:fillRef idx="3">
-            <a:schemeClr val="accent1"/>
-          </a:fillRef>
-          <a:effectRef idx="2">
-            <a:schemeClr val="accent1"/>
-          </a:effectRef>
-          <a:fontRef idx="minor">
-            <a:schemeClr val="lt1"/>
-          </a:fontRef>
-        </p:style>
-        <p:txBody>
-          <a:bodyPr rtlCol="0" anchor="ctr"/>
-          <a:lstStyle/>
-          <a:p>
-            <a:pPr algn="ctr"/>
-          </a:p>
-        </p:txBody>
-      </p:sp>
-      <p:sp>
-        <p:nvSpPr>
-          <p:cNvPr id="4" name="Rectangle 3"/>
-          <p:cNvSpPr/>
-          <p:nvPr/>
-        </p:nvSpPr>
-        <p:spPr>
-          <a:xfrm>
-            <a:off x="0" y="960120"/>
-            <a:ext cx="12191695" cy="54864"/>
-          </a:xfrm>
-          <a:prstGeom prst="rect">
-            <a:avLst/>
-          </a:prstGeom>
-          <a:solidFill>
-            <a:srgbClr val="F2B705"/>
-          </a:solidFill>
-          <a:ln>
-            <a:noFill/>
-          </a:ln>
-          <a:effectLst/>
-        </p:spPr>
-        <p:style>
-          <a:lnRef idx="1">
-            <a:schemeClr val="accent1"/>
-          </a:lnRef>
-          <a:fillRef idx="3">
-            <a:schemeClr val="accent1"/>
-          </a:fillRef>
-          <a:effectRef idx="2">
-            <a:schemeClr val="accent1"/>
-          </a:effectRef>
-          <a:fontRef idx="minor">
-            <a:schemeClr val="lt1"/>
-          </a:fontRef>
-        </p:style>
-        <p:txBody>
-          <a:bodyPr rtlCol="0" anchor="ctr"/>
-          <a:lstStyle/>
-          <a:p>
-            <a:pPr algn="ctr"/>
-          </a:p>
-        </p:txBody>
-      </p:sp>
-      <p:sp>
-        <p:nvSpPr>
-          <p:cNvPr id="5" name="TextBox 4"/>
-          <p:cNvSpPr txBox="1"/>
-          <p:nvPr/>
-        </p:nvSpPr>
-        <p:spPr>
-          <a:xfrm>
-            <a:off x="457200" y="109728"/>
-            <a:ext cx="11247120" cy="777240"/>
-          </a:xfrm>
-          <a:prstGeom prst="rect">
-            <a:avLst/>
-          </a:prstGeom>
-          <a:noFill/>
-        </p:spPr>
-        <p:txBody>
-          <a:bodyPr wrap="square" anchor="ctr">
-            <a:spAutoFit/>
-          </a:bodyPr>
-          <a:lstStyle/>
-          <a:p>
-            <a:r>
-              <a:rPr sz="1300" b="1" i="0">
-                <a:solidFill>
-                  <a:srgbClr val="F2B705"/>
-                </a:solidFill>
-                <a:latin typeface="Malgun Gothic"/>
-                <a:ea typeface="Malgun Gothic"/>
-                <a:cs typeface="Malgun Gothic"/>
-              </a:rPr>
-              <a:t>Q4   </a:t>
-            </a:r>
-            <a:r>
-              <a:rPr sz="2400" b="1" i="0">
-                <a:solidFill>
-                  <a:srgbClr val="FFFFFF"/>
-                </a:solidFill>
-                <a:latin typeface="Malgun Gothic"/>
-                <a:ea typeface="Malgun Gothic"/>
-                <a:cs typeface="Malgun Gothic"/>
-              </a:rPr>
-              <a:t>확인 문항</a:t>
-            </a:r>
-          </a:p>
-        </p:txBody>
-      </p:sp>
-      <p:sp>
-        <p:nvSpPr>
-          <p:cNvPr id="6" name="TextBox 5"/>
-          <p:cNvSpPr txBox="1"/>
-          <p:nvPr/>
-        </p:nvSpPr>
-        <p:spPr>
-          <a:xfrm>
-            <a:off x="457200" y="6446520"/>
-            <a:ext cx="11247120" cy="301752"/>
-          </a:xfrm>
-          <a:prstGeom prst="rect">
-            <a:avLst/>
-          </a:prstGeom>
-          <a:noFill/>
-        </p:spPr>
-        <p:txBody>
-          <a:bodyPr wrap="square" anchor="ctr">
-            <a:spAutoFit/>
-          </a:bodyPr>
-          <a:lstStyle/>
-          <a:p>
-            <a:r>
-              <a:rPr sz="900" b="0" i="0">
-                <a:solidFill>
-                  <a:srgbClr val="66788A"/>
-                </a:solidFill>
-                <a:latin typeface="Malgun Gothic"/>
-                <a:ea typeface="Malgun Gothic"/>
-                <a:cs typeface="Malgun Gothic"/>
-              </a:rPr>
-              <a:t>M01-W02-L02  ·  내분비계 요약: 호르몬과 되먹임</a:t>
-            </a:r>
-            <a:r>
-              <a:rPr sz="900" b="1" i="0">
-                <a:solidFill>
-                  <a:srgbClr val="003C71"/>
-                </a:solidFill>
-                <a:latin typeface="Malgun Gothic"/>
-                <a:ea typeface="Malgun Gothic"/>
-                <a:cs typeface="Malgun Gothic"/>
-              </a:rPr>
-              <a:t>      47</a:t>
-            </a:r>
-          </a:p>
-        </p:txBody>
-      </p:sp>
-      <p:sp>
-        <p:nvSpPr>
-          <p:cNvPr id="7" name="TextBox 6"/>
-          <p:cNvSpPr txBox="1"/>
-          <p:nvPr/>
-        </p:nvSpPr>
-        <p:spPr>
-          <a:xfrm>
-            <a:off x="640080" y="1371600"/>
-            <a:ext cx="10881360" cy="2103120"/>
-          </a:xfrm>
-          <a:prstGeom prst="rect">
-            <a:avLst/>
-          </a:prstGeom>
-          <a:noFill/>
-        </p:spPr>
-        <p:txBody>
-          <a:bodyPr wrap="square" anchor="t">
-            <a:spAutoFit/>
-          </a:bodyPr>
-          <a:lstStyle/>
-          <a:p>
-            <a:r>
-              <a:rPr sz="1900" b="1" i="0">
-                <a:solidFill>
-                  <a:srgbClr val="11202B"/>
-                </a:solidFill>
-                <a:latin typeface="Malgun Gothic"/>
-                <a:ea typeface="Malgun Gothic"/>
-                <a:cs typeface="Malgun Gothic"/>
-              </a:rPr>
-              <a:t>시상하부가 방출 호르몬을 전신 혈액이 아니라 특수한 혈관으로 보내는 이점을 설명하시오.</a:t>
-            </a:r>
-          </a:p>
-        </p:txBody>
-      </p:sp>
-      <p:sp>
-        <p:nvSpPr>
-          <p:cNvPr id="8" name="Rectangle 7"/>
-          <p:cNvSpPr/>
-          <p:nvPr/>
-        </p:nvSpPr>
-        <p:spPr>
-          <a:xfrm>
-            <a:off x="640080" y="3657600"/>
-            <a:ext cx="10881360" cy="2606040"/>
-          </a:xfrm>
-          <a:prstGeom prst="rect">
-            <a:avLst/>
-          </a:prstGeom>
-          <a:solidFill>
-            <a:srgbClr val="FFFFFF"/>
-          </a:solidFill>
-          <a:ln>
-            <a:solidFill>
-              <a:srgbClr val="C2CDD6"/>
-            </a:solidFill>
-          </a:ln>
-          <a:effectLst/>
-        </p:spPr>
-        <p:style>
-          <a:lnRef idx="1">
-            <a:schemeClr val="accent1"/>
-          </a:lnRef>
-          <a:fillRef idx="3">
-            <a:schemeClr val="accent1"/>
-          </a:fillRef>
-          <a:effectRef idx="2">
-            <a:schemeClr val="accent1"/>
-          </a:effectRef>
-          <a:fontRef idx="minor">
-            <a:schemeClr val="lt1"/>
-          </a:fontRef>
-        </p:style>
-        <p:txBody>
-          <a:bodyPr rtlCol="0" anchor="ctr" wrap="square" lIns="228600" rIns="228600" tIns="164592"/>
-          <a:lstStyle/>
-          <a:p>
-            <a:pPr algn="l"/>
-            <a:r>
-              <a:rPr sz="1200" b="1" i="0">
-                <a:solidFill>
-                  <a:srgbClr val="003C71"/>
-                </a:solidFill>
-                <a:latin typeface="Malgun Gothic"/>
-                <a:ea typeface="Malgun Gothic"/>
-                <a:cs typeface="Malgun Gothic"/>
-              </a:rPr>
-              <a:t>해설   </a:t>
-            </a:r>
-            <a:r>
-              <a:rPr sz="1500" b="0" i="0">
-                <a:solidFill>
-                  <a:srgbClr val="11202B"/>
-                </a:solidFill>
-                <a:latin typeface="Malgun Gothic"/>
-                <a:ea typeface="Malgun Gothic"/>
-                <a:cs typeface="Malgun Gothic"/>
-              </a:rPr>
-              <a:t>시상하부와 뇌하수체 전엽을 잇는 hypophyseal portal system으로 직접 전달하므로, 적은 양으로도 표적인 전엽에서 충분히 높은 농도를 만들 수 있다. 또한 전신 혈액으로 희석되지 않으므로 다른 기관에 영향을 주지 않는다. 적은 양으로 국소적으로 작용하게 하는 설계다.</a:t>
-            </a:r>
-          </a:p>
-        </p:txBody>
-      </p:sp>
-    </p:spTree>
-  </p:cSld>
-  <p:clrMapOvr>
-    <a:masterClrMapping/>
-  </p:clrMapOvr>
-</p:sld>
-</file>
-
-<file path=ppt/slides/slide48.xml><?xml version="1.0" encoding="utf-8"?>
-<p:sld xmlns:a="http://schemas.openxmlformats.org/drawingml/2006/main" xmlns:p="http://schemas.openxmlformats.org/presentationml/2006/main" xmlns:r="http://schemas.openxmlformats.org/officeDocument/2006/relationships">
-  <p:cSld>
-    <p:spTree>
-      <p:nvGrpSpPr>
-        <p:cNvPr id="1" name=""/>
-        <p:cNvGrpSpPr/>
-        <p:nvPr/>
-      </p:nvGrpSpPr>
-      <p:grpSpPr/>
-      <p:sp>
-        <p:nvSpPr>
-          <p:cNvPr id="2" name="Rectangle 1"/>
-          <p:cNvSpPr/>
-          <p:nvPr/>
-        </p:nvSpPr>
-        <p:spPr>
-          <a:xfrm>
-            <a:off x="0" y="0"/>
-            <a:ext cx="12191695" cy="6858000"/>
-          </a:xfrm>
-          <a:prstGeom prst="rect">
-            <a:avLst/>
-          </a:prstGeom>
-          <a:solidFill>
-            <a:srgbClr val="F5F8F9"/>
-          </a:solidFill>
-          <a:ln>
-            <a:noFill/>
-          </a:ln>
-          <a:effectLst/>
-        </p:spPr>
-        <p:style>
-          <a:lnRef idx="1">
-            <a:schemeClr val="accent1"/>
-          </a:lnRef>
-          <a:fillRef idx="3">
-            <a:schemeClr val="accent1"/>
-          </a:fillRef>
-          <a:effectRef idx="2">
-            <a:schemeClr val="accent1"/>
-          </a:effectRef>
-          <a:fontRef idx="minor">
-            <a:schemeClr val="lt1"/>
-          </a:fontRef>
-        </p:style>
-        <p:txBody>
-          <a:bodyPr rtlCol="0" anchor="ctr"/>
-          <a:lstStyle/>
-          <a:p>
-            <a:pPr algn="ctr"/>
-          </a:p>
-        </p:txBody>
-      </p:sp>
-      <p:sp>
-        <p:nvSpPr>
-          <p:cNvPr id="3" name="Rectangle 2"/>
-          <p:cNvSpPr/>
-          <p:nvPr/>
-        </p:nvSpPr>
-        <p:spPr>
-          <a:xfrm>
-            <a:off x="0" y="0"/>
-            <a:ext cx="12191695" cy="960120"/>
-          </a:xfrm>
-          <a:prstGeom prst="rect">
-            <a:avLst/>
-          </a:prstGeom>
-          <a:solidFill>
-            <a:srgbClr val="003C71"/>
-          </a:solidFill>
-          <a:ln>
-            <a:noFill/>
-          </a:ln>
-          <a:effectLst/>
-        </p:spPr>
-        <p:style>
-          <a:lnRef idx="1">
-            <a:schemeClr val="accent1"/>
-          </a:lnRef>
-          <a:fillRef idx="3">
-            <a:schemeClr val="accent1"/>
-          </a:fillRef>
-          <a:effectRef idx="2">
-            <a:schemeClr val="accent1"/>
-          </a:effectRef>
-          <a:fontRef idx="minor">
-            <a:schemeClr val="lt1"/>
-          </a:fontRef>
-        </p:style>
-        <p:txBody>
-          <a:bodyPr rtlCol="0" anchor="ctr"/>
-          <a:lstStyle/>
-          <a:p>
-            <a:pPr algn="ctr"/>
-          </a:p>
-        </p:txBody>
-      </p:sp>
-      <p:sp>
-        <p:nvSpPr>
-          <p:cNvPr id="4" name="Rectangle 3"/>
-          <p:cNvSpPr/>
-          <p:nvPr/>
-        </p:nvSpPr>
-        <p:spPr>
-          <a:xfrm>
-            <a:off x="0" y="960120"/>
-            <a:ext cx="12191695" cy="54864"/>
-          </a:xfrm>
-          <a:prstGeom prst="rect">
-            <a:avLst/>
-          </a:prstGeom>
-          <a:solidFill>
-            <a:srgbClr val="F2B705"/>
-          </a:solidFill>
-          <a:ln>
-            <a:noFill/>
-          </a:ln>
-          <a:effectLst/>
-        </p:spPr>
-        <p:style>
-          <a:lnRef idx="1">
-            <a:schemeClr val="accent1"/>
-          </a:lnRef>
-          <a:fillRef idx="3">
-            <a:schemeClr val="accent1"/>
-          </a:fillRef>
-          <a:effectRef idx="2">
-            <a:schemeClr val="accent1"/>
-          </a:effectRef>
-          <a:fontRef idx="minor">
-            <a:schemeClr val="lt1"/>
-          </a:fontRef>
-        </p:style>
-        <p:txBody>
-          <a:bodyPr rtlCol="0" anchor="ctr"/>
-          <a:lstStyle/>
-          <a:p>
-            <a:pPr algn="ctr"/>
-          </a:p>
-        </p:txBody>
-      </p:sp>
-      <p:sp>
-        <p:nvSpPr>
-          <p:cNvPr id="5" name="TextBox 4"/>
-          <p:cNvSpPr txBox="1"/>
-          <p:nvPr/>
-        </p:nvSpPr>
-        <p:spPr>
-          <a:xfrm>
-            <a:off x="457200" y="109728"/>
-            <a:ext cx="11247120" cy="777240"/>
-          </a:xfrm>
-          <a:prstGeom prst="rect">
-            <a:avLst/>
-          </a:prstGeom>
-          <a:noFill/>
-        </p:spPr>
-        <p:txBody>
-          <a:bodyPr wrap="square" anchor="ctr">
-            <a:spAutoFit/>
-          </a:bodyPr>
-          <a:lstStyle/>
-          <a:p>
-            <a:r>
-              <a:rPr sz="1300" b="1" i="0">
-                <a:solidFill>
-                  <a:srgbClr val="F2B705"/>
-                </a:solidFill>
-                <a:latin typeface="Malgun Gothic"/>
-                <a:ea typeface="Malgun Gothic"/>
-                <a:cs typeface="Malgun Gothic"/>
-              </a:rPr>
-              <a:t>Q5   </a:t>
-            </a:r>
-            <a:r>
-              <a:rPr sz="2400" b="1" i="0">
-                <a:solidFill>
-                  <a:srgbClr val="FFFFFF"/>
-                </a:solidFill>
-                <a:latin typeface="Malgun Gothic"/>
-                <a:ea typeface="Malgun Gothic"/>
-                <a:cs typeface="Malgun Gothic"/>
-              </a:rPr>
-              <a:t>확인 문항</a:t>
-            </a:r>
-          </a:p>
-        </p:txBody>
-      </p:sp>
-      <p:sp>
-        <p:nvSpPr>
-          <p:cNvPr id="6" name="TextBox 5"/>
-          <p:cNvSpPr txBox="1"/>
-          <p:nvPr/>
-        </p:nvSpPr>
-        <p:spPr>
-          <a:xfrm>
-            <a:off x="457200" y="6446520"/>
-            <a:ext cx="11247120" cy="301752"/>
-          </a:xfrm>
-          <a:prstGeom prst="rect">
-            <a:avLst/>
-          </a:prstGeom>
-          <a:noFill/>
-        </p:spPr>
-        <p:txBody>
-          <a:bodyPr wrap="square" anchor="ctr">
-            <a:spAutoFit/>
-          </a:bodyPr>
-          <a:lstStyle/>
-          <a:p>
-            <a:r>
-              <a:rPr sz="900" b="0" i="0">
-                <a:solidFill>
-                  <a:srgbClr val="66788A"/>
-                </a:solidFill>
-                <a:latin typeface="Malgun Gothic"/>
-                <a:ea typeface="Malgun Gothic"/>
-                <a:cs typeface="Malgun Gothic"/>
-              </a:rPr>
-              <a:t>M01-W02-L02  ·  내분비계 요약: 호르몬과 되먹임</a:t>
-            </a:r>
-            <a:r>
-              <a:rPr sz="900" b="1" i="0">
-                <a:solidFill>
-                  <a:srgbClr val="003C71"/>
-                </a:solidFill>
-                <a:latin typeface="Malgun Gothic"/>
-                <a:ea typeface="Malgun Gothic"/>
-                <a:cs typeface="Malgun Gothic"/>
-              </a:rPr>
-              <a:t>      48</a:t>
-            </a:r>
-          </a:p>
-        </p:txBody>
-      </p:sp>
-      <p:sp>
-        <p:nvSpPr>
-          <p:cNvPr id="7" name="TextBox 6"/>
-          <p:cNvSpPr txBox="1"/>
-          <p:nvPr/>
-        </p:nvSpPr>
-        <p:spPr>
-          <a:xfrm>
-            <a:off x="640080" y="1371600"/>
-            <a:ext cx="10881360" cy="2103120"/>
-          </a:xfrm>
-          <a:prstGeom prst="rect">
-            <a:avLst/>
-          </a:prstGeom>
-          <a:noFill/>
-        </p:spPr>
-        <p:txBody>
-          <a:bodyPr wrap="square" anchor="t">
-            <a:spAutoFit/>
-          </a:bodyPr>
-          <a:lstStyle/>
-          <a:p>
-            <a:r>
-              <a:rPr sz="1900" b="1" i="0">
-                <a:solidFill>
-                  <a:srgbClr val="11202B"/>
-                </a:solidFill>
-                <a:latin typeface="Malgun Gothic"/>
-                <a:ea typeface="Malgun Gothic"/>
-                <a:cs typeface="Malgun Gothic"/>
-              </a:rPr>
-              <a:t>뇌하수체 후엽이 호르몬을 스스로 만들지 못하는 이유를 발생학적 기원으로 설명하고, 이 사실이 두 엽의 호르몬 목록을 구분하는 데 어떻게 도움이 되는지 쓰시오.</a:t>
-            </a:r>
-          </a:p>
-        </p:txBody>
-      </p:sp>
-      <p:sp>
-        <p:nvSpPr>
-          <p:cNvPr id="8" name="Rectangle 7"/>
-          <p:cNvSpPr/>
-          <p:nvPr/>
-        </p:nvSpPr>
-        <p:spPr>
-          <a:xfrm>
-            <a:off x="640080" y="3657600"/>
-            <a:ext cx="10881360" cy="2606040"/>
-          </a:xfrm>
-          <a:prstGeom prst="rect">
-            <a:avLst/>
-          </a:prstGeom>
-          <a:solidFill>
-            <a:srgbClr val="FFFFFF"/>
-          </a:solidFill>
-          <a:ln>
-            <a:solidFill>
-              <a:srgbClr val="C2CDD6"/>
-            </a:solidFill>
-          </a:ln>
-          <a:effectLst/>
-        </p:spPr>
-        <p:style>
-          <a:lnRef idx="1">
-            <a:schemeClr val="accent1"/>
-          </a:lnRef>
-          <a:fillRef idx="3">
-            <a:schemeClr val="accent1"/>
-          </a:fillRef>
-          <a:effectRef idx="2">
-            <a:schemeClr val="accent1"/>
-          </a:effectRef>
-          <a:fontRef idx="minor">
-            <a:schemeClr val="lt1"/>
-          </a:fontRef>
-        </p:style>
-        <p:txBody>
-          <a:bodyPr rtlCol="0" anchor="ctr" wrap="square" lIns="228600" rIns="228600" tIns="164592"/>
-          <a:lstStyle/>
-          <a:p>
-            <a:pPr algn="l"/>
-            <a:r>
-              <a:rPr sz="1200" b="1" i="0">
-                <a:solidFill>
-                  <a:srgbClr val="003C71"/>
-                </a:solidFill>
-                <a:latin typeface="Malgun Gothic"/>
-                <a:ea typeface="Malgun Gothic"/>
-                <a:cs typeface="Malgun Gothic"/>
-              </a:rPr>
-              <a:t>해설   </a:t>
-            </a:r>
-            <a:r>
-              <a:rPr sz="1500" b="0" i="0">
-                <a:solidFill>
-                  <a:srgbClr val="11202B"/>
-                </a:solidFill>
-                <a:latin typeface="Malgun Gothic"/>
-                <a:ea typeface="Malgun Gothic"/>
-                <a:cs typeface="Malgun Gothic"/>
-              </a:rPr>
-              <a:t>후엽은 뇌의 일부가 아래로 자라 내려와 만들어진 신경 조직이므로 분비 상피가 아니다. 시상하부의 신경 세포체에서 만들어진 호르몬이 축삭을 따라 내려와 후엽의 말단에 저장되어 있다가 방출되며, 후엽은 저장과 방출의 장소일 뿐이다. 전엽은 입천장의 상피가 올라와 만들어진 분비 조직이므로 스스로 만든다. 따라서 신경 자극에 의해 즉시 방출되는 ADH와 oxytocin이 후엽, 나머지 여섯 가지 자극 호르몬이 전엽이라는 구분이 자연스럽게 따라온다.</a:t>
-            </a:r>
-          </a:p>
-        </p:txBody>
-      </p:sp>
-    </p:spTree>
-  </p:cSld>
-  <p:clrMapOvr>
-    <a:masterClrMapping/>
-  </p:clrMapOvr>
-</p:sld>
-</file>
-
-<file path=ppt/slides/slide49.xml><?xml version="1.0" encoding="utf-8"?>
-<p:sld xmlns:a="http://schemas.openxmlformats.org/drawingml/2006/main" xmlns:p="http://schemas.openxmlformats.org/presentationml/2006/main" xmlns:r="http://schemas.openxmlformats.org/officeDocument/2006/relationships">
-  <p:cSld>
-    <p:spTree>
-      <p:nvGrpSpPr>
-        <p:cNvPr id="1" name=""/>
-        <p:cNvGrpSpPr/>
-        <p:nvPr/>
-      </p:nvGrpSpPr>
-      <p:grpSpPr/>
-      <p:sp>
-        <p:nvSpPr>
-          <p:cNvPr id="2" name="Rectangle 1"/>
-          <p:cNvSpPr/>
-          <p:nvPr/>
-        </p:nvSpPr>
-        <p:spPr>
-          <a:xfrm>
-            <a:off x="0" y="0"/>
-            <a:ext cx="12191695" cy="6858000"/>
-          </a:xfrm>
-          <a:prstGeom prst="rect">
-            <a:avLst/>
-          </a:prstGeom>
-          <a:solidFill>
-            <a:srgbClr val="F5F8F9"/>
-          </a:solidFill>
-          <a:ln>
-            <a:noFill/>
-          </a:ln>
-          <a:effectLst/>
-        </p:spPr>
-        <p:style>
-          <a:lnRef idx="1">
-            <a:schemeClr val="accent1"/>
-          </a:lnRef>
-          <a:fillRef idx="3">
-            <a:schemeClr val="accent1"/>
-          </a:fillRef>
-          <a:effectRef idx="2">
-            <a:schemeClr val="accent1"/>
-          </a:effectRef>
-          <a:fontRef idx="minor">
-            <a:schemeClr val="lt1"/>
-          </a:fontRef>
-        </p:style>
-        <p:txBody>
-          <a:bodyPr rtlCol="0" anchor="ctr"/>
-          <a:lstStyle/>
-          <a:p>
-            <a:pPr algn="ctr"/>
-          </a:p>
-        </p:txBody>
-      </p:sp>
-      <p:sp>
-        <p:nvSpPr>
-          <p:cNvPr id="3" name="Rectangle 2"/>
-          <p:cNvSpPr/>
-          <p:nvPr/>
-        </p:nvSpPr>
-        <p:spPr>
-          <a:xfrm>
-            <a:off x="0" y="0"/>
-            <a:ext cx="12191695" cy="960120"/>
-          </a:xfrm>
-          <a:prstGeom prst="rect">
-            <a:avLst/>
-          </a:prstGeom>
-          <a:solidFill>
-            <a:srgbClr val="003C71"/>
-          </a:solidFill>
-          <a:ln>
-            <a:noFill/>
-          </a:ln>
-          <a:effectLst/>
-        </p:spPr>
-        <p:style>
-          <a:lnRef idx="1">
-            <a:schemeClr val="accent1"/>
-          </a:lnRef>
-          <a:fillRef idx="3">
-            <a:schemeClr val="accent1"/>
-          </a:fillRef>
-          <a:effectRef idx="2">
-            <a:schemeClr val="accent1"/>
-          </a:effectRef>
-          <a:fontRef idx="minor">
-            <a:schemeClr val="lt1"/>
-          </a:fontRef>
-        </p:style>
-        <p:txBody>
-          <a:bodyPr rtlCol="0" anchor="ctr"/>
-          <a:lstStyle/>
-          <a:p>
-            <a:pPr algn="ctr"/>
-          </a:p>
-        </p:txBody>
-      </p:sp>
-      <p:sp>
-        <p:nvSpPr>
-          <p:cNvPr id="4" name="Rectangle 3"/>
-          <p:cNvSpPr/>
-          <p:nvPr/>
-        </p:nvSpPr>
-        <p:spPr>
-          <a:xfrm>
-            <a:off x="0" y="960120"/>
-            <a:ext cx="12191695" cy="54864"/>
-          </a:xfrm>
-          <a:prstGeom prst="rect">
-            <a:avLst/>
-          </a:prstGeom>
-          <a:solidFill>
-            <a:srgbClr val="F2B705"/>
-          </a:solidFill>
-          <a:ln>
-            <a:noFill/>
-          </a:ln>
-          <a:effectLst/>
-        </p:spPr>
-        <p:style>
-          <a:lnRef idx="1">
-            <a:schemeClr val="accent1"/>
-          </a:lnRef>
-          <a:fillRef idx="3">
-            <a:schemeClr val="accent1"/>
-          </a:fillRef>
-          <a:effectRef idx="2">
-            <a:schemeClr val="accent1"/>
-          </a:effectRef>
-          <a:fontRef idx="minor">
-            <a:schemeClr val="lt1"/>
-          </a:fontRef>
-        </p:style>
-        <p:txBody>
-          <a:bodyPr rtlCol="0" anchor="ctr"/>
-          <a:lstStyle/>
-          <a:p>
-            <a:pPr algn="ctr"/>
-          </a:p>
-        </p:txBody>
-      </p:sp>
-      <p:sp>
-        <p:nvSpPr>
-          <p:cNvPr id="5" name="TextBox 4"/>
-          <p:cNvSpPr txBox="1"/>
-          <p:nvPr/>
-        </p:nvSpPr>
-        <p:spPr>
-          <a:xfrm>
-            <a:off x="457200" y="109728"/>
-            <a:ext cx="11247120" cy="777240"/>
-          </a:xfrm>
-          <a:prstGeom prst="rect">
-            <a:avLst/>
-          </a:prstGeom>
-          <a:noFill/>
-        </p:spPr>
-        <p:txBody>
-          <a:bodyPr wrap="square" anchor="ctr">
-            <a:spAutoFit/>
-          </a:bodyPr>
-          <a:lstStyle/>
-          <a:p>
-            <a:r>
-              <a:rPr sz="1300" b="1" i="0">
-                <a:solidFill>
-                  <a:srgbClr val="F2B705"/>
-                </a:solidFill>
-                <a:latin typeface="Malgun Gothic"/>
-                <a:ea typeface="Malgun Gothic"/>
-                <a:cs typeface="Malgun Gothic"/>
-              </a:rPr>
-              <a:t>Q6   </a:t>
-            </a:r>
-            <a:r>
-              <a:rPr sz="2400" b="1" i="0">
-                <a:solidFill>
-                  <a:srgbClr val="FFFFFF"/>
-                </a:solidFill>
-                <a:latin typeface="Malgun Gothic"/>
-                <a:ea typeface="Malgun Gothic"/>
-                <a:cs typeface="Malgun Gothic"/>
-              </a:rPr>
-              <a:t>확인 문항</a:t>
-            </a:r>
-          </a:p>
-        </p:txBody>
-      </p:sp>
-      <p:sp>
-        <p:nvSpPr>
-          <p:cNvPr id="6" name="TextBox 5"/>
-          <p:cNvSpPr txBox="1"/>
-          <p:nvPr/>
-        </p:nvSpPr>
-        <p:spPr>
-          <a:xfrm>
-            <a:off x="457200" y="6446520"/>
-            <a:ext cx="11247120" cy="301752"/>
-          </a:xfrm>
-          <a:prstGeom prst="rect">
-            <a:avLst/>
-          </a:prstGeom>
-          <a:noFill/>
-        </p:spPr>
-        <p:txBody>
-          <a:bodyPr wrap="square" anchor="ctr">
-            <a:spAutoFit/>
-          </a:bodyPr>
-          <a:lstStyle/>
-          <a:p>
-            <a:r>
-              <a:rPr sz="900" b="0" i="0">
-                <a:solidFill>
-                  <a:srgbClr val="66788A"/>
-                </a:solidFill>
-                <a:latin typeface="Malgun Gothic"/>
-                <a:ea typeface="Malgun Gothic"/>
-                <a:cs typeface="Malgun Gothic"/>
-              </a:rPr>
-              <a:t>M01-W02-L02  ·  내분비계 요약: 호르몬과 되먹임</a:t>
-            </a:r>
-            <a:r>
-              <a:rPr sz="900" b="1" i="0">
-                <a:solidFill>
-                  <a:srgbClr val="003C71"/>
-                </a:solidFill>
-                <a:latin typeface="Malgun Gothic"/>
-                <a:ea typeface="Malgun Gothic"/>
-                <a:cs typeface="Malgun Gothic"/>
-              </a:rPr>
-              <a:t>      49</a:t>
-            </a:r>
-          </a:p>
-        </p:txBody>
-      </p:sp>
-      <p:sp>
-        <p:nvSpPr>
-          <p:cNvPr id="7" name="TextBox 6"/>
-          <p:cNvSpPr txBox="1"/>
-          <p:nvPr/>
-        </p:nvSpPr>
-        <p:spPr>
-          <a:xfrm>
-            <a:off x="640080" y="1371600"/>
-            <a:ext cx="10881360" cy="2103120"/>
-          </a:xfrm>
-          <a:prstGeom prst="rect">
-            <a:avLst/>
-          </a:prstGeom>
-          <a:noFill/>
-        </p:spPr>
-        <p:txBody>
-          <a:bodyPr wrap="square" anchor="t">
-            <a:spAutoFit/>
-          </a:bodyPr>
-          <a:lstStyle/>
-          <a:p>
-            <a:r>
-              <a:rPr sz="1900" b="1" i="0">
-                <a:solidFill>
-                  <a:srgbClr val="11202B"/>
-                </a:solidFill>
-                <a:latin typeface="Malgun Gothic"/>
-                <a:ea typeface="Malgun Gothic"/>
-                <a:cs typeface="Malgun Gothic"/>
-              </a:rPr>
-              <a:t>갑상샘이 주로 T4를 분비하는데 활성 형태는 T3인 구조가 갖는 두 가지 이점을 설명하시오.</a:t>
-            </a:r>
-          </a:p>
-        </p:txBody>
-      </p:sp>
-      <p:sp>
-        <p:nvSpPr>
-          <p:cNvPr id="8" name="Rectangle 7"/>
-          <p:cNvSpPr/>
-          <p:nvPr/>
-        </p:nvSpPr>
-        <p:spPr>
-          <a:xfrm>
-            <a:off x="640080" y="3657600"/>
-            <a:ext cx="10881360" cy="2606040"/>
-          </a:xfrm>
-          <a:prstGeom prst="rect">
-            <a:avLst/>
-          </a:prstGeom>
-          <a:solidFill>
-            <a:srgbClr val="FFFFFF"/>
-          </a:solidFill>
-          <a:ln>
-            <a:solidFill>
-              <a:srgbClr val="C2CDD6"/>
-            </a:solidFill>
-          </a:ln>
-          <a:effectLst/>
-        </p:spPr>
-        <p:style>
-          <a:lnRef idx="1">
-            <a:schemeClr val="accent1"/>
-          </a:lnRef>
-          <a:fillRef idx="3">
-            <a:schemeClr val="accent1"/>
-          </a:fillRef>
-          <a:effectRef idx="2">
-            <a:schemeClr val="accent1"/>
-          </a:effectRef>
-          <a:fontRef idx="minor">
-            <a:schemeClr val="lt1"/>
-          </a:fontRef>
-        </p:style>
-        <p:txBody>
-          <a:bodyPr rtlCol="0" anchor="ctr" wrap="square" lIns="228600" rIns="228600" tIns="164592"/>
-          <a:lstStyle/>
-          <a:p>
-            <a:pPr algn="l"/>
-            <a:r>
-              <a:rPr sz="1200" b="1" i="0">
-                <a:solidFill>
-                  <a:srgbClr val="003C71"/>
-                </a:solidFill>
-                <a:latin typeface="Malgun Gothic"/>
-                <a:ea typeface="Malgun Gothic"/>
-                <a:cs typeface="Malgun Gothic"/>
-              </a:rPr>
-              <a:t>해설   </a:t>
-            </a:r>
-            <a:r>
-              <a:rPr sz="1500" b="0" i="0">
-                <a:solidFill>
-                  <a:srgbClr val="11202B"/>
-                </a:solidFill>
-                <a:latin typeface="Malgun Gothic"/>
-                <a:ea typeface="Malgun Gothic"/>
-                <a:cs typeface="Malgun Gothic"/>
-              </a:rPr>
-              <a:t>첫째, T4의 반감기가 약 7일로 길어 혈중 농도가 안정하게 유지된다. 운반 단백질에 결합한 저장 겸 전구체 형태로 순환하는 것이다. 둘째, 각 조직이 자신의 deiodinase 활성을 조절해 필요한 만큼만 T3로 바꿀 수 있으므로, 전신의 호르몬 농도와 별개로 조직 수준의 미세 조절이 가능하다.</a:t>
-            </a:r>
-          </a:p>
         </p:txBody>
       </p:sp>
     </p:spTree>
@@ -25405,1143 +18399,6 @@
                 <a:cs typeface="Malgun Gothic"/>
               </a:rPr>
               <a:t>은 호르몬을 혈액에 풀어 그 수용체를 가진 모든 세포에 작용한다. 네 기준으로 비교하면 차이가 분명해진다.</a:t>
-            </a:r>
-          </a:p>
-        </p:txBody>
-      </p:sp>
-    </p:spTree>
-  </p:cSld>
-  <p:clrMapOvr>
-    <a:masterClrMapping/>
-  </p:clrMapOvr>
-</p:sld>
-</file>
-
-<file path=ppt/slides/slide50.xml><?xml version="1.0" encoding="utf-8"?>
-<p:sld xmlns:a="http://schemas.openxmlformats.org/drawingml/2006/main" xmlns:p="http://schemas.openxmlformats.org/presentationml/2006/main" xmlns:r="http://schemas.openxmlformats.org/officeDocument/2006/relationships">
-  <p:cSld>
-    <p:spTree>
-      <p:nvGrpSpPr>
-        <p:cNvPr id="1" name=""/>
-        <p:cNvGrpSpPr/>
-        <p:nvPr/>
-      </p:nvGrpSpPr>
-      <p:grpSpPr/>
-      <p:sp>
-        <p:nvSpPr>
-          <p:cNvPr id="2" name="Rectangle 1"/>
-          <p:cNvSpPr/>
-          <p:nvPr/>
-        </p:nvSpPr>
-        <p:spPr>
-          <a:xfrm>
-            <a:off x="0" y="0"/>
-            <a:ext cx="12191695" cy="6858000"/>
-          </a:xfrm>
-          <a:prstGeom prst="rect">
-            <a:avLst/>
-          </a:prstGeom>
-          <a:solidFill>
-            <a:srgbClr val="F5F8F9"/>
-          </a:solidFill>
-          <a:ln>
-            <a:noFill/>
-          </a:ln>
-          <a:effectLst/>
-        </p:spPr>
-        <p:style>
-          <a:lnRef idx="1">
-            <a:schemeClr val="accent1"/>
-          </a:lnRef>
-          <a:fillRef idx="3">
-            <a:schemeClr val="accent1"/>
-          </a:fillRef>
-          <a:effectRef idx="2">
-            <a:schemeClr val="accent1"/>
-          </a:effectRef>
-          <a:fontRef idx="minor">
-            <a:schemeClr val="lt1"/>
-          </a:fontRef>
-        </p:style>
-        <p:txBody>
-          <a:bodyPr rtlCol="0" anchor="ctr"/>
-          <a:lstStyle/>
-          <a:p>
-            <a:pPr algn="ctr"/>
-          </a:p>
-        </p:txBody>
-      </p:sp>
-      <p:sp>
-        <p:nvSpPr>
-          <p:cNvPr id="3" name="Rectangle 2"/>
-          <p:cNvSpPr/>
-          <p:nvPr/>
-        </p:nvSpPr>
-        <p:spPr>
-          <a:xfrm>
-            <a:off x="0" y="0"/>
-            <a:ext cx="12191695" cy="960120"/>
-          </a:xfrm>
-          <a:prstGeom prst="rect">
-            <a:avLst/>
-          </a:prstGeom>
-          <a:solidFill>
-            <a:srgbClr val="003C71"/>
-          </a:solidFill>
-          <a:ln>
-            <a:noFill/>
-          </a:ln>
-          <a:effectLst/>
-        </p:spPr>
-        <p:style>
-          <a:lnRef idx="1">
-            <a:schemeClr val="accent1"/>
-          </a:lnRef>
-          <a:fillRef idx="3">
-            <a:schemeClr val="accent1"/>
-          </a:fillRef>
-          <a:effectRef idx="2">
-            <a:schemeClr val="accent1"/>
-          </a:effectRef>
-          <a:fontRef idx="minor">
-            <a:schemeClr val="lt1"/>
-          </a:fontRef>
-        </p:style>
-        <p:txBody>
-          <a:bodyPr rtlCol="0" anchor="ctr"/>
-          <a:lstStyle/>
-          <a:p>
-            <a:pPr algn="ctr"/>
-          </a:p>
-        </p:txBody>
-      </p:sp>
-      <p:sp>
-        <p:nvSpPr>
-          <p:cNvPr id="4" name="Rectangle 3"/>
-          <p:cNvSpPr/>
-          <p:nvPr/>
-        </p:nvSpPr>
-        <p:spPr>
-          <a:xfrm>
-            <a:off x="0" y="960120"/>
-            <a:ext cx="12191695" cy="54864"/>
-          </a:xfrm>
-          <a:prstGeom prst="rect">
-            <a:avLst/>
-          </a:prstGeom>
-          <a:solidFill>
-            <a:srgbClr val="F2B705"/>
-          </a:solidFill>
-          <a:ln>
-            <a:noFill/>
-          </a:ln>
-          <a:effectLst/>
-        </p:spPr>
-        <p:style>
-          <a:lnRef idx="1">
-            <a:schemeClr val="accent1"/>
-          </a:lnRef>
-          <a:fillRef idx="3">
-            <a:schemeClr val="accent1"/>
-          </a:fillRef>
-          <a:effectRef idx="2">
-            <a:schemeClr val="accent1"/>
-          </a:effectRef>
-          <a:fontRef idx="minor">
-            <a:schemeClr val="lt1"/>
-          </a:fontRef>
-        </p:style>
-        <p:txBody>
-          <a:bodyPr rtlCol="0" anchor="ctr"/>
-          <a:lstStyle/>
-          <a:p>
-            <a:pPr algn="ctr"/>
-          </a:p>
-        </p:txBody>
-      </p:sp>
-      <p:sp>
-        <p:nvSpPr>
-          <p:cNvPr id="5" name="TextBox 4"/>
-          <p:cNvSpPr txBox="1"/>
-          <p:nvPr/>
-        </p:nvSpPr>
-        <p:spPr>
-          <a:xfrm>
-            <a:off x="457200" y="109728"/>
-            <a:ext cx="11247120" cy="777240"/>
-          </a:xfrm>
-          <a:prstGeom prst="rect">
-            <a:avLst/>
-          </a:prstGeom>
-          <a:noFill/>
-        </p:spPr>
-        <p:txBody>
-          <a:bodyPr wrap="square" anchor="ctr">
-            <a:spAutoFit/>
-          </a:bodyPr>
-          <a:lstStyle/>
-          <a:p>
-            <a:r>
-              <a:rPr sz="1300" b="1" i="0">
-                <a:solidFill>
-                  <a:srgbClr val="F2B705"/>
-                </a:solidFill>
-                <a:latin typeface="Malgun Gothic"/>
-                <a:ea typeface="Malgun Gothic"/>
-                <a:cs typeface="Malgun Gothic"/>
-              </a:rPr>
-              <a:t>Q7   </a:t>
-            </a:r>
-            <a:r>
-              <a:rPr sz="2400" b="1" i="0">
-                <a:solidFill>
-                  <a:srgbClr val="FFFFFF"/>
-                </a:solidFill>
-                <a:latin typeface="Malgun Gothic"/>
-                <a:ea typeface="Malgun Gothic"/>
-                <a:cs typeface="Malgun Gothic"/>
-              </a:rPr>
-              <a:t>확인 문항</a:t>
-            </a:r>
-          </a:p>
-        </p:txBody>
-      </p:sp>
-      <p:sp>
-        <p:nvSpPr>
-          <p:cNvPr id="6" name="TextBox 5"/>
-          <p:cNvSpPr txBox="1"/>
-          <p:nvPr/>
-        </p:nvSpPr>
-        <p:spPr>
-          <a:xfrm>
-            <a:off x="457200" y="6446520"/>
-            <a:ext cx="11247120" cy="301752"/>
-          </a:xfrm>
-          <a:prstGeom prst="rect">
-            <a:avLst/>
-          </a:prstGeom>
-          <a:noFill/>
-        </p:spPr>
-        <p:txBody>
-          <a:bodyPr wrap="square" anchor="ctr">
-            <a:spAutoFit/>
-          </a:bodyPr>
-          <a:lstStyle/>
-          <a:p>
-            <a:r>
-              <a:rPr sz="900" b="0" i="0">
-                <a:solidFill>
-                  <a:srgbClr val="66788A"/>
-                </a:solidFill>
-                <a:latin typeface="Malgun Gothic"/>
-                <a:ea typeface="Malgun Gothic"/>
-                <a:cs typeface="Malgun Gothic"/>
-              </a:rPr>
-              <a:t>M01-W02-L02  ·  내분비계 요약: 호르몬과 되먹임</a:t>
-            </a:r>
-            <a:r>
-              <a:rPr sz="900" b="1" i="0">
-                <a:solidFill>
-                  <a:srgbClr val="003C71"/>
-                </a:solidFill>
-                <a:latin typeface="Malgun Gothic"/>
-                <a:ea typeface="Malgun Gothic"/>
-                <a:cs typeface="Malgun Gothic"/>
-              </a:rPr>
-              <a:t>      50</a:t>
-            </a:r>
-          </a:p>
-        </p:txBody>
-      </p:sp>
-      <p:sp>
-        <p:nvSpPr>
-          <p:cNvPr id="7" name="TextBox 6"/>
-          <p:cNvSpPr txBox="1"/>
-          <p:nvPr/>
-        </p:nvSpPr>
-        <p:spPr>
-          <a:xfrm>
-            <a:off x="640080" y="1371600"/>
-            <a:ext cx="10881360" cy="2103120"/>
-          </a:xfrm>
-          <a:prstGeom prst="rect">
-            <a:avLst/>
-          </a:prstGeom>
-          <a:noFill/>
-        </p:spPr>
-        <p:txBody>
-          <a:bodyPr wrap="square" anchor="t">
-            <a:spAutoFit/>
-          </a:bodyPr>
-          <a:lstStyle/>
-          <a:p>
-            <a:r>
-              <a:rPr sz="1900" b="1" i="0">
-                <a:solidFill>
-                  <a:srgbClr val="11202B"/>
-                </a:solidFill>
-                <a:latin typeface="Malgun Gothic"/>
-                <a:ea typeface="Malgun Gothic"/>
-                <a:cs typeface="Malgun Gothic"/>
-              </a:rPr>
-              <a:t>Glucocorticoid를 오래 투여한 환자에서 약을 갑자기 끊으면 위험한 이유를 음성 되먹임으로 설명하시오.</a:t>
-            </a:r>
-          </a:p>
-        </p:txBody>
-      </p:sp>
-      <p:sp>
-        <p:nvSpPr>
-          <p:cNvPr id="8" name="Rectangle 7"/>
-          <p:cNvSpPr/>
-          <p:nvPr/>
-        </p:nvSpPr>
-        <p:spPr>
-          <a:xfrm>
-            <a:off x="640080" y="3657600"/>
-            <a:ext cx="10881360" cy="2606040"/>
-          </a:xfrm>
-          <a:prstGeom prst="rect">
-            <a:avLst/>
-          </a:prstGeom>
-          <a:solidFill>
-            <a:srgbClr val="FFFFFF"/>
-          </a:solidFill>
-          <a:ln>
-            <a:solidFill>
-              <a:srgbClr val="C2CDD6"/>
-            </a:solidFill>
-          </a:ln>
-          <a:effectLst/>
-        </p:spPr>
-        <p:style>
-          <a:lnRef idx="1">
-            <a:schemeClr val="accent1"/>
-          </a:lnRef>
-          <a:fillRef idx="3">
-            <a:schemeClr val="accent1"/>
-          </a:fillRef>
-          <a:effectRef idx="2">
-            <a:schemeClr val="accent1"/>
-          </a:effectRef>
-          <a:fontRef idx="minor">
-            <a:schemeClr val="lt1"/>
-          </a:fontRef>
-        </p:style>
-        <p:txBody>
-          <a:bodyPr rtlCol="0" anchor="ctr" wrap="square" lIns="228600" rIns="228600" tIns="164592"/>
-          <a:lstStyle/>
-          <a:p>
-            <a:pPr algn="l"/>
-            <a:r>
-              <a:rPr sz="1200" b="1" i="0">
-                <a:solidFill>
-                  <a:srgbClr val="003C71"/>
-                </a:solidFill>
-                <a:latin typeface="Malgun Gothic"/>
-                <a:ea typeface="Malgun Gothic"/>
-                <a:cs typeface="Malgun Gothic"/>
-              </a:rPr>
-              <a:t>해설   </a:t>
-            </a:r>
-            <a:r>
-              <a:rPr sz="1500" b="0" i="0">
-                <a:solidFill>
-                  <a:srgbClr val="11202B"/>
-                </a:solidFill>
-                <a:latin typeface="Malgun Gothic"/>
-                <a:ea typeface="Malgun Gothic"/>
-                <a:cs typeface="Malgun Gothic"/>
-              </a:rPr>
-              <a:t>외부에서 들어온 glucocorticoid가 시상하부와 뇌하수체에 음성 되먹임으로 작용해 CRH와 ACTH 분비를 억제하고, 자극을 받지 못한 부신 겉질이 위축된다. 이 상태에서 약을 갑자기 끊으면 외부 공급도 없고 내부 생산도 되지 않아 cortisol이 급격히 부족해져 저혈압과 쇼크에 이를 수 있다. 따라서 축이 회복될 시간을 주기 위해 서서히 줄여야 한다.</a:t>
-            </a:r>
-          </a:p>
-        </p:txBody>
-      </p:sp>
-    </p:spTree>
-  </p:cSld>
-  <p:clrMapOvr>
-    <a:masterClrMapping/>
-  </p:clrMapOvr>
-</p:sld>
-</file>
-
-<file path=ppt/slides/slide51.xml><?xml version="1.0" encoding="utf-8"?>
-<p:sld xmlns:a="http://schemas.openxmlformats.org/drawingml/2006/main" xmlns:p="http://schemas.openxmlformats.org/presentationml/2006/main" xmlns:r="http://schemas.openxmlformats.org/officeDocument/2006/relationships">
-  <p:cSld>
-    <p:spTree>
-      <p:nvGrpSpPr>
-        <p:cNvPr id="1" name=""/>
-        <p:cNvGrpSpPr/>
-        <p:nvPr/>
-      </p:nvGrpSpPr>
-      <p:grpSpPr/>
-      <p:sp>
-        <p:nvSpPr>
-          <p:cNvPr id="2" name="Rectangle 1"/>
-          <p:cNvSpPr/>
-          <p:nvPr/>
-        </p:nvSpPr>
-        <p:spPr>
-          <a:xfrm>
-            <a:off x="0" y="0"/>
-            <a:ext cx="12191695" cy="6858000"/>
-          </a:xfrm>
-          <a:prstGeom prst="rect">
-            <a:avLst/>
-          </a:prstGeom>
-          <a:solidFill>
-            <a:srgbClr val="F5F8F9"/>
-          </a:solidFill>
-          <a:ln>
-            <a:noFill/>
-          </a:ln>
-          <a:effectLst/>
-        </p:spPr>
-        <p:style>
-          <a:lnRef idx="1">
-            <a:schemeClr val="accent1"/>
-          </a:lnRef>
-          <a:fillRef idx="3">
-            <a:schemeClr val="accent1"/>
-          </a:fillRef>
-          <a:effectRef idx="2">
-            <a:schemeClr val="accent1"/>
-          </a:effectRef>
-          <a:fontRef idx="minor">
-            <a:schemeClr val="lt1"/>
-          </a:fontRef>
-        </p:style>
-        <p:txBody>
-          <a:bodyPr rtlCol="0" anchor="ctr"/>
-          <a:lstStyle/>
-          <a:p>
-            <a:pPr algn="ctr"/>
-          </a:p>
-        </p:txBody>
-      </p:sp>
-      <p:sp>
-        <p:nvSpPr>
-          <p:cNvPr id="3" name="Rectangle 2"/>
-          <p:cNvSpPr/>
-          <p:nvPr/>
-        </p:nvSpPr>
-        <p:spPr>
-          <a:xfrm>
-            <a:off x="0" y="0"/>
-            <a:ext cx="12191695" cy="960120"/>
-          </a:xfrm>
-          <a:prstGeom prst="rect">
-            <a:avLst/>
-          </a:prstGeom>
-          <a:solidFill>
-            <a:srgbClr val="003C71"/>
-          </a:solidFill>
-          <a:ln>
-            <a:noFill/>
-          </a:ln>
-          <a:effectLst/>
-        </p:spPr>
-        <p:style>
-          <a:lnRef idx="1">
-            <a:schemeClr val="accent1"/>
-          </a:lnRef>
-          <a:fillRef idx="3">
-            <a:schemeClr val="accent1"/>
-          </a:fillRef>
-          <a:effectRef idx="2">
-            <a:schemeClr val="accent1"/>
-          </a:effectRef>
-          <a:fontRef idx="minor">
-            <a:schemeClr val="lt1"/>
-          </a:fontRef>
-        </p:style>
-        <p:txBody>
-          <a:bodyPr rtlCol="0" anchor="ctr"/>
-          <a:lstStyle/>
-          <a:p>
-            <a:pPr algn="ctr"/>
-          </a:p>
-        </p:txBody>
-      </p:sp>
-      <p:sp>
-        <p:nvSpPr>
-          <p:cNvPr id="4" name="Rectangle 3"/>
-          <p:cNvSpPr/>
-          <p:nvPr/>
-        </p:nvSpPr>
-        <p:spPr>
-          <a:xfrm>
-            <a:off x="0" y="960120"/>
-            <a:ext cx="12191695" cy="54864"/>
-          </a:xfrm>
-          <a:prstGeom prst="rect">
-            <a:avLst/>
-          </a:prstGeom>
-          <a:solidFill>
-            <a:srgbClr val="F2B705"/>
-          </a:solidFill>
-          <a:ln>
-            <a:noFill/>
-          </a:ln>
-          <a:effectLst/>
-        </p:spPr>
-        <p:style>
-          <a:lnRef idx="1">
-            <a:schemeClr val="accent1"/>
-          </a:lnRef>
-          <a:fillRef idx="3">
-            <a:schemeClr val="accent1"/>
-          </a:fillRef>
-          <a:effectRef idx="2">
-            <a:schemeClr val="accent1"/>
-          </a:effectRef>
-          <a:fontRef idx="minor">
-            <a:schemeClr val="lt1"/>
-          </a:fontRef>
-        </p:style>
-        <p:txBody>
-          <a:bodyPr rtlCol="0" anchor="ctr"/>
-          <a:lstStyle/>
-          <a:p>
-            <a:pPr algn="ctr"/>
-          </a:p>
-        </p:txBody>
-      </p:sp>
-      <p:sp>
-        <p:nvSpPr>
-          <p:cNvPr id="5" name="TextBox 4"/>
-          <p:cNvSpPr txBox="1"/>
-          <p:nvPr/>
-        </p:nvSpPr>
-        <p:spPr>
-          <a:xfrm>
-            <a:off x="457200" y="109728"/>
-            <a:ext cx="11247120" cy="777240"/>
-          </a:xfrm>
-          <a:prstGeom prst="rect">
-            <a:avLst/>
-          </a:prstGeom>
-          <a:noFill/>
-        </p:spPr>
-        <p:txBody>
-          <a:bodyPr wrap="square" anchor="ctr">
-            <a:spAutoFit/>
-          </a:bodyPr>
-          <a:lstStyle/>
-          <a:p>
-            <a:r>
-              <a:rPr sz="1300" b="1" i="0">
-                <a:solidFill>
-                  <a:srgbClr val="F2B705"/>
-                </a:solidFill>
-                <a:latin typeface="Malgun Gothic"/>
-                <a:ea typeface="Malgun Gothic"/>
-                <a:cs typeface="Malgun Gothic"/>
-              </a:rPr>
-              <a:t>Q8   </a:t>
-            </a:r>
-            <a:r>
-              <a:rPr sz="2400" b="1" i="0">
-                <a:solidFill>
-                  <a:srgbClr val="FFFFFF"/>
-                </a:solidFill>
-                <a:latin typeface="Malgun Gothic"/>
-                <a:ea typeface="Malgun Gothic"/>
-                <a:cs typeface="Malgun Gothic"/>
-              </a:rPr>
-              <a:t>확인 문항</a:t>
-            </a:r>
-          </a:p>
-        </p:txBody>
-      </p:sp>
-      <p:sp>
-        <p:nvSpPr>
-          <p:cNvPr id="6" name="TextBox 5"/>
-          <p:cNvSpPr txBox="1"/>
-          <p:nvPr/>
-        </p:nvSpPr>
-        <p:spPr>
-          <a:xfrm>
-            <a:off x="457200" y="6446520"/>
-            <a:ext cx="11247120" cy="301752"/>
-          </a:xfrm>
-          <a:prstGeom prst="rect">
-            <a:avLst/>
-          </a:prstGeom>
-          <a:noFill/>
-        </p:spPr>
-        <p:txBody>
-          <a:bodyPr wrap="square" anchor="ctr">
-            <a:spAutoFit/>
-          </a:bodyPr>
-          <a:lstStyle/>
-          <a:p>
-            <a:r>
-              <a:rPr sz="900" b="0" i="0">
-                <a:solidFill>
-                  <a:srgbClr val="66788A"/>
-                </a:solidFill>
-                <a:latin typeface="Malgun Gothic"/>
-                <a:ea typeface="Malgun Gothic"/>
-                <a:cs typeface="Malgun Gothic"/>
-              </a:rPr>
-              <a:t>M01-W02-L02  ·  내분비계 요약: 호르몬과 되먹임</a:t>
-            </a:r>
-            <a:r>
-              <a:rPr sz="900" b="1" i="0">
-                <a:solidFill>
-                  <a:srgbClr val="003C71"/>
-                </a:solidFill>
-                <a:latin typeface="Malgun Gothic"/>
-                <a:ea typeface="Malgun Gothic"/>
-                <a:cs typeface="Malgun Gothic"/>
-              </a:rPr>
-              <a:t>      51</a:t>
-            </a:r>
-          </a:p>
-        </p:txBody>
-      </p:sp>
-      <p:sp>
-        <p:nvSpPr>
-          <p:cNvPr id="7" name="TextBox 6"/>
-          <p:cNvSpPr txBox="1"/>
-          <p:nvPr/>
-        </p:nvSpPr>
-        <p:spPr>
-          <a:xfrm>
-            <a:off x="640080" y="1371600"/>
-            <a:ext cx="10881360" cy="2103120"/>
-          </a:xfrm>
-          <a:prstGeom prst="rect">
-            <a:avLst/>
-          </a:prstGeom>
-          <a:noFill/>
-        </p:spPr>
-        <p:txBody>
-          <a:bodyPr wrap="square" anchor="t">
-            <a:spAutoFit/>
-          </a:bodyPr>
-          <a:lstStyle/>
-          <a:p>
-            <a:r>
-              <a:rPr sz="1900" b="1" i="0">
-                <a:solidFill>
-                  <a:srgbClr val="11202B"/>
-                </a:solidFill>
-                <a:latin typeface="Malgun Gothic"/>
-                <a:ea typeface="Malgun Gothic"/>
-                <a:cs typeface="Malgun Gothic"/>
-              </a:rPr>
-              <a:t>혈당을 올리는 호르몬은 여럿인데 내리는 호르몬은 insulin 하나뿐인 비대칭을 생존 조건으로 설명하시오.</a:t>
-            </a:r>
-          </a:p>
-        </p:txBody>
-      </p:sp>
-      <p:sp>
-        <p:nvSpPr>
-          <p:cNvPr id="8" name="Rectangle 7"/>
-          <p:cNvSpPr/>
-          <p:nvPr/>
-        </p:nvSpPr>
-        <p:spPr>
-          <a:xfrm>
-            <a:off x="640080" y="3657600"/>
-            <a:ext cx="10881360" cy="2606040"/>
-          </a:xfrm>
-          <a:prstGeom prst="rect">
-            <a:avLst/>
-          </a:prstGeom>
-          <a:solidFill>
-            <a:srgbClr val="FFFFFF"/>
-          </a:solidFill>
-          <a:ln>
-            <a:solidFill>
-              <a:srgbClr val="C2CDD6"/>
-            </a:solidFill>
-          </a:ln>
-          <a:effectLst/>
-        </p:spPr>
-        <p:style>
-          <a:lnRef idx="1">
-            <a:schemeClr val="accent1"/>
-          </a:lnRef>
-          <a:fillRef idx="3">
-            <a:schemeClr val="accent1"/>
-          </a:fillRef>
-          <a:effectRef idx="2">
-            <a:schemeClr val="accent1"/>
-          </a:effectRef>
-          <a:fontRef idx="minor">
-            <a:schemeClr val="lt1"/>
-          </a:fontRef>
-        </p:style>
-        <p:txBody>
-          <a:bodyPr rtlCol="0" anchor="ctr" wrap="square" lIns="228600" rIns="228600" tIns="164592"/>
-          <a:lstStyle/>
-          <a:p>
-            <a:pPr algn="l"/>
-            <a:r>
-              <a:rPr sz="1200" b="1" i="0">
-                <a:solidFill>
-                  <a:srgbClr val="003C71"/>
-                </a:solidFill>
-                <a:latin typeface="Malgun Gothic"/>
-                <a:ea typeface="Malgun Gothic"/>
-                <a:cs typeface="Malgun Gothic"/>
-              </a:rPr>
-              <a:t>해설   </a:t>
-            </a:r>
-            <a:r>
-              <a:rPr sz="1500" b="0" i="0">
-                <a:solidFill>
-                  <a:srgbClr val="11202B"/>
-                </a:solidFill>
-                <a:latin typeface="Malgun Gothic"/>
-                <a:ea typeface="Malgun Gothic"/>
-                <a:cs typeface="Malgun Gothic"/>
-              </a:rPr>
-              <a:t>저혈당은 수 분 안에 뇌의 에너지 공급을 끊어 의식을 잃게 하고 생명을 위협하므로, glucagon·epinephrine·cortisol·growth hormone의 여러 겹 방어가 필요하다. 고혈당은 급성으로는 그만큼 위험하지 않고 장기간에 걸쳐 손상을 일으키므로, 하나의 호르몬으로 조절해도 생존에 지장이 없었다.</a:t>
-            </a:r>
-          </a:p>
-        </p:txBody>
-      </p:sp>
-    </p:spTree>
-  </p:cSld>
-  <p:clrMapOvr>
-    <a:masterClrMapping/>
-  </p:clrMapOvr>
-</p:sld>
-</file>
-
-<file path=ppt/slides/slide52.xml><?xml version="1.0" encoding="utf-8"?>
-<p:sld xmlns:a="http://schemas.openxmlformats.org/drawingml/2006/main" xmlns:p="http://schemas.openxmlformats.org/presentationml/2006/main" xmlns:r="http://schemas.openxmlformats.org/officeDocument/2006/relationships">
-  <p:cSld>
-    <p:spTree>
-      <p:nvGrpSpPr>
-        <p:cNvPr id="1" name=""/>
-        <p:cNvGrpSpPr/>
-        <p:nvPr/>
-      </p:nvGrpSpPr>
-      <p:grpSpPr/>
-      <p:sp>
-        <p:nvSpPr>
-          <p:cNvPr id="2" name="Rectangle 1"/>
-          <p:cNvSpPr/>
-          <p:nvPr/>
-        </p:nvSpPr>
-        <p:spPr>
-          <a:xfrm>
-            <a:off x="0" y="0"/>
-            <a:ext cx="12191695" cy="6858000"/>
-          </a:xfrm>
-          <a:prstGeom prst="rect">
-            <a:avLst/>
-          </a:prstGeom>
-          <a:solidFill>
-            <a:srgbClr val="F5F8F9"/>
-          </a:solidFill>
-          <a:ln>
-            <a:noFill/>
-          </a:ln>
-          <a:effectLst/>
-        </p:spPr>
-        <p:style>
-          <a:lnRef idx="1">
-            <a:schemeClr val="accent1"/>
-          </a:lnRef>
-          <a:fillRef idx="3">
-            <a:schemeClr val="accent1"/>
-          </a:fillRef>
-          <a:effectRef idx="2">
-            <a:schemeClr val="accent1"/>
-          </a:effectRef>
-          <a:fontRef idx="minor">
-            <a:schemeClr val="lt1"/>
-          </a:fontRef>
-        </p:style>
-        <p:txBody>
-          <a:bodyPr rtlCol="0" anchor="ctr"/>
-          <a:lstStyle/>
-          <a:p>
-            <a:pPr algn="ctr"/>
-          </a:p>
-        </p:txBody>
-      </p:sp>
-      <p:sp>
-        <p:nvSpPr>
-          <p:cNvPr id="3" name="Rectangle 2"/>
-          <p:cNvSpPr/>
-          <p:nvPr/>
-        </p:nvSpPr>
-        <p:spPr>
-          <a:xfrm>
-            <a:off x="0" y="0"/>
-            <a:ext cx="12191695" cy="960120"/>
-          </a:xfrm>
-          <a:prstGeom prst="rect">
-            <a:avLst/>
-          </a:prstGeom>
-          <a:solidFill>
-            <a:srgbClr val="003C71"/>
-          </a:solidFill>
-          <a:ln>
-            <a:noFill/>
-          </a:ln>
-          <a:effectLst/>
-        </p:spPr>
-        <p:style>
-          <a:lnRef idx="1">
-            <a:schemeClr val="accent1"/>
-          </a:lnRef>
-          <a:fillRef idx="3">
-            <a:schemeClr val="accent1"/>
-          </a:fillRef>
-          <a:effectRef idx="2">
-            <a:schemeClr val="accent1"/>
-          </a:effectRef>
-          <a:fontRef idx="minor">
-            <a:schemeClr val="lt1"/>
-          </a:fontRef>
-        </p:style>
-        <p:txBody>
-          <a:bodyPr rtlCol="0" anchor="ctr"/>
-          <a:lstStyle/>
-          <a:p>
-            <a:pPr algn="ctr"/>
-          </a:p>
-        </p:txBody>
-      </p:sp>
-      <p:sp>
-        <p:nvSpPr>
-          <p:cNvPr id="4" name="Rectangle 3"/>
-          <p:cNvSpPr/>
-          <p:nvPr/>
-        </p:nvSpPr>
-        <p:spPr>
-          <a:xfrm>
-            <a:off x="0" y="960120"/>
-            <a:ext cx="12191695" cy="54864"/>
-          </a:xfrm>
-          <a:prstGeom prst="rect">
-            <a:avLst/>
-          </a:prstGeom>
-          <a:solidFill>
-            <a:srgbClr val="F2B705"/>
-          </a:solidFill>
-          <a:ln>
-            <a:noFill/>
-          </a:ln>
-          <a:effectLst/>
-        </p:spPr>
-        <p:style>
-          <a:lnRef idx="1">
-            <a:schemeClr val="accent1"/>
-          </a:lnRef>
-          <a:fillRef idx="3">
-            <a:schemeClr val="accent1"/>
-          </a:fillRef>
-          <a:effectRef idx="2">
-            <a:schemeClr val="accent1"/>
-          </a:effectRef>
-          <a:fontRef idx="minor">
-            <a:schemeClr val="lt1"/>
-          </a:fontRef>
-        </p:style>
-        <p:txBody>
-          <a:bodyPr rtlCol="0" anchor="ctr"/>
-          <a:lstStyle/>
-          <a:p>
-            <a:pPr algn="ctr"/>
-          </a:p>
-        </p:txBody>
-      </p:sp>
-      <p:sp>
-        <p:nvSpPr>
-          <p:cNvPr id="5" name="TextBox 4"/>
-          <p:cNvSpPr txBox="1"/>
-          <p:nvPr/>
-        </p:nvSpPr>
-        <p:spPr>
-          <a:xfrm>
-            <a:off x="457200" y="109728"/>
-            <a:ext cx="11247120" cy="777240"/>
-          </a:xfrm>
-          <a:prstGeom prst="rect">
-            <a:avLst/>
-          </a:prstGeom>
-          <a:noFill/>
-        </p:spPr>
-        <p:txBody>
-          <a:bodyPr wrap="square" anchor="ctr">
-            <a:spAutoFit/>
-          </a:bodyPr>
-          <a:lstStyle/>
-          <a:p>
-            <a:r>
-              <a:rPr sz="1300" b="1" i="0">
-                <a:solidFill>
-                  <a:srgbClr val="F2B705"/>
-                </a:solidFill>
-                <a:latin typeface="Malgun Gothic"/>
-                <a:ea typeface="Malgun Gothic"/>
-                <a:cs typeface="Malgun Gothic"/>
-              </a:rPr>
-              <a:t>REFERENCES   </a:t>
-            </a:r>
-            <a:r>
-              <a:rPr sz="2400" b="1" i="0">
-                <a:solidFill>
-                  <a:srgbClr val="FFFFFF"/>
-                </a:solidFill>
-                <a:latin typeface="Malgun Gothic"/>
-                <a:ea typeface="Malgun Gothic"/>
-                <a:cs typeface="Malgun Gothic"/>
-              </a:rPr>
-              <a:t>참고문헌</a:t>
-            </a:r>
-          </a:p>
-        </p:txBody>
-      </p:sp>
-      <p:sp>
-        <p:nvSpPr>
-          <p:cNvPr id="6" name="TextBox 5"/>
-          <p:cNvSpPr txBox="1"/>
-          <p:nvPr/>
-        </p:nvSpPr>
-        <p:spPr>
-          <a:xfrm>
-            <a:off x="457200" y="6446520"/>
-            <a:ext cx="11247120" cy="301752"/>
-          </a:xfrm>
-          <a:prstGeom prst="rect">
-            <a:avLst/>
-          </a:prstGeom>
-          <a:noFill/>
-        </p:spPr>
-        <p:txBody>
-          <a:bodyPr wrap="square" anchor="ctr">
-            <a:spAutoFit/>
-          </a:bodyPr>
-          <a:lstStyle/>
-          <a:p>
-            <a:r>
-              <a:rPr sz="900" b="0" i="0">
-                <a:solidFill>
-                  <a:srgbClr val="66788A"/>
-                </a:solidFill>
-                <a:latin typeface="Malgun Gothic"/>
-                <a:ea typeface="Malgun Gothic"/>
-                <a:cs typeface="Malgun Gothic"/>
-              </a:rPr>
-              <a:t>M01-W02-L02  ·  내분비계 요약: 호르몬과 되먹임</a:t>
-            </a:r>
-            <a:r>
-              <a:rPr sz="900" b="1" i="0">
-                <a:solidFill>
-                  <a:srgbClr val="003C71"/>
-                </a:solidFill>
-                <a:latin typeface="Malgun Gothic"/>
-                <a:ea typeface="Malgun Gothic"/>
-                <a:cs typeface="Malgun Gothic"/>
-              </a:rPr>
-              <a:t>      52</a:t>
-            </a:r>
-          </a:p>
-        </p:txBody>
-      </p:sp>
-      <p:sp>
-        <p:nvSpPr>
-          <p:cNvPr id="7" name="TextBox 6"/>
-          <p:cNvSpPr txBox="1"/>
-          <p:nvPr/>
-        </p:nvSpPr>
-        <p:spPr>
-          <a:xfrm>
-            <a:off x="640080" y="1280160"/>
-            <a:ext cx="10881360" cy="5029200"/>
-          </a:xfrm>
-          <a:prstGeom prst="rect">
-            <a:avLst/>
-          </a:prstGeom>
-          <a:noFill/>
-        </p:spPr>
-        <p:txBody>
-          <a:bodyPr wrap="square" anchor="t">
-            <a:spAutoFit/>
-          </a:bodyPr>
-          <a:lstStyle/>
-          <a:p>
-            <a:pPr>
-              <a:spcAft>
-                <a:spcPts val="900"/>
-              </a:spcAft>
-            </a:pPr>
-            <a:r>
-              <a:rPr sz="1600" b="1" i="0">
-                <a:solidFill>
-                  <a:srgbClr val="F2B705"/>
-                </a:solidFill>
-                <a:latin typeface="Malgun Gothic"/>
-                <a:ea typeface="Malgun Gothic"/>
-                <a:cs typeface="Malgun Gothic"/>
-              </a:rPr>
-              <a:t>•  </a:t>
-            </a:r>
-            <a:r>
-              <a:rPr sz="1600" b="0" i="0">
-                <a:solidFill>
-                  <a:srgbClr val="11202B"/>
-                </a:solidFill>
-                <a:latin typeface="Malgun Gothic"/>
-                <a:ea typeface="Malgun Gothic"/>
-                <a:cs typeface="Malgun Gothic"/>
-              </a:rPr>
-              <a:t>Melmed S, Auchus RJ, Goldfine AB, et al., eds. Williams Textbook of Endocrinology. 14th ed. Elsevier; 2020.</a:t>
-            </a:r>
-          </a:p>
-          <a:p>
-            <a:pPr>
-              <a:spcAft>
-                <a:spcPts val="900"/>
-              </a:spcAft>
-            </a:pPr>
-            <a:r>
-              <a:rPr sz="1600" b="1" i="0">
-                <a:solidFill>
-                  <a:srgbClr val="F2B705"/>
-                </a:solidFill>
-                <a:latin typeface="Malgun Gothic"/>
-                <a:ea typeface="Malgun Gothic"/>
-                <a:cs typeface="Malgun Gothic"/>
-              </a:rPr>
-              <a:t>•  </a:t>
-            </a:r>
-            <a:r>
-              <a:rPr sz="1600" b="0" i="0">
-                <a:solidFill>
-                  <a:srgbClr val="11202B"/>
-                </a:solidFill>
-                <a:latin typeface="Malgun Gothic"/>
-                <a:ea typeface="Malgun Gothic"/>
-                <a:cs typeface="Malgun Gothic"/>
-              </a:rPr>
-              <a:t>Hall JE, Hall ME. Guyton and Hall Textbook of Medical Physiology. 14th ed. Elsevier; 2021. Unit XIV, Endocrinology and Reproduction.</a:t>
-            </a:r>
-          </a:p>
-          <a:p>
-            <a:pPr>
-              <a:spcAft>
-                <a:spcPts val="900"/>
-              </a:spcAft>
-            </a:pPr>
-            <a:r>
-              <a:rPr sz="1600" b="1" i="0">
-                <a:solidFill>
-                  <a:srgbClr val="F2B705"/>
-                </a:solidFill>
-                <a:latin typeface="Malgun Gothic"/>
-                <a:ea typeface="Malgun Gothic"/>
-                <a:cs typeface="Malgun Gothic"/>
-              </a:rPr>
-              <a:t>•  </a:t>
-            </a:r>
-            <a:r>
-              <a:rPr sz="1600" b="0" i="0">
-                <a:solidFill>
-                  <a:srgbClr val="11202B"/>
-                </a:solidFill>
-                <a:latin typeface="Malgun Gothic"/>
-                <a:ea typeface="Malgun Gothic"/>
-                <a:cs typeface="Malgun Gothic"/>
-              </a:rPr>
-              <a:t>Boron WF, Boulpaep EL. Medical Physiology. 3rd ed. Elsevier; 2017. Section IX, The Endocrine System.</a:t>
-            </a:r>
-          </a:p>
-          <a:p>
-            <a:pPr>
-              <a:spcAft>
-                <a:spcPts val="900"/>
-              </a:spcAft>
-            </a:pPr>
-            <a:r>
-              <a:rPr sz="1600" b="1" i="0">
-                <a:solidFill>
-                  <a:srgbClr val="F2B705"/>
-                </a:solidFill>
-                <a:latin typeface="Malgun Gothic"/>
-                <a:ea typeface="Malgun Gothic"/>
-                <a:cs typeface="Malgun Gothic"/>
-              </a:rPr>
-              <a:t>•  </a:t>
-            </a:r>
-            <a:r>
-              <a:rPr sz="1600" b="0" i="0">
-                <a:solidFill>
-                  <a:srgbClr val="11202B"/>
-                </a:solidFill>
-                <a:latin typeface="Malgun Gothic"/>
-                <a:ea typeface="Malgun Gothic"/>
-                <a:cs typeface="Malgun Gothic"/>
-              </a:rPr>
-              <a:t>Molina PE. Endocrine Physiology. 5th ed. McGraw Hill; 2018.</a:t>
-            </a:r>
-          </a:p>
-          <a:p>
-            <a:pPr>
-              <a:spcAft>
-                <a:spcPts val="900"/>
-              </a:spcAft>
-            </a:pPr>
-            <a:r>
-              <a:rPr sz="1600" b="1" i="0">
-                <a:solidFill>
-                  <a:srgbClr val="F2B705"/>
-                </a:solidFill>
-                <a:latin typeface="Malgun Gothic"/>
-                <a:ea typeface="Malgun Gothic"/>
-                <a:cs typeface="Malgun Gothic"/>
-              </a:rPr>
-              <a:t>•  </a:t>
-            </a:r>
-            <a:r>
-              <a:rPr sz="1600" b="0" i="0">
-                <a:solidFill>
-                  <a:srgbClr val="11202B"/>
-                </a:solidFill>
-                <a:latin typeface="Malgun Gothic"/>
-                <a:ea typeface="Malgun Gothic"/>
-                <a:cs typeface="Malgun Gothic"/>
-              </a:rPr>
-              <a:t>Costanzo LS. Physiology. 7th ed. Elsevier; 2022. Chapter 9, Endocrine Physiology.</a:t>
-            </a:r>
-          </a:p>
-          <a:p>
-            <a:pPr>
-              <a:spcAft>
-                <a:spcPts val="900"/>
-              </a:spcAft>
-            </a:pPr>
-            <a:r>
-              <a:rPr sz="1600" b="1" i="0">
-                <a:solidFill>
-                  <a:srgbClr val="F2B705"/>
-                </a:solidFill>
-                <a:latin typeface="Malgun Gothic"/>
-                <a:ea typeface="Malgun Gothic"/>
-                <a:cs typeface="Malgun Gothic"/>
-              </a:rPr>
-              <a:t>•  </a:t>
-            </a:r>
-            <a:r>
-              <a:rPr sz="1600" b="0" i="0">
-                <a:solidFill>
-                  <a:srgbClr val="11202B"/>
-                </a:solidFill>
-                <a:latin typeface="Malgun Gothic"/>
-                <a:ea typeface="Malgun Gothic"/>
-                <a:cs typeface="Malgun Gothic"/>
-              </a:rPr>
-              <a:t>Ferrier DR. Lippincott Illustrated Reviews: Biochemistry. 8th ed. Wolters Kluwer; 2023. Chapters 23 and 24.</a:t>
             </a:r>
           </a:p>
         </p:txBody>

--- a/curriculum/M01/W02/L02/slides.pptx
+++ b/curriculum/M01/W02/L02/slides.pptx
@@ -8227,51 +8227,7 @@
                 <a:ea typeface="Malgun Gothic"/>
                 <a:cs typeface="Malgun Gothic"/>
               </a:rPr>
-              <a:t>: 조절 대상의 현재 값을 읽는다. 2. </a:t>
-            </a:r>
-            <a:r>
-              <a:rPr sz="1400" b="1" i="0">
-                <a:solidFill>
-                  <a:srgbClr val="11202B"/>
-                </a:solidFill>
-                <a:latin typeface="Malgun Gothic"/>
-                <a:ea typeface="Malgun Gothic"/>
-                <a:cs typeface="Malgun Gothic"/>
-              </a:rPr>
-              <a:t>비교·명령 중추</a:t>
-            </a:r>
-            <a:r>
-              <a:rPr sz="1400" b="0" i="0">
-                <a:solidFill>
-                  <a:srgbClr val="11202B"/>
-                </a:solidFill>
-                <a:latin typeface="Malgun Gothic"/>
-                <a:ea typeface="Malgun Gothic"/>
-                <a:cs typeface="Malgun Gothic"/>
-              </a:rPr>
-              <a:t>: 현재 값을 기준값과 비교해 교정 명령을 낸다. 3. </a:t>
-            </a:r>
-            <a:r>
-              <a:rPr sz="1400" b="1" i="0">
-                <a:solidFill>
-                  <a:srgbClr val="11202B"/>
-                </a:solidFill>
-                <a:latin typeface="Malgun Gothic"/>
-                <a:ea typeface="Malgun Gothic"/>
-                <a:cs typeface="Malgun Gothic"/>
-              </a:rPr>
-              <a:t>실행기(effector)</a:t>
-            </a:r>
-            <a:r>
-              <a:rPr sz="1400" b="0" i="0">
-                <a:solidFill>
-                  <a:srgbClr val="11202B"/>
-                </a:solidFill>
-                <a:latin typeface="Malgun Gothic"/>
-                <a:ea typeface="Malgun Gothic"/>
-                <a:cs typeface="Malgun Gothic"/>
-              </a:rPr>
-              <a:t>: 명령에 따라 조절 대상을 바꾼다.</a:t>
+              <a:t>: 조절 대상의 현재 값을 읽는다.</a:t>
             </a:r>
           </a:p>
           <a:p>
@@ -8300,7 +8256,7 @@
                 <a:ea typeface="Malgun Gothic"/>
                 <a:cs typeface="Malgun Gothic"/>
               </a:rPr>
-              <a:t>핵심은 실행기의 작용 결과가 감지기로 </a:t>
+              <a:t>2. </a:t>
             </a:r>
             <a:r>
               <a:rPr sz="1400" b="1" i="0">
@@ -8311,7 +8267,7 @@
                 <a:ea typeface="Malgun Gothic"/>
                 <a:cs typeface="Malgun Gothic"/>
               </a:rPr>
-              <a:t>되돌아가</a:t>
+              <a:t>비교·명령 중추</a:t>
             </a:r>
             <a:r>
               <a:rPr sz="1400" b="0" i="0">
@@ -8322,7 +8278,7 @@
                 <a:ea typeface="Malgun Gothic"/>
                 <a:cs typeface="Malgun Gothic"/>
               </a:rPr>
-              <a:t> 명령을 줄인다는 점이다. 그 결과 조절 대상이 기준값 주위의 좁은 범위에 머문다. 혈당, 혈중 Ca²⁺, 체온, 혈장 삼투압이 모두 이 방식으로 유지된다.</a:t>
+              <a:t>: 현재 값을 기준값과 비교해 교정 명령을 낸다.</a:t>
             </a:r>
           </a:p>
           <a:p>
@@ -8351,7 +8307,7 @@
                 <a:ea typeface="Malgun Gothic"/>
                 <a:cs typeface="Malgun Gothic"/>
               </a:rPr>
-              <a:t>내분비계에서 음성 되먹임이 가장 정교하게 구현된 형태가 </a:t>
+              <a:t>3. </a:t>
             </a:r>
             <a:r>
               <a:rPr sz="1400" b="1" i="0">
@@ -8362,7 +8318,7 @@
                 <a:ea typeface="Malgun Gothic"/>
                 <a:cs typeface="Malgun Gothic"/>
               </a:rPr>
-              <a:t>시상하부–뇌하수체–표적기관 축(hypothalamic–pituitary–target axis)</a:t>
+              <a:t>실행기(effector)</a:t>
             </a:r>
             <a:r>
               <a:rPr sz="1400" b="0" i="0">
@@ -8373,7 +8329,7 @@
                 <a:ea typeface="Malgun Gothic"/>
                 <a:cs typeface="Malgun Gothic"/>
               </a:rPr>
-              <a:t> 이다. 세 단계의 계층 구조를 가진다.</a:t>
+              <a:t>: 명령에 따라 조절 대상을 바꾼다.</a:t>
             </a:r>
           </a:p>
           <a:p>
@@ -8402,6 +8358,108 @@
                 <a:ea typeface="Malgun Gothic"/>
                 <a:cs typeface="Malgun Gothic"/>
               </a:rPr>
+              <a:t>핵심은 실행기의 작용 결과가 감지기로 </a:t>
+            </a:r>
+            <a:r>
+              <a:rPr sz="1400" b="1" i="0">
+                <a:solidFill>
+                  <a:srgbClr val="11202B"/>
+                </a:solidFill>
+                <a:latin typeface="Malgun Gothic"/>
+                <a:ea typeface="Malgun Gothic"/>
+                <a:cs typeface="Malgun Gothic"/>
+              </a:rPr>
+              <a:t>되돌아가</a:t>
+            </a:r>
+            <a:r>
+              <a:rPr sz="1400" b="0" i="0">
+                <a:solidFill>
+                  <a:srgbClr val="11202B"/>
+                </a:solidFill>
+                <a:latin typeface="Malgun Gothic"/>
+                <a:ea typeface="Malgun Gothic"/>
+                <a:cs typeface="Malgun Gothic"/>
+              </a:rPr>
+              <a:t> 명령을 줄인다는 점이다. 그 결과 조절 대상이 기준값 주위의 좁은 범위에 머문다. 혈당, 혈중 Ca²⁺, 체온, 혈장 삼투압이 모두 이 방식으로 유지된다.</a:t>
+            </a:r>
+          </a:p>
+          <a:p>
+            <a:pPr>
+              <a:spcAft>
+                <a:spcPts val="900"/>
+              </a:spcAft>
+            </a:pPr>
+            <a:r>
+              <a:rPr sz="1400" b="1" i="0">
+                <a:solidFill>
+                  <a:srgbClr val="F2B705"/>
+                </a:solidFill>
+                <a:latin typeface="Malgun Gothic"/>
+                <a:ea typeface="Malgun Gothic"/>
+                <a:cs typeface="Malgun Gothic"/>
+              </a:rPr>
+              <a:t>•  </a:t>
+            </a:r>
+            <a:r>
+              <a:rPr sz="1400" b="0" i="0">
+                <a:solidFill>
+                  <a:srgbClr val="11202B"/>
+                </a:solidFill>
+                <a:latin typeface="Malgun Gothic"/>
+                <a:ea typeface="Malgun Gothic"/>
+                <a:cs typeface="Malgun Gothic"/>
+              </a:rPr>
+              <a:t>내분비계에서 음성 되먹임이 가장 정교하게 구현된 형태가 </a:t>
+            </a:r>
+            <a:r>
+              <a:rPr sz="1400" b="1" i="0">
+                <a:solidFill>
+                  <a:srgbClr val="11202B"/>
+                </a:solidFill>
+                <a:latin typeface="Malgun Gothic"/>
+                <a:ea typeface="Malgun Gothic"/>
+                <a:cs typeface="Malgun Gothic"/>
+              </a:rPr>
+              <a:t>시상하부–뇌하수체–표적기관 축(hypothalamic–pituitary–target axis)</a:t>
+            </a:r>
+            <a:r>
+              <a:rPr sz="1400" b="0" i="0">
+                <a:solidFill>
+                  <a:srgbClr val="11202B"/>
+                </a:solidFill>
+                <a:latin typeface="Malgun Gothic"/>
+                <a:ea typeface="Malgun Gothic"/>
+                <a:cs typeface="Malgun Gothic"/>
+              </a:rPr>
+              <a:t> 이다. 세 단계의 계층 구조를 가진다.</a:t>
+            </a:r>
+          </a:p>
+          <a:p>
+            <a:pPr>
+              <a:spcAft>
+                <a:spcPts val="900"/>
+              </a:spcAft>
+            </a:pPr>
+            <a:r>
+              <a:rPr sz="1400" b="1" i="0">
+                <a:solidFill>
+                  <a:srgbClr val="F2B705"/>
+                </a:solidFill>
+                <a:latin typeface="Malgun Gothic"/>
+                <a:ea typeface="Malgun Gothic"/>
+                <a:cs typeface="Malgun Gothic"/>
+              </a:rPr>
+              <a:t>•  </a:t>
+            </a:r>
+            <a:r>
+              <a:rPr sz="1400" b="0" i="0">
+                <a:solidFill>
+                  <a:srgbClr val="11202B"/>
+                </a:solidFill>
+                <a:latin typeface="Malgun Gothic"/>
+                <a:ea typeface="Malgun Gothic"/>
+                <a:cs typeface="Malgun Gothic"/>
+              </a:rPr>
               <a:t>1. </a:t>
             </a:r>
             <a:r>
@@ -8424,11 +8482,40 @@
                 <a:ea typeface="Malgun Gothic"/>
                 <a:cs typeface="Malgun Gothic"/>
               </a:rPr>
-              <a:t>가 방출 호르몬(releasing hormone)을 내보낸다. 이 호르몬은 전신 혈액이 아니라 시상하부와 뇌하수체 전엽을 잇는 특수한 혈관(hypophyseal portal system)으로 바로 전달된다. 적은 양으로 충분하고 전신에 영향을 주지 않는다. 2. </a:t>
-            </a:r>
+              <a:t>가 방출 호르몬(releasing hormone)을 내보낸다. 이 호르몬은 전신 혈액이 아니라 시상하부와 뇌하수체 전엽을 잇는 특수한 혈관(hypophyseal portal system)으로 바로 전달된다. 적은 양으로 충분하고 전신에 영향을 주지 않는다.</a:t>
+            </a:r>
+          </a:p>
+          <a:p>
+            <a:pPr>
+              <a:spcAft>
+                <a:spcPts val="900"/>
+              </a:spcAft>
+            </a:pPr>
             <a:r>
               <a:rPr sz="1400" b="1" i="0">
                 <a:solidFill>
+                  <a:srgbClr val="F2B705"/>
+                </a:solidFill>
+                <a:latin typeface="Malgun Gothic"/>
+                <a:ea typeface="Malgun Gothic"/>
+                <a:cs typeface="Malgun Gothic"/>
+              </a:rPr>
+              <a:t>•  </a:t>
+            </a:r>
+            <a:r>
+              <a:rPr sz="1400" b="0" i="0">
+                <a:solidFill>
+                  <a:srgbClr val="11202B"/>
+                </a:solidFill>
+                <a:latin typeface="Malgun Gothic"/>
+                <a:ea typeface="Malgun Gothic"/>
+                <a:cs typeface="Malgun Gothic"/>
+              </a:rPr>
+              <a:t>2. </a:t>
+            </a:r>
+            <a:r>
+              <a:rPr sz="1400" b="1" i="0">
+                <a:solidFill>
                   <a:srgbClr val="11202B"/>
                 </a:solidFill>
                 <a:latin typeface="Malgun Gothic"/>
@@ -8446,7 +8533,36 @@
                 <a:ea typeface="Malgun Gothic"/>
                 <a:cs typeface="Malgun Gothic"/>
               </a:rPr>
-              <a:t>이 자극 호르몬(tropic hormone)을 전신 혈액으로 내보낸다. 3. </a:t>
+              <a:t>이 자극 호르몬(tropic hormone)을 전신 혈액으로 내보낸다.</a:t>
+            </a:r>
+          </a:p>
+          <a:p>
+            <a:pPr>
+              <a:spcAft>
+                <a:spcPts val="900"/>
+              </a:spcAft>
+            </a:pPr>
+            <a:r>
+              <a:rPr sz="1400" b="1" i="0">
+                <a:solidFill>
+                  <a:srgbClr val="F2B705"/>
+                </a:solidFill>
+                <a:latin typeface="Malgun Gothic"/>
+                <a:ea typeface="Malgun Gothic"/>
+                <a:cs typeface="Malgun Gothic"/>
+              </a:rPr>
+              <a:t>•  </a:t>
+            </a:r>
+            <a:r>
+              <a:rPr sz="1400" b="0" i="0">
+                <a:solidFill>
+                  <a:srgbClr val="11202B"/>
+                </a:solidFill>
+                <a:latin typeface="Malgun Gothic"/>
+                <a:ea typeface="Malgun Gothic"/>
+                <a:cs typeface="Malgun Gothic"/>
+              </a:rPr>
+              <a:t>3. </a:t>
             </a:r>
             <a:r>
               <a:rPr sz="1400" b="1" i="0">
@@ -12917,11 +13033,40 @@
                 <a:ea typeface="Malgun Gothic"/>
                 <a:cs typeface="Malgun Gothic"/>
               </a:rPr>
-              <a:t> 가 혈액의 I⁻을 세포 안으로 능동적으로 들여온다. 혈액보다 30배 이상 농축한다. 2. </a:t>
-            </a:r>
+              <a:t> 가 혈액의 I⁻을 세포 안으로 능동적으로 들여온다. 혈액보다 30배 이상 농축한다.</a:t>
+            </a:r>
+          </a:p>
+          <a:p>
+            <a:pPr>
+              <a:spcAft>
+                <a:spcPts val="900"/>
+              </a:spcAft>
+            </a:pPr>
             <a:r>
               <a:rPr sz="1400" b="1" i="0">
                 <a:solidFill>
+                  <a:srgbClr val="F2B705"/>
+                </a:solidFill>
+                <a:latin typeface="Malgun Gothic"/>
+                <a:ea typeface="Malgun Gothic"/>
+                <a:cs typeface="Malgun Gothic"/>
+              </a:rPr>
+              <a:t>•  </a:t>
+            </a:r>
+            <a:r>
+              <a:rPr sz="1400" b="0" i="0">
+                <a:solidFill>
+                  <a:srgbClr val="11202B"/>
+                </a:solidFill>
+                <a:latin typeface="Malgun Gothic"/>
+                <a:ea typeface="Malgun Gothic"/>
+                <a:cs typeface="Malgun Gothic"/>
+              </a:rPr>
+              <a:t>2. </a:t>
+            </a:r>
+            <a:r>
+              <a:rPr sz="1400" b="1" i="0">
+                <a:solidFill>
                   <a:srgbClr val="11202B"/>
                 </a:solidFill>
                 <a:latin typeface="Malgun Gothic"/>
@@ -12939,11 +13084,40 @@
                 <a:ea typeface="Malgun Gothic"/>
                 <a:cs typeface="Malgun Gothic"/>
               </a:rPr>
-              <a:t>: 세포가 thyroglobulin을 만들어 colloid로 내보낸다. 이 단백질에는 tyrosine 잔기가 많다. 3. </a:t>
-            </a:r>
+              <a:t>: 세포가 thyroglobulin을 만들어 colloid로 내보낸다. 이 단백질에는 tyrosine 잔기가 많다.</a:t>
+            </a:r>
+          </a:p>
+          <a:p>
+            <a:pPr>
+              <a:spcAft>
+                <a:spcPts val="900"/>
+              </a:spcAft>
+            </a:pPr>
             <a:r>
               <a:rPr sz="1400" b="1" i="0">
                 <a:solidFill>
+                  <a:srgbClr val="F2B705"/>
+                </a:solidFill>
+                <a:latin typeface="Malgun Gothic"/>
+                <a:ea typeface="Malgun Gothic"/>
+                <a:cs typeface="Malgun Gothic"/>
+              </a:rPr>
+              <a:t>•  </a:t>
+            </a:r>
+            <a:r>
+              <a:rPr sz="1400" b="0" i="0">
+                <a:solidFill>
+                  <a:srgbClr val="11202B"/>
+                </a:solidFill>
+                <a:latin typeface="Malgun Gothic"/>
+                <a:ea typeface="Malgun Gothic"/>
+                <a:cs typeface="Malgun Gothic"/>
+              </a:rPr>
+              <a:t>3. </a:t>
+            </a:r>
+            <a:r>
+              <a:rPr sz="1400" b="1" i="0">
+                <a:solidFill>
                   <a:srgbClr val="11202B"/>
                 </a:solidFill>
                 <a:latin typeface="Malgun Gothic"/>
@@ -12983,11 +13157,40 @@
                 <a:ea typeface="Malgun Gothic"/>
                 <a:cs typeface="Malgun Gothic"/>
               </a:rPr>
-              <a:t> 가 I⁻을 산화하고, thyroglobulin의 tyrosine 잔기에 붙인다. Iodine이 하나 붙으면 monoiodotyrosine(MIT), 둘 붙으면 diiodotyrosine(DIT)이 된다. 4. </a:t>
-            </a:r>
+              <a:t> 가 I⁻을 산화하고, thyroglobulin의 tyrosine 잔기에 붙인다. Iodine이 하나 붙으면 monoiodotyrosine(MIT), 둘 붙으면 diiodotyrosine(DIT)이 된다.</a:t>
+            </a:r>
+          </a:p>
+          <a:p>
+            <a:pPr>
+              <a:spcAft>
+                <a:spcPts val="900"/>
+              </a:spcAft>
+            </a:pPr>
             <a:r>
               <a:rPr sz="1400" b="1" i="0">
                 <a:solidFill>
+                  <a:srgbClr val="F2B705"/>
+                </a:solidFill>
+                <a:latin typeface="Malgun Gothic"/>
+                <a:ea typeface="Malgun Gothic"/>
+                <a:cs typeface="Malgun Gothic"/>
+              </a:rPr>
+              <a:t>•  </a:t>
+            </a:r>
+            <a:r>
+              <a:rPr sz="1400" b="0" i="0">
+                <a:solidFill>
+                  <a:srgbClr val="11202B"/>
+                </a:solidFill>
+                <a:latin typeface="Malgun Gothic"/>
+                <a:ea typeface="Malgun Gothic"/>
+                <a:cs typeface="Malgun Gothic"/>
+              </a:rPr>
+              <a:t>4. </a:t>
+            </a:r>
+            <a:r>
+              <a:rPr sz="1400" b="1" i="0">
+                <a:solidFill>
                   <a:srgbClr val="11202B"/>
                 </a:solidFill>
                 <a:latin typeface="Malgun Gothic"/>
@@ -13049,7 +13252,36 @@
                 <a:ea typeface="Malgun Gothic"/>
                 <a:cs typeface="Malgun Gothic"/>
               </a:rPr>
-              <a:t>(iodine 3개). 이 상태로 thyroglobulin에 붙어 colloid에 저장된다. 5. </a:t>
+              <a:t>(iodine 3개). 이 상태로 thyroglobulin에 붙어 colloid에 저장된다.</a:t>
+            </a:r>
+          </a:p>
+          <a:p>
+            <a:pPr>
+              <a:spcAft>
+                <a:spcPts val="900"/>
+              </a:spcAft>
+            </a:pPr>
+            <a:r>
+              <a:rPr sz="1400" b="1" i="0">
+                <a:solidFill>
+                  <a:srgbClr val="F2B705"/>
+                </a:solidFill>
+                <a:latin typeface="Malgun Gothic"/>
+                <a:ea typeface="Malgun Gothic"/>
+                <a:cs typeface="Malgun Gothic"/>
+              </a:rPr>
+              <a:t>•  </a:t>
+            </a:r>
+            <a:r>
+              <a:rPr sz="1400" b="0" i="0">
+                <a:solidFill>
+                  <a:srgbClr val="11202B"/>
+                </a:solidFill>
+                <a:latin typeface="Malgun Gothic"/>
+                <a:ea typeface="Malgun Gothic"/>
+                <a:cs typeface="Malgun Gothic"/>
+              </a:rPr>
+              <a:t>5. </a:t>
             </a:r>
             <a:r>
               <a:rPr sz="1400" b="1" i="0">

--- a/curriculum/M01/W02/L02/slides.pptx
+++ b/curriculum/M01/W02/L02/slides.pptx
@@ -15371,7 +15371,7 @@
                 <a:ea typeface="Malgun Gothic"/>
                 <a:cs typeface="Malgun Gothic"/>
               </a:rPr>
-              <a:t>M01-W01-L01 순환계 요약 — RAAS, aldosterone, 혈압 조절</a:t>
+              <a:t>M01-W01-L01 순환계 요약: 심장·혈관·혈류와 항상성 — RAAS, aldosterone, 혈압 조절</a:t>
             </a:r>
           </a:p>
           <a:p>
@@ -15400,7 +15400,7 @@
                 <a:ea typeface="Malgun Gothic"/>
                 <a:cs typeface="Malgun Gothic"/>
               </a:rPr>
-              <a:t>M01-W02-L01 신장 요약 — aldosterone과 ADH의 작용 지점, vitamin D 활성화, PTH</a:t>
+              <a:t>M01-W02-L01 신장·비뇨계 요약: 배설·체액·전해질 조절 — aldosterone과 ADH의 작용 지점, vitamin D 활성화, PTH</a:t>
             </a:r>
           </a:p>
           <a:p>

--- a/curriculum/M01/W02/L02/slides.pptx
+++ b/curriculum/M01/W02/L02/slides.pptx
@@ -6824,6 +6824,57 @@
                 <a:ea typeface="Malgun Gothic"/>
                 <a:cs typeface="Malgun Gothic"/>
               </a:rPr>
+              <a:t>앞 절에서 구조가 호르몬의 성질을 정한다고 했다. 그 성질 가운데 가장 중요한 것이 </a:t>
+            </a:r>
+            <a:r>
+              <a:rPr sz="1400" b="1" i="0">
+                <a:solidFill>
+                  <a:srgbClr val="11202B"/>
+                </a:solidFill>
+                <a:latin typeface="Malgun Gothic"/>
+                <a:ea typeface="Malgun Gothic"/>
+                <a:cs typeface="Malgun Gothic"/>
+              </a:rPr>
+              <a:t>막을 통과할 수 있는가</a:t>
+            </a:r>
+            <a:r>
+              <a:rPr sz="1400" b="0" i="0">
+                <a:solidFill>
+                  <a:srgbClr val="11202B"/>
+                </a:solidFill>
+                <a:latin typeface="Malgun Gothic"/>
+                <a:ea typeface="Malgun Gothic"/>
+                <a:cs typeface="Malgun Gothic"/>
+              </a:rPr>
+              <a:t>이다. 통과할 수 있으면 세포 안에서, 없으면 세포 표면에서 수용체를 만나야 한다. 이 하나의 차이가 반응이 나타나는 속도와 지속 시간을 가른다.</a:t>
+            </a:r>
+          </a:p>
+          <a:p>
+            <a:pPr>
+              <a:spcAft>
+                <a:spcPts val="900"/>
+              </a:spcAft>
+            </a:pPr>
+            <a:r>
+              <a:rPr sz="1400" b="1" i="0">
+                <a:solidFill>
+                  <a:srgbClr val="F2B705"/>
+                </a:solidFill>
+                <a:latin typeface="Malgun Gothic"/>
+                <a:ea typeface="Malgun Gothic"/>
+                <a:cs typeface="Malgun Gothic"/>
+              </a:rPr>
+              <a:t>•  </a:t>
+            </a:r>
+            <a:r>
+              <a:rPr sz="1400" b="0" i="0">
+                <a:solidFill>
+                  <a:srgbClr val="11202B"/>
+                </a:solidFill>
+                <a:latin typeface="Malgun Gothic"/>
+                <a:ea typeface="Malgun Gothic"/>
+                <a:cs typeface="Malgun Gothic"/>
+              </a:rPr>
               <a:t>호르몬이 표적 세포에서 반응을 일으키는 경로는 수용체의 위치에 따라 둘로 나뉜다.</a:t>
             </a:r>
           </a:p>
@@ -8128,6 +8179,35 @@
             <a:spAutoFit/>
           </a:bodyPr>
           <a:lstStyle/>
+          <a:p>
+            <a:pPr>
+              <a:spcAft>
+                <a:spcPts val="900"/>
+              </a:spcAft>
+            </a:pPr>
+            <a:r>
+              <a:rPr sz="1400" b="1" i="0">
+                <a:solidFill>
+                  <a:srgbClr val="F2B705"/>
+                </a:solidFill>
+                <a:latin typeface="Malgun Gothic"/>
+                <a:ea typeface="Malgun Gothic"/>
+                <a:cs typeface="Malgun Gothic"/>
+              </a:rPr>
+              <a:t>•  </a:t>
+            </a:r>
+            <a:r>
+              <a:rPr sz="1400" b="0" i="0">
+                <a:solidFill>
+                  <a:srgbClr val="11202B"/>
+                </a:solidFill>
+                <a:latin typeface="Malgun Gothic"/>
+                <a:ea typeface="Malgun Gothic"/>
+                <a:cs typeface="Malgun Gothic"/>
+              </a:rPr>
+              <a:t>앞의 두 절은 호르몬 하나가 어떻게 작용하는지를 다루었다. 그런데 호르몬이 계속 나오기만 하면 조절이 아니라 폭주가 된다. 멈추는 장치가 있어야 한다. 이 절은 그 장치를 다루며, 여기서 세우는 구조가 뒤에 나오는 모든 내분비 축과 질환 해석의 틀이 된다.</a:t>
+            </a:r>
+          </a:p>
           <a:p>
             <a:pPr>
               <a:spcAft>
@@ -11295,6 +11375,46 @@
                 <a:ea typeface="Malgun Gothic"/>
                 <a:cs typeface="Malgun Gothic"/>
               </a:rPr>
+              <a:t>앞 절의 축에서 가운데 자리를 차지한 것이 뇌하수체였다. 그런데 이 기관은 겉보기와 달리 하나가 아니다. 발생 기원이 다른 두 덩어리가 붙어 있고, 그래서 작동 방식도 전혀 다르다. </a:t>
+            </a:r>
+            <a:r>
+              <a:rPr sz="1400" b="1" i="0">
+                <a:solidFill>
+                  <a:srgbClr val="11202B"/>
+                </a:solidFill>
+                <a:latin typeface="Malgun Gothic"/>
+                <a:ea typeface="Malgun Gothic"/>
+                <a:cs typeface="Malgun Gothic"/>
+              </a:rPr>
+              <a:t>이 사실 하나를 알면 두 엽의 호르몬 목록을 외우지 않아도 어느 쪽 것인지 가려낼 수 있다.</a:t>
+            </a:r>
+          </a:p>
+          <a:p>
+            <a:pPr>
+              <a:spcAft>
+                <a:spcPts val="900"/>
+              </a:spcAft>
+            </a:pPr>
+            <a:r>
+              <a:rPr sz="1400" b="1" i="0">
+                <a:solidFill>
+                  <a:srgbClr val="F2B705"/>
+                </a:solidFill>
+                <a:latin typeface="Malgun Gothic"/>
+                <a:ea typeface="Malgun Gothic"/>
+                <a:cs typeface="Malgun Gothic"/>
+              </a:rPr>
+              <a:t>•  </a:t>
+            </a:r>
+            <a:r>
+              <a:rPr sz="1400" b="0" i="0">
+                <a:solidFill>
+                  <a:srgbClr val="11202B"/>
+                </a:solidFill>
+                <a:latin typeface="Malgun Gothic"/>
+                <a:ea typeface="Malgun Gothic"/>
+                <a:cs typeface="Malgun Gothic"/>
+              </a:rPr>
               <a:t>뇌하수체는 하나의 구조물처럼 보이지만 발생 과정과 작동 방식이 전혀 다른 두 부분이 붙어 있는 것이다. 이 사실을 알면 두 엽의 호르몬 목록을 외우지 않아도 구분할 수 있다.</a:t>
             </a:r>
           </a:p>
@@ -12836,6 +12956,57 @@
                 <a:ea typeface="Malgun Gothic"/>
                 <a:cs typeface="Malgun Gothic"/>
               </a:rPr>
+              <a:t>앞 절에서 뇌하수체가 여러 축의 가운데 자리라고 했다. 이제 그 축을 하나씩 따라 내려간다. 갑상샘부터 보는 이유는 그 호르몬이 거의 모든 세포에 작용해 </a:t>
+            </a:r>
+            <a:r>
+              <a:rPr sz="1400" b="1" i="0">
+                <a:solidFill>
+                  <a:srgbClr val="11202B"/>
+                </a:solidFill>
+                <a:latin typeface="Malgun Gothic"/>
+                <a:ea typeface="Malgun Gothic"/>
+                <a:cs typeface="Malgun Gothic"/>
+              </a:rPr>
+              <a:t>기초대사율 자체를 정하기</a:t>
+            </a:r>
+            <a:r>
+              <a:rPr sz="1400" b="0" i="0">
+                <a:solidFill>
+                  <a:srgbClr val="11202B"/>
+                </a:solidFill>
+                <a:latin typeface="Malgun Gothic"/>
+                <a:ea typeface="Malgun Gothic"/>
+                <a:cs typeface="Malgun Gothic"/>
+              </a:rPr>
+              <a:t> 때문이고, 또 합성 과정이 독특해 그 단계마다 질환과 약이 대응하기 때문이다.</a:t>
+            </a:r>
+          </a:p>
+          <a:p>
+            <a:pPr>
+              <a:spcAft>
+                <a:spcPts val="900"/>
+              </a:spcAft>
+            </a:pPr>
+            <a:r>
+              <a:rPr sz="1400" b="1" i="0">
+                <a:solidFill>
+                  <a:srgbClr val="F2B705"/>
+                </a:solidFill>
+                <a:latin typeface="Malgun Gothic"/>
+                <a:ea typeface="Malgun Gothic"/>
+                <a:cs typeface="Malgun Gothic"/>
+              </a:rPr>
+              <a:t>•  </a:t>
+            </a:r>
+            <a:r>
+              <a:rPr sz="1400" b="0" i="0">
+                <a:solidFill>
+                  <a:srgbClr val="11202B"/>
+                </a:solidFill>
+                <a:latin typeface="Malgun Gothic"/>
+                <a:ea typeface="Malgun Gothic"/>
+                <a:cs typeface="Malgun Gothic"/>
+              </a:rPr>
               <a:t>갑상샘 호르몬은 기초대사율을 정하는 호르몬이며, 거의 모든 세포에 수용체가 있다. 합성 과정이 독특해 단계별로 알아 둘 필요가 있다.</a:t>
             </a:r>
           </a:p>
@@ -14910,7 +15081,7 @@
               </a:spcAft>
             </a:pPr>
             <a:r>
-              <a:rPr sz="1800" b="1" i="0">
+              <a:rPr sz="1600" b="1" i="0">
                 <a:solidFill>
                   <a:srgbClr val="F2B705"/>
                 </a:solidFill>
@@ -14921,59 +15092,15 @@
               <a:t>•  </a:t>
             </a:r>
             <a:r>
-              <a:rPr sz="1800" b="0" i="0">
-                <a:solidFill>
-                  <a:srgbClr val="11202B"/>
-                </a:solidFill>
-                <a:latin typeface="Malgun Gothic"/>
-                <a:ea typeface="Malgun Gothic"/>
-                <a:cs typeface="Malgun Gothic"/>
-              </a:rPr>
-              <a:t>부신도 뇌하수체처럼 발생 기원이 다른 두 부분이 합쳐진 기관이다. 바깥의 </a:t>
-            </a:r>
-            <a:r>
-              <a:rPr sz="1800" b="1" i="0">
-                <a:solidFill>
-                  <a:srgbClr val="11202B"/>
-                </a:solidFill>
-                <a:latin typeface="Malgun Gothic"/>
-                <a:ea typeface="Malgun Gothic"/>
-                <a:cs typeface="Malgun Gothic"/>
-              </a:rPr>
-              <a:t>겉질(cortex)</a:t>
-            </a:r>
-            <a:r>
-              <a:rPr sz="1800" b="0" i="0">
-                <a:solidFill>
-                  <a:srgbClr val="11202B"/>
-                </a:solidFill>
-                <a:latin typeface="Malgun Gothic"/>
-                <a:ea typeface="Malgun Gothic"/>
-                <a:cs typeface="Malgun Gothic"/>
-              </a:rPr>
-              <a:t> 은 중배엽에서 유래한 steroid 생산 조직이고, 안의 </a:t>
-            </a:r>
-            <a:r>
-              <a:rPr sz="1800" b="1" i="0">
-                <a:solidFill>
-                  <a:srgbClr val="11202B"/>
-                </a:solidFill>
-                <a:latin typeface="Malgun Gothic"/>
-                <a:ea typeface="Malgun Gothic"/>
-                <a:cs typeface="Malgun Gothic"/>
-              </a:rPr>
-              <a:t>속질(medulla)</a:t>
-            </a:r>
-            <a:r>
-              <a:rPr sz="1800" b="0" i="0">
-                <a:solidFill>
-                  <a:srgbClr val="11202B"/>
-                </a:solidFill>
-                <a:latin typeface="Malgun Gothic"/>
-                <a:ea typeface="Malgun Gothic"/>
-                <a:cs typeface="Malgun Gothic"/>
-              </a:rPr>
-              <a:t> 은 신경능에서 유래한 변형된 신경 조직이다.</a:t>
+              <a:rPr sz="1600" b="0" i="0">
+                <a:solidFill>
+                  <a:srgbClr val="11202B"/>
+                </a:solidFill>
+                <a:latin typeface="Malgun Gothic"/>
+                <a:ea typeface="Malgun Gothic"/>
+                <a:cs typeface="Malgun Gothic"/>
+              </a:rPr>
+              <a:t>뇌하수체에서 보았던 구도가 여기서 되풀이된다. 부신 역시 발생 기원이 다른 두 부분이 한 기관처럼 붙어 있고, 만드는 호르몬의 종류도 작동 속도도 전혀 다르다. 같은 패턴이 두 번 나온다는 점에 주목하면 구조를 외우는 부담이 줄어든다.</a:t>
             </a:r>
           </a:p>
           <a:p>
@@ -14983,7 +15110,7 @@
               </a:spcAft>
             </a:pPr>
             <a:r>
-              <a:rPr sz="1800" b="1" i="0">
+              <a:rPr sz="1600" b="1" i="0">
                 <a:solidFill>
                   <a:srgbClr val="F2B705"/>
                 </a:solidFill>
@@ -14994,48 +15121,59 @@
               <a:t>•  </a:t>
             </a:r>
             <a:r>
-              <a:rPr sz="1800" b="1" i="0">
-                <a:solidFill>
-                  <a:srgbClr val="11202B"/>
-                </a:solidFill>
-                <a:latin typeface="Malgun Gothic"/>
-                <a:ea typeface="Malgun Gothic"/>
-                <a:cs typeface="Malgun Gothic"/>
-              </a:rPr>
-              <a:t>부신 속질</a:t>
-            </a:r>
-            <a:r>
-              <a:rPr sz="1800" b="0" i="0">
-                <a:solidFill>
-                  <a:srgbClr val="11202B"/>
-                </a:solidFill>
-                <a:latin typeface="Malgun Gothic"/>
-                <a:ea typeface="Malgun Gothic"/>
-                <a:cs typeface="Malgun Gothic"/>
-              </a:rPr>
-              <a:t>은 교감신경의 연장으로 보아야 한다. 교감신경절전 뉴런이 직접 자극하면 </a:t>
-            </a:r>
-            <a:r>
-              <a:rPr sz="1800" b="1" i="0">
-                <a:solidFill>
-                  <a:srgbClr val="11202B"/>
-                </a:solidFill>
-                <a:latin typeface="Malgun Gothic"/>
-                <a:ea typeface="Malgun Gothic"/>
-                <a:cs typeface="Malgun Gothic"/>
-              </a:rPr>
-              <a:t>epinephrine(약 80%)과 norepinephrine(약 20%)</a:t>
-            </a:r>
-            <a:r>
-              <a:rPr sz="1800" b="0" i="0">
-                <a:solidFill>
-                  <a:srgbClr val="11202B"/>
-                </a:solidFill>
-                <a:latin typeface="Malgun Gothic"/>
-                <a:ea typeface="Malgun Gothic"/>
-                <a:cs typeface="Malgun Gothic"/>
-              </a:rPr>
-              <a:t> 을 혈액으로 방출한다. 즉 신경 자극에 의해 호르몬이 나오는 구조이며, 교감신경 반응을 전신에 확산시키는 역할을 한다.</a:t>
+              <a:rPr sz="1600" b="0" i="0">
+                <a:solidFill>
+                  <a:srgbClr val="11202B"/>
+                </a:solidFill>
+                <a:latin typeface="Malgun Gothic"/>
+                <a:ea typeface="Malgun Gothic"/>
+                <a:cs typeface="Malgun Gothic"/>
+              </a:rPr>
+              <a:t>부신도 뇌하수체처럼 발생 기원이 다른 두 부분이 합쳐진 기관이다. 바깥의 </a:t>
+            </a:r>
+            <a:r>
+              <a:rPr sz="1600" b="1" i="0">
+                <a:solidFill>
+                  <a:srgbClr val="11202B"/>
+                </a:solidFill>
+                <a:latin typeface="Malgun Gothic"/>
+                <a:ea typeface="Malgun Gothic"/>
+                <a:cs typeface="Malgun Gothic"/>
+              </a:rPr>
+              <a:t>겉질(cortex)</a:t>
+            </a:r>
+            <a:r>
+              <a:rPr sz="1600" b="0" i="0">
+                <a:solidFill>
+                  <a:srgbClr val="11202B"/>
+                </a:solidFill>
+                <a:latin typeface="Malgun Gothic"/>
+                <a:ea typeface="Malgun Gothic"/>
+                <a:cs typeface="Malgun Gothic"/>
+              </a:rPr>
+              <a:t> 은 중배엽에서 유래한 steroid 생산 조직이고, 안의 </a:t>
+            </a:r>
+            <a:r>
+              <a:rPr sz="1600" b="1" i="0">
+                <a:solidFill>
+                  <a:srgbClr val="11202B"/>
+                </a:solidFill>
+                <a:latin typeface="Malgun Gothic"/>
+                <a:ea typeface="Malgun Gothic"/>
+                <a:cs typeface="Malgun Gothic"/>
+              </a:rPr>
+              <a:t>속질(medulla)</a:t>
+            </a:r>
+            <a:r>
+              <a:rPr sz="1600" b="0" i="0">
+                <a:solidFill>
+                  <a:srgbClr val="11202B"/>
+                </a:solidFill>
+                <a:latin typeface="Malgun Gothic"/>
+                <a:ea typeface="Malgun Gothic"/>
+                <a:cs typeface="Malgun Gothic"/>
+              </a:rPr>
+              <a:t> 은 신경능에서 유래한 변형된 신경 조직이다.</a:t>
             </a:r>
           </a:p>
           <a:p>
@@ -15045,7 +15183,7 @@
               </a:spcAft>
             </a:pPr>
             <a:r>
-              <a:rPr sz="1800" b="1" i="0">
+              <a:rPr sz="1600" b="1" i="0">
                 <a:solidFill>
                   <a:srgbClr val="F2B705"/>
                 </a:solidFill>
@@ -15056,7 +15194,69 @@
               <a:t>•  </a:t>
             </a:r>
             <a:r>
-              <a:rPr sz="1800" b="1" i="0">
+              <a:rPr sz="1600" b="1" i="0">
+                <a:solidFill>
+                  <a:srgbClr val="11202B"/>
+                </a:solidFill>
+                <a:latin typeface="Malgun Gothic"/>
+                <a:ea typeface="Malgun Gothic"/>
+                <a:cs typeface="Malgun Gothic"/>
+              </a:rPr>
+              <a:t>부신 속질</a:t>
+            </a:r>
+            <a:r>
+              <a:rPr sz="1600" b="0" i="0">
+                <a:solidFill>
+                  <a:srgbClr val="11202B"/>
+                </a:solidFill>
+                <a:latin typeface="Malgun Gothic"/>
+                <a:ea typeface="Malgun Gothic"/>
+                <a:cs typeface="Malgun Gothic"/>
+              </a:rPr>
+              <a:t>은 교감신경의 연장으로 보아야 한다. 교감신경절전 뉴런이 직접 자극하면 </a:t>
+            </a:r>
+            <a:r>
+              <a:rPr sz="1600" b="1" i="0">
+                <a:solidFill>
+                  <a:srgbClr val="11202B"/>
+                </a:solidFill>
+                <a:latin typeface="Malgun Gothic"/>
+                <a:ea typeface="Malgun Gothic"/>
+                <a:cs typeface="Malgun Gothic"/>
+              </a:rPr>
+              <a:t>epinephrine(약 80%)과 norepinephrine(약 20%)</a:t>
+            </a:r>
+            <a:r>
+              <a:rPr sz="1600" b="0" i="0">
+                <a:solidFill>
+                  <a:srgbClr val="11202B"/>
+                </a:solidFill>
+                <a:latin typeface="Malgun Gothic"/>
+                <a:ea typeface="Malgun Gothic"/>
+                <a:cs typeface="Malgun Gothic"/>
+              </a:rPr>
+              <a:t> 을 혈액으로 방출한다. 즉 신경 자극에 의해 호르몬이 나오는 구조이며, 교감신경 반응을 전신에 확산시키는 역할을 한다.</a:t>
+            </a:r>
+          </a:p>
+          <a:p>
+            <a:pPr>
+              <a:spcAft>
+                <a:spcPts val="900"/>
+              </a:spcAft>
+            </a:pPr>
+            <a:r>
+              <a:rPr sz="1600" b="1" i="0">
+                <a:solidFill>
+                  <a:srgbClr val="F2B705"/>
+                </a:solidFill>
+                <a:latin typeface="Malgun Gothic"/>
+                <a:ea typeface="Malgun Gothic"/>
+                <a:cs typeface="Malgun Gothic"/>
+              </a:rPr>
+              <a:t>•  </a:t>
+            </a:r>
+            <a:r>
+              <a:rPr sz="1600" b="1" i="0">
                 <a:solidFill>
                   <a:srgbClr val="11202B"/>
                 </a:solidFill>
@@ -15067,7 +15267,7 @@
               <a:t>부신 겉질</a:t>
             </a:r>
             <a:r>
-              <a:rPr sz="1800" b="0" i="0">
+              <a:rPr sz="1600" b="0" i="0">
                 <a:solidFill>
                   <a:srgbClr val="11202B"/>
                 </a:solidFill>
@@ -20310,6 +20510,46 @@
             <a:spAutoFit/>
           </a:bodyPr>
           <a:lstStyle/>
+          <a:p>
+            <a:pPr>
+              <a:spcAft>
+                <a:spcPts val="900"/>
+              </a:spcAft>
+            </a:pPr>
+            <a:r>
+              <a:rPr sz="1400" b="1" i="0">
+                <a:solidFill>
+                  <a:srgbClr val="F2B705"/>
+                </a:solidFill>
+                <a:latin typeface="Malgun Gothic"/>
+                <a:ea typeface="Malgun Gothic"/>
+                <a:cs typeface="Malgun Gothic"/>
+              </a:rPr>
+              <a:t>•  </a:t>
+            </a:r>
+            <a:r>
+              <a:rPr sz="1400" b="0" i="0">
+                <a:solidFill>
+                  <a:srgbClr val="11202B"/>
+                </a:solidFill>
+                <a:latin typeface="Malgun Gothic"/>
+                <a:ea typeface="Malgun Gothic"/>
+                <a:cs typeface="Malgun Gothic"/>
+              </a:rPr>
+              <a:t>앞 절에서 몸이 신경과 호르몬이라는 두 가지 방식으로 세포를 조율한다고 했다. 이제 호르몬 쪽으로 들어간다. 호르몬은 수십 종이지만 하나씩 외울 필요가 없다. </a:t>
+            </a:r>
+            <a:r>
+              <a:rPr sz="1400" b="1" i="0">
+                <a:solidFill>
+                  <a:srgbClr val="11202B"/>
+                </a:solidFill>
+                <a:latin typeface="Malgun Gothic"/>
+                <a:ea typeface="Malgun Gothic"/>
+                <a:cs typeface="Malgun Gothic"/>
+              </a:rPr>
+              <a:t>화학 구조가 세 가지뿐이고, 구조가 그 호르몬의 거의 모든 성질을 결정하기 때문이다.</a:t>
+            </a:r>
+          </a:p>
           <a:p>
             <a:pPr>
               <a:spcAft>
